--- a/proyecto_unificado/presentacion/presentacion_final.pptx
+++ b/proyecto_unificado/presentacion/presentacion_final.pptx
@@ -14,6 +14,7 @@
     <p:sldId id="262" r:id="rId13"/>
     <p:sldId id="263" r:id="rId14"/>
     <p:sldId id="264" r:id="rId15"/>
+    <p:sldId id="265" r:id="rId16"/>
   </p:sldIdLst>
   <p:sldSz cx="12191695" cy="6858000" type="screen4x3"/>
   <p:notesSz cx="6858000" cy="9144000"/>
@@ -3111,11 +3112,12 @@
             <a:avLst/>
           </a:prstGeom>
           <a:solidFill>
-            <a:srgbClr val="3B6AA0"/>
+            <a:srgbClr val="051C2C"/>
           </a:solidFill>
           <a:ln>
             <a:noFill/>
           </a:ln>
+          <a:effectLst/>
         </p:spPr>
         <p:style>
           <a:lnRef idx="1">
@@ -3147,18 +3149,19 @@
         </p:nvSpPr>
         <p:spPr>
           <a:xfrm>
-            <a:off x="0" y="4206240"/>
-            <a:ext cx="12191695" cy="73152"/>
+            <a:off x="731520" y="2286000"/>
+            <a:ext cx="731520" cy="54864"/>
           </a:xfrm>
           <a:prstGeom prst="rect">
             <a:avLst/>
           </a:prstGeom>
           <a:solidFill>
-            <a:srgbClr val="B3582D"/>
+            <a:srgbClr val="FE5000"/>
           </a:solidFill>
           <a:ln>
             <a:noFill/>
           </a:ln>
+          <a:effectLst/>
         </p:spPr>
         <p:style>
           <a:lnRef idx="1">
@@ -3191,7 +3194,7 @@
         <p:spPr>
           <a:xfrm>
             <a:off x="731520" y="1828800"/>
-            <a:ext cx="10728655" cy="1463040"/>
+            <a:ext cx="10972800" cy="274320"/>
           </a:xfrm>
           <a:prstGeom prst="rect">
             <a:avLst/>
@@ -3206,23 +3209,376 @@
           <a:p>
             <a:pPr algn="l"/>
             <a:r>
-              <a:rPr sz="4000" b="1">
+              <a:rPr sz="1100" b="1" i="0">
+                <a:solidFill>
+                  <a:srgbClr val="00A9E0"/>
+                </a:solidFill>
+                <a:latin typeface="Arial"/>
+              </a:rPr>
+              <a:t>UNIVERSIDAD IBEROAMERICANA · PRIMAVERA 2026</a:t>
+            </a:r>
+          </a:p>
+        </p:txBody>
+      </p:sp>
+      <p:sp>
+        <p:nvSpPr>
+          <p:cNvPr id="5" name="TextBox 4"/>
+          <p:cNvSpPr txBox="1"/>
+          <p:nvPr/>
+        </p:nvSpPr>
+        <p:spPr>
+          <a:xfrm>
+            <a:off x="731520" y="2560320"/>
+            <a:ext cx="10972800" cy="1645920"/>
+          </a:xfrm>
+          <a:prstGeom prst="rect">
+            <a:avLst/>
+          </a:prstGeom>
+          <a:noFill/>
+        </p:spPr>
+        <p:txBody>
+          <a:bodyPr wrap="square" anchor="t" lIns="0" rIns="0" tIns="0" bIns="0">
+            <a:spAutoFit/>
+          </a:bodyPr>
+          <a:lstStyle/>
+          <a:p>
+            <a:pPr algn="l"/>
+            <a:r>
+              <a:rPr sz="4000" b="1" i="0">
                 <a:solidFill>
                   <a:srgbClr val="FFFFFF"/>
                 </a:solidFill>
-                <a:latin typeface="Helvetica"/>
-              </a:rPr>
-              <a:t>Análisis de Readmisiones, Recurrencia y</a:t>
-            </a:r>
-            <a:br/>
-            <a:r>
-              <a:rPr sz="4000" b="1">
+                <a:latin typeface="Arial"/>
+              </a:rPr>
+              <a:t>Análisis de readmisiones,</a:t>
+            </a:r>
+          </a:p>
+          <a:p>
+            <a:pPr algn="l"/>
+            <a:r>
+              <a:rPr sz="4000" b="1" i="0">
                 <a:solidFill>
                   <a:srgbClr val="FFFFFF"/>
                 </a:solidFill>
-                <a:latin typeface="Helvetica"/>
-              </a:rPr>
-              <a:t>Estancia Hospitalaria</a:t>
+                <a:latin typeface="Arial"/>
+              </a:rPr>
+              <a:t>recurrencia y estancia hospitalaria</a:t>
+            </a:r>
+          </a:p>
+        </p:txBody>
+      </p:sp>
+      <p:sp>
+        <p:nvSpPr>
+          <p:cNvPr id="6" name="TextBox 5"/>
+          <p:cNvSpPr txBox="1"/>
+          <p:nvPr/>
+        </p:nvSpPr>
+        <p:spPr>
+          <a:xfrm>
+            <a:off x="731520" y="4297680"/>
+            <a:ext cx="10972800" cy="548640"/>
+          </a:xfrm>
+          <a:prstGeom prst="rect">
+            <a:avLst/>
+          </a:prstGeom>
+          <a:noFill/>
+        </p:spPr>
+        <p:txBody>
+          <a:bodyPr wrap="square" anchor="t" lIns="0" rIns="0" tIns="0" bIns="0">
+            <a:spAutoFit/>
+          </a:bodyPr>
+          <a:lstStyle/>
+          <a:p>
+            <a:pPr algn="l"/>
+            <a:r>
+              <a:rPr sz="1800" b="0" i="0">
+                <a:solidFill>
+                  <a:srgbClr val="00A9E0"/>
+                </a:solidFill>
+                <a:latin typeface="Arial"/>
+              </a:rPr>
+              <a:t>Identificación de pacientes con diabetes que concentran el riesgo operativo</a:t>
+            </a:r>
+          </a:p>
+        </p:txBody>
+      </p:sp>
+      <p:cxnSp>
+        <p:nvCxnSpPr>
+          <p:cNvPr id="7" name="Connector 6"/>
+          <p:cNvCxnSpPr/>
+          <p:nvPr/>
+        </p:nvCxnSpPr>
+        <p:spPr>
+          <a:xfrm>
+            <a:off x="731520" y="5303520"/>
+            <a:ext cx="3657600" cy="0"/>
+          </a:xfrm>
+          <a:prstGeom prst="line">
+            <a:avLst/>
+          </a:prstGeom>
+          <a:ln w="12700">
+            <a:solidFill>
+              <a:srgbClr val="00A9E0"/>
+            </a:solidFill>
+          </a:ln>
+        </p:spPr>
+        <p:style>
+          <a:lnRef idx="2">
+            <a:schemeClr val="accent1"/>
+          </a:lnRef>
+          <a:fillRef idx="0">
+            <a:schemeClr val="accent1"/>
+          </a:fillRef>
+          <a:effectRef idx="1">
+            <a:schemeClr val="accent1"/>
+          </a:effectRef>
+          <a:fontRef idx="minor">
+            <a:schemeClr val="tx1"/>
+          </a:fontRef>
+        </p:style>
+      </p:cxnSp>
+      <p:sp>
+        <p:nvSpPr>
+          <p:cNvPr id="8" name="TextBox 7"/>
+          <p:cNvSpPr txBox="1"/>
+          <p:nvPr/>
+        </p:nvSpPr>
+        <p:spPr>
+          <a:xfrm>
+            <a:off x="731520" y="5394960"/>
+            <a:ext cx="5486400" cy="274320"/>
+          </a:xfrm>
+          <a:prstGeom prst="rect">
+            <a:avLst/>
+          </a:prstGeom>
+          <a:noFill/>
+        </p:spPr>
+        <p:txBody>
+          <a:bodyPr wrap="square" anchor="t" lIns="0" rIns="0" tIns="0" bIns="0">
+            <a:spAutoFit/>
+          </a:bodyPr>
+          <a:lstStyle/>
+          <a:p>
+            <a:pPr algn="l"/>
+            <a:r>
+              <a:rPr sz="1300" b="1" i="0">
+                <a:solidFill>
+                  <a:srgbClr val="FFFFFF"/>
+                </a:solidFill>
+                <a:latin typeface="Arial"/>
+              </a:rPr>
+              <a:t>Hector Raul Becerril Villamil</a:t>
+            </a:r>
+          </a:p>
+        </p:txBody>
+      </p:sp>
+      <p:sp>
+        <p:nvSpPr>
+          <p:cNvPr id="9" name="TextBox 8"/>
+          <p:cNvSpPr txBox="1"/>
+          <p:nvPr/>
+        </p:nvSpPr>
+        <p:spPr>
+          <a:xfrm>
+            <a:off x="731520" y="5669280"/>
+            <a:ext cx="5486400" cy="274320"/>
+          </a:xfrm>
+          <a:prstGeom prst="rect">
+            <a:avLst/>
+          </a:prstGeom>
+          <a:noFill/>
+        </p:spPr>
+        <p:txBody>
+          <a:bodyPr wrap="square" anchor="t" lIns="0" rIns="0" tIns="0" bIns="0">
+            <a:spAutoFit/>
+          </a:bodyPr>
+          <a:lstStyle/>
+          <a:p>
+            <a:pPr algn="l"/>
+            <a:r>
+              <a:rPr sz="1300" b="1" i="0">
+                <a:solidFill>
+                  <a:srgbClr val="FFFFFF"/>
+                </a:solidFill>
+                <a:latin typeface="Arial"/>
+              </a:rPr>
+              <a:t>Elena Carolina Sánchez Araiza</a:t>
+            </a:r>
+          </a:p>
+        </p:txBody>
+      </p:sp>
+      <p:sp>
+        <p:nvSpPr>
+          <p:cNvPr id="10" name="TextBox 9"/>
+          <p:cNvSpPr txBox="1"/>
+          <p:nvPr/>
+        </p:nvSpPr>
+        <p:spPr>
+          <a:xfrm>
+            <a:off x="731520" y="6035040"/>
+            <a:ext cx="7315200" cy="274320"/>
+          </a:xfrm>
+          <a:prstGeom prst="rect">
+            <a:avLst/>
+          </a:prstGeom>
+          <a:noFill/>
+        </p:spPr>
+        <p:txBody>
+          <a:bodyPr wrap="square" anchor="t" lIns="0" rIns="0" tIns="0" bIns="0">
+            <a:spAutoFit/>
+          </a:bodyPr>
+          <a:lstStyle/>
+          <a:p>
+            <a:pPr algn="l"/>
+            <a:r>
+              <a:rPr sz="1100" b="0" i="0">
+                <a:solidFill>
+                  <a:srgbClr val="E1E1E1"/>
+                </a:solidFill>
+                <a:latin typeface="Arial"/>
+              </a:rPr>
+              <a:t>Prof. Rodrigo Cárdenas Domínguez · Mayo 2026</a:t>
+            </a:r>
+          </a:p>
+        </p:txBody>
+      </p:sp>
+    </p:spTree>
+  </p:cSld>
+  <p:clrMapOvr>
+    <a:masterClrMapping/>
+  </p:clrMapOvr>
+</p:sld>
+</file>
+
+<file path=ppt/slides/slide10.xml><?xml version="1.0" encoding="utf-8"?>
+<p:sld xmlns:a="http://schemas.openxmlformats.org/drawingml/2006/main" xmlns:p="http://schemas.openxmlformats.org/presentationml/2006/main" xmlns:r="http://schemas.openxmlformats.org/officeDocument/2006/relationships">
+  <p:cSld>
+    <p:spTree>
+      <p:nvGrpSpPr>
+        <p:cNvPr id="1" name=""/>
+        <p:cNvGrpSpPr/>
+        <p:nvPr/>
+      </p:nvGrpSpPr>
+      <p:grpSpPr/>
+      <p:sp>
+        <p:nvSpPr>
+          <p:cNvPr id="2" name="Rectangle 1"/>
+          <p:cNvSpPr/>
+          <p:nvPr/>
+        </p:nvSpPr>
+        <p:spPr>
+          <a:xfrm>
+            <a:off x="0" y="0"/>
+            <a:ext cx="12191695" cy="6858000"/>
+          </a:xfrm>
+          <a:prstGeom prst="rect">
+            <a:avLst/>
+          </a:prstGeom>
+          <a:solidFill>
+            <a:srgbClr val="051C2C"/>
+          </a:solidFill>
+          <a:ln>
+            <a:noFill/>
+          </a:ln>
+          <a:effectLst/>
+        </p:spPr>
+        <p:style>
+          <a:lnRef idx="1">
+            <a:schemeClr val="accent1"/>
+          </a:lnRef>
+          <a:fillRef idx="3">
+            <a:schemeClr val="accent1"/>
+          </a:fillRef>
+          <a:effectRef idx="2">
+            <a:schemeClr val="accent1"/>
+          </a:effectRef>
+          <a:fontRef idx="minor">
+            <a:schemeClr val="lt1"/>
+          </a:fontRef>
+        </p:style>
+        <p:txBody>
+          <a:bodyPr rtlCol="0" anchor="ctr"/>
+          <a:lstStyle/>
+          <a:p>
+            <a:pPr algn="ctr"/>
+          </a:p>
+        </p:txBody>
+      </p:sp>
+      <p:sp>
+        <p:nvSpPr>
+          <p:cNvPr id="3" name="Rectangle 2"/>
+          <p:cNvSpPr/>
+          <p:nvPr/>
+        </p:nvSpPr>
+        <p:spPr>
+          <a:xfrm>
+            <a:off x="731520" y="1828800"/>
+            <a:ext cx="548640" cy="45720"/>
+          </a:xfrm>
+          <a:prstGeom prst="rect">
+            <a:avLst/>
+          </a:prstGeom>
+          <a:solidFill>
+            <a:srgbClr val="FE5000"/>
+          </a:solidFill>
+          <a:ln>
+            <a:noFill/>
+          </a:ln>
+          <a:effectLst/>
+        </p:spPr>
+        <p:style>
+          <a:lnRef idx="1">
+            <a:schemeClr val="accent1"/>
+          </a:lnRef>
+          <a:fillRef idx="3">
+            <a:schemeClr val="accent1"/>
+          </a:fillRef>
+          <a:effectRef idx="2">
+            <a:schemeClr val="accent1"/>
+          </a:effectRef>
+          <a:fontRef idx="minor">
+            <a:schemeClr val="lt1"/>
+          </a:fontRef>
+        </p:style>
+        <p:txBody>
+          <a:bodyPr rtlCol="0" anchor="ctr"/>
+          <a:lstStyle/>
+          <a:p>
+            <a:pPr algn="ctr"/>
+          </a:p>
+        </p:txBody>
+      </p:sp>
+      <p:sp>
+        <p:nvSpPr>
+          <p:cNvPr id="4" name="TextBox 3"/>
+          <p:cNvSpPr txBox="1"/>
+          <p:nvPr/>
+        </p:nvSpPr>
+        <p:spPr>
+          <a:xfrm>
+            <a:off x="731520" y="1280160"/>
+            <a:ext cx="10972800" cy="457200"/>
+          </a:xfrm>
+          <a:prstGeom prst="rect">
+            <a:avLst/>
+          </a:prstGeom>
+          <a:noFill/>
+        </p:spPr>
+        <p:txBody>
+          <a:bodyPr wrap="square" anchor="t" lIns="0" rIns="0" tIns="0" bIns="0">
+            <a:spAutoFit/>
+          </a:bodyPr>
+          <a:lstStyle/>
+          <a:p>
+            <a:pPr algn="l"/>
+            <a:r>
+              <a:rPr sz="1200" b="1" i="0">
+                <a:solidFill>
+                  <a:srgbClr val="00A9E0"/>
+                </a:solidFill>
+                <a:latin typeface="Arial"/>
+              </a:rPr>
+              <a:t>CONCLUSIÓN</a:t>
             </a:r>
           </a:p>
         </p:txBody>
@@ -3235,8 +3591,8 @@
         </p:nvSpPr>
         <p:spPr>
           <a:xfrm>
-            <a:off x="731520" y="3383280"/>
-            <a:ext cx="10728655" cy="457200"/>
+            <a:off x="731520" y="2103120"/>
+            <a:ext cx="10972800" cy="1645920"/>
           </a:xfrm>
           <a:prstGeom prst="rect">
             <a:avLst/>
@@ -3251,27 +3607,74 @@
           <a:p>
             <a:pPr algn="l"/>
             <a:r>
-              <a:rPr sz="2000" b="0">
+              <a:rPr sz="3600" b="1" i="0">
                 <a:solidFill>
                   <a:srgbClr val="FFFFFF"/>
                 </a:solidFill>
-                <a:latin typeface="Helvetica"/>
-              </a:rPr>
-              <a:t>Pacientes con Diabetes — Diabetes 130-Hospitals (UCI)</a:t>
-            </a:r>
-          </a:p>
-        </p:txBody>
-      </p:sp>
-      <p:sp>
-        <p:nvSpPr>
-          <p:cNvPr id="6" name="TextBox 5"/>
-          <p:cNvSpPr txBox="1"/>
-          <p:nvPr/>
-        </p:nvSpPr>
-        <p:spPr>
-          <a:xfrm>
-            <a:off x="731520" y="4480560"/>
-            <a:ext cx="10728655" cy="365760"/>
+                <a:latin typeface="Arial"/>
+              </a:rPr>
+              <a:t>Un mismo subgrupo concentra el riesgo</a:t>
+            </a:r>
+          </a:p>
+          <a:p>
+            <a:pPr algn="l"/>
+            <a:r>
+              <a:rPr sz="3600" b="1" i="0">
+                <a:solidFill>
+                  <a:srgbClr val="FFFFFF"/>
+                </a:solidFill>
+                <a:latin typeface="Arial"/>
+              </a:rPr>
+              <a:t>en los tres frentes</a:t>
+            </a:r>
+          </a:p>
+        </p:txBody>
+      </p:sp>
+      <p:cxnSp>
+        <p:nvCxnSpPr>
+          <p:cNvPr id="6" name="Connector 5"/>
+          <p:cNvCxnSpPr/>
+          <p:nvPr/>
+        </p:nvCxnSpPr>
+        <p:spPr>
+          <a:xfrm>
+            <a:off x="731520" y="4206240"/>
+            <a:ext cx="10515600" cy="0"/>
+          </a:xfrm>
+          <a:prstGeom prst="line">
+            <a:avLst/>
+          </a:prstGeom>
+          <a:ln w="12700">
+            <a:solidFill>
+              <a:srgbClr val="00A9E0"/>
+            </a:solidFill>
+          </a:ln>
+        </p:spPr>
+        <p:style>
+          <a:lnRef idx="2">
+            <a:schemeClr val="accent1"/>
+          </a:lnRef>
+          <a:fillRef idx="0">
+            <a:schemeClr val="accent1"/>
+          </a:fillRef>
+          <a:effectRef idx="1">
+            <a:schemeClr val="accent1"/>
+          </a:effectRef>
+          <a:fontRef idx="minor">
+            <a:schemeClr val="tx1"/>
+          </a:fontRef>
+        </p:style>
+      </p:cxnSp>
+      <p:sp>
+        <p:nvSpPr>
+          <p:cNvPr id="7" name="TextBox 6"/>
+          <p:cNvSpPr txBox="1"/>
+          <p:nvPr/>
+        </p:nvSpPr>
+        <p:spPr>
+          <a:xfrm>
+            <a:off x="731520" y="4389120"/>
+            <a:ext cx="10972800" cy="457200"/>
           </a:xfrm>
           <a:prstGeom prst="rect">
             <a:avLst/>
@@ -3286,27 +3689,27 @@
           <a:p>
             <a:pPr algn="l"/>
             <a:r>
-              <a:rPr sz="1600" b="0">
+              <a:rPr sz="1800" b="1" i="0">
                 <a:solidFill>
                   <a:srgbClr val="FFFFFF"/>
                 </a:solidFill>
-                <a:latin typeface="Helvetica"/>
-              </a:rPr>
-              <a:t>Hector Raul Becerril Villamil   ·   Elena Carolina Sánchez Araiza</a:t>
-            </a:r>
-          </a:p>
-        </p:txBody>
-      </p:sp>
-      <p:sp>
-        <p:nvSpPr>
-          <p:cNvPr id="7" name="TextBox 6"/>
-          <p:cNvSpPr txBox="1"/>
-          <p:nvPr/>
-        </p:nvSpPr>
-        <p:spPr>
-          <a:xfrm>
-            <a:off x="731520" y="4937760"/>
-            <a:ext cx="10728655" cy="365760"/>
+                <a:latin typeface="Arial"/>
+              </a:rPr>
+              <a:t>Pacientes con mayor historia de uso hospitalario y mayor complejidad clínica</a:t>
+            </a:r>
+          </a:p>
+        </p:txBody>
+      </p:sp>
+      <p:sp>
+        <p:nvSpPr>
+          <p:cNvPr id="8" name="TextBox 7"/>
+          <p:cNvSpPr txBox="1"/>
+          <p:nvPr/>
+        </p:nvSpPr>
+        <p:spPr>
+          <a:xfrm>
+            <a:off x="731520" y="4846320"/>
+            <a:ext cx="10972800" cy="457200"/>
           </a:xfrm>
           <a:prstGeom prst="rect">
             <a:avLst/>
@@ -3321,13 +3724,83 @@
           <a:p>
             <a:pPr algn="l"/>
             <a:r>
-              <a:rPr sz="1400" b="0">
+              <a:rPr sz="1800" b="0" i="0">
                 <a:solidFill>
                   <a:srgbClr val="FFFFFF"/>
                 </a:solidFill>
-                <a:latin typeface="Helvetica"/>
-              </a:rPr>
-              <a:t>Universidad Iberoamericana   ·   Primavera 2026   ·   Prof. Rodrigo Cárdenas Domínguez</a:t>
+                <a:latin typeface="Arial"/>
+              </a:rPr>
+              <a:t>representan readmisión, recurrencia y estancia más larga simultáneamente.</a:t>
+            </a:r>
+          </a:p>
+        </p:txBody>
+      </p:sp>
+      <p:sp>
+        <p:nvSpPr>
+          <p:cNvPr id="9" name="TextBox 8"/>
+          <p:cNvSpPr txBox="1"/>
+          <p:nvPr/>
+        </p:nvSpPr>
+        <p:spPr>
+          <a:xfrm>
+            <a:off x="731520" y="5486400"/>
+            <a:ext cx="10972800" cy="457200"/>
+          </a:xfrm>
+          <a:prstGeom prst="rect">
+            <a:avLst/>
+          </a:prstGeom>
+          <a:noFill/>
+        </p:spPr>
+        <p:txBody>
+          <a:bodyPr wrap="square" anchor="t" lIns="0" rIns="0" tIns="0" bIns="0">
+            <a:spAutoFit/>
+          </a:bodyPr>
+          <a:lstStyle/>
+          <a:p>
+            <a:pPr algn="l"/>
+            <a:r>
+              <a:rPr sz="1400" b="0" i="1">
+                <a:solidFill>
+                  <a:srgbClr val="00A9E0"/>
+                </a:solidFill>
+                <a:latin typeface="Arial"/>
+              </a:rPr>
+              <a:t>Su identificación temprana es la palanca más eficiente para reducir presión hospitalaria.</a:t>
+            </a:r>
+          </a:p>
+        </p:txBody>
+      </p:sp>
+      <p:sp>
+        <p:nvSpPr>
+          <p:cNvPr id="10" name="TextBox 9"/>
+          <p:cNvSpPr txBox="1"/>
+          <p:nvPr/>
+        </p:nvSpPr>
+        <p:spPr>
+          <a:xfrm>
+            <a:off x="731520" y="6126480"/>
+            <a:ext cx="10972800" cy="365760"/>
+          </a:xfrm>
+          <a:prstGeom prst="rect">
+            <a:avLst/>
+          </a:prstGeom>
+          <a:noFill/>
+        </p:spPr>
+        <p:txBody>
+          <a:bodyPr wrap="square" anchor="t" lIns="0" rIns="0" tIns="0" bIns="0">
+            <a:spAutoFit/>
+          </a:bodyPr>
+          <a:lstStyle/>
+          <a:p>
+            <a:pPr algn="l"/>
+            <a:r>
+              <a:rPr sz="1200" b="0" i="0">
+                <a:solidFill>
+                  <a:srgbClr val="E1E1E1"/>
+                </a:solidFill>
+                <a:latin typeface="Arial"/>
+              </a:rPr>
+              <a:t>Gracias  ·  Preguntas</a:t>
             </a:r>
           </a:p>
         </p:txBody>
@@ -3359,17 +3832,18 @@
         <p:spPr>
           <a:xfrm>
             <a:off x="0" y="0"/>
-            <a:ext cx="12191695" cy="822960"/>
+            <a:ext cx="12191695" cy="73152"/>
           </a:xfrm>
           <a:prstGeom prst="rect">
             <a:avLst/>
           </a:prstGeom>
           <a:solidFill>
-            <a:srgbClr val="3B6AA0"/>
+            <a:srgbClr val="051C2C"/>
           </a:solidFill>
           <a:ln>
             <a:noFill/>
           </a:ln>
+          <a:effectLst/>
         </p:spPr>
         <p:style>
           <a:lnRef idx="1">
@@ -3401,29 +3875,29 @@
         </p:nvSpPr>
         <p:spPr>
           <a:xfrm>
-            <a:off x="457200" y="164592"/>
-            <a:ext cx="11277295" cy="502920"/>
-          </a:xfrm>
-          <a:prstGeom prst="rect">
-            <a:avLst/>
-          </a:prstGeom>
-          <a:noFill/>
-        </p:spPr>
-        <p:txBody>
-          <a:bodyPr wrap="square" anchor="ctr" lIns="0" rIns="0" tIns="0" bIns="0">
+            <a:off x="457200" y="274320"/>
+            <a:ext cx="11277295" cy="274320"/>
+          </a:xfrm>
+          <a:prstGeom prst="rect">
+            <a:avLst/>
+          </a:prstGeom>
+          <a:noFill/>
+        </p:spPr>
+        <p:txBody>
+          <a:bodyPr wrap="square" anchor="t" lIns="0" rIns="0" tIns="0" bIns="0">
             <a:spAutoFit/>
           </a:bodyPr>
           <a:lstStyle/>
           <a:p>
             <a:pPr algn="l"/>
             <a:r>
-              <a:rPr sz="2600" b="1">
-                <a:solidFill>
-                  <a:srgbClr val="FFFFFF"/>
-                </a:solidFill>
-                <a:latin typeface="Helvetica"/>
-              </a:rPr>
-              <a:t>El problema</a:t>
+              <a:rPr sz="1000" b="1" i="0">
+                <a:solidFill>
+                  <a:srgbClr val="8E8E8E"/>
+                </a:solidFill>
+                <a:latin typeface="Arial"/>
+              </a:rPr>
+              <a:t>RESUMEN EJECUTIVO</a:t>
             </a:r>
           </a:p>
         </p:txBody>
@@ -3436,8 +3910,8 @@
         </p:nvSpPr>
         <p:spPr>
           <a:xfrm>
-            <a:off x="457200" y="841248"/>
-            <a:ext cx="11277295" cy="365760"/>
+            <a:off x="457200" y="548640"/>
+            <a:ext cx="11277295" cy="822960"/>
           </a:xfrm>
           <a:prstGeom prst="rect">
             <a:avLst/>
@@ -3452,27 +3926,97 @@
           <a:p>
             <a:pPr algn="l"/>
             <a:r>
-              <a:rPr sz="1400" b="0">
-                <a:solidFill>
-                  <a:srgbClr val="4A4A4A"/>
-                </a:solidFill>
-                <a:latin typeface="Helvetica"/>
-              </a:rPr>
-              <a:t>Las readmisiones tempranas presionan camas, personal y calidad de atención</a:t>
-            </a:r>
-          </a:p>
-        </p:txBody>
-      </p:sp>
-      <p:sp>
-        <p:nvSpPr>
-          <p:cNvPr id="5" name="TextBox 4"/>
-          <p:cNvSpPr txBox="1"/>
-          <p:nvPr/>
-        </p:nvSpPr>
-        <p:spPr>
-          <a:xfrm>
-            <a:off x="457200" y="1371600"/>
-            <a:ext cx="11277295" cy="457200"/>
+              <a:rPr sz="2200" b="1" i="0">
+                <a:solidFill>
+                  <a:srgbClr val="051C2C"/>
+                </a:solidFill>
+                <a:latin typeface="Arial"/>
+              </a:rPr>
+              <a:t>Tres hallazgos definen qué pacientes con diabetes presionan más al hospital</a:t>
+            </a:r>
+          </a:p>
+        </p:txBody>
+      </p:sp>
+      <p:cxnSp>
+        <p:nvCxnSpPr>
+          <p:cNvPr id="5" name="Connector 4"/>
+          <p:cNvCxnSpPr/>
+          <p:nvPr/>
+        </p:nvCxnSpPr>
+        <p:spPr>
+          <a:xfrm>
+            <a:off x="457200" y="1417320"/>
+            <a:ext cx="11277295" cy="0"/>
+          </a:xfrm>
+          <a:prstGeom prst="line">
+            <a:avLst/>
+          </a:prstGeom>
+          <a:ln w="9525">
+            <a:solidFill>
+              <a:srgbClr val="E1E1E1"/>
+            </a:solidFill>
+          </a:ln>
+        </p:spPr>
+        <p:style>
+          <a:lnRef idx="2">
+            <a:schemeClr val="accent1"/>
+          </a:lnRef>
+          <a:fillRef idx="0">
+            <a:schemeClr val="accent1"/>
+          </a:fillRef>
+          <a:effectRef idx="1">
+            <a:schemeClr val="accent1"/>
+          </a:effectRef>
+          <a:fontRef idx="minor">
+            <a:schemeClr val="tx1"/>
+          </a:fontRef>
+        </p:style>
+      </p:cxnSp>
+      <p:cxnSp>
+        <p:nvCxnSpPr>
+          <p:cNvPr id="6" name="Connector 5"/>
+          <p:cNvCxnSpPr/>
+          <p:nvPr/>
+        </p:nvCxnSpPr>
+        <p:spPr>
+          <a:xfrm>
+            <a:off x="457200" y="6446520"/>
+            <a:ext cx="11277295" cy="0"/>
+          </a:xfrm>
+          <a:prstGeom prst="line">
+            <a:avLst/>
+          </a:prstGeom>
+          <a:ln w="9525">
+            <a:solidFill>
+              <a:srgbClr val="E1E1E1"/>
+            </a:solidFill>
+          </a:ln>
+        </p:spPr>
+        <p:style>
+          <a:lnRef idx="2">
+            <a:schemeClr val="accent1"/>
+          </a:lnRef>
+          <a:fillRef idx="0">
+            <a:schemeClr val="accent1"/>
+          </a:fillRef>
+          <a:effectRef idx="1">
+            <a:schemeClr val="accent1"/>
+          </a:effectRef>
+          <a:fontRef idx="minor">
+            <a:schemeClr val="tx1"/>
+          </a:fontRef>
+        </p:style>
+      </p:cxnSp>
+      <p:sp>
+        <p:nvSpPr>
+          <p:cNvPr id="7" name="TextBox 6"/>
+          <p:cNvSpPr txBox="1"/>
+          <p:nvPr/>
+        </p:nvSpPr>
+        <p:spPr>
+          <a:xfrm>
+            <a:off x="457200" y="6537960"/>
+            <a:ext cx="10058400" cy="228600"/>
           </a:xfrm>
           <a:prstGeom prst="rect">
             <a:avLst/>
@@ -3487,37 +4031,73 @@
           <a:p>
             <a:pPr algn="l"/>
             <a:r>
-              <a:rPr sz="2200" b="1">
-                <a:solidFill>
-                  <a:srgbClr val="3B6AA0"/>
-                </a:solidFill>
-                <a:latin typeface="Helvetica"/>
-              </a:rPr>
-              <a:t>Tres preguntas operativas:</a:t>
-            </a:r>
-          </a:p>
-        </p:txBody>
-      </p:sp>
-      <p:sp>
-        <p:nvSpPr>
-          <p:cNvPr id="6" name="Rectangle 5"/>
+              <a:rPr sz="800" b="0" i="1">
+                <a:solidFill>
+                  <a:srgbClr val="8E8E8E"/>
+                </a:solidFill>
+                <a:latin typeface="Arial"/>
+              </a:rPr>
+              <a:t>Fuente: análisis del equipo basado en Diabetes 130-Hospitals (UCI, n=69,970)</a:t>
+            </a:r>
+          </a:p>
+        </p:txBody>
+      </p:sp>
+      <p:sp>
+        <p:nvSpPr>
+          <p:cNvPr id="8" name="TextBox 7"/>
+          <p:cNvSpPr txBox="1"/>
+          <p:nvPr/>
+        </p:nvSpPr>
+        <p:spPr>
+          <a:xfrm>
+            <a:off x="11551615" y="6537960"/>
+            <a:ext cx="274320" cy="228600"/>
+          </a:xfrm>
+          <a:prstGeom prst="rect">
+            <a:avLst/>
+          </a:prstGeom>
+          <a:noFill/>
+        </p:spPr>
+        <p:txBody>
+          <a:bodyPr wrap="square" anchor="t" lIns="0" rIns="0" tIns="0" bIns="0">
+            <a:spAutoFit/>
+          </a:bodyPr>
+          <a:lstStyle/>
+          <a:p>
+            <a:pPr algn="r"/>
+            <a:r>
+              <a:rPr sz="900" b="0" i="0">
+                <a:solidFill>
+                  <a:srgbClr val="8E8E8E"/>
+                </a:solidFill>
+                <a:latin typeface="Arial"/>
+              </a:rPr>
+              <a:t>2</a:t>
+            </a:r>
+          </a:p>
+        </p:txBody>
+      </p:sp>
+      <p:sp>
+        <p:nvSpPr>
+          <p:cNvPr id="9" name="Rectangle 8"/>
           <p:cNvSpPr/>
           <p:nvPr/>
         </p:nvSpPr>
         <p:spPr>
           <a:xfrm>
-            <a:off x="609447" y="2286000"/>
-            <a:ext cx="3474720" cy="548640"/>
+            <a:off x="457200" y="1828800"/>
+            <a:ext cx="2636443" cy="54864"/>
           </a:xfrm>
           <a:prstGeom prst="rect">
             <a:avLst/>
           </a:prstGeom>
           <a:solidFill>
-            <a:srgbClr val="3B6AA0"/>
+            <a:srgbClr val="003D62"/>
           </a:solidFill>
           <a:ln>
             <a:noFill/>
           </a:ln>
+          <a:effectLst/>
         </p:spPr>
         <p:style>
           <a:lnRef idx="1">
@@ -3543,24 +4123,107 @@
       </p:sp>
       <p:sp>
         <p:nvSpPr>
-          <p:cNvPr id="7" name="Rectangle 6"/>
+          <p:cNvPr id="10" name="TextBox 9"/>
+          <p:cNvSpPr txBox="1"/>
+          <p:nvPr/>
+        </p:nvSpPr>
+        <p:spPr>
+          <a:xfrm>
+            <a:off x="457200" y="1965960"/>
+            <a:ext cx="2636443" cy="320040"/>
+          </a:xfrm>
+          <a:prstGeom prst="rect">
+            <a:avLst/>
+          </a:prstGeom>
+          <a:noFill/>
+        </p:spPr>
+        <p:txBody>
+          <a:bodyPr wrap="square" anchor="t" lIns="0" rIns="0" tIns="0" bIns="0">
+            <a:spAutoFit/>
+          </a:bodyPr>
+          <a:lstStyle/>
+          <a:p>
+            <a:pPr algn="l"/>
+            <a:r>
+              <a:rPr sz="1100" b="1" i="0">
+                <a:solidFill>
+                  <a:srgbClr val="051C2C"/>
+                </a:solidFill>
+                <a:latin typeface="Arial"/>
+              </a:rPr>
+              <a:t>CONTEXTO</a:t>
+            </a:r>
+          </a:p>
+        </p:txBody>
+      </p:sp>
+      <p:sp>
+        <p:nvSpPr>
+          <p:cNvPr id="11" name="TextBox 10"/>
+          <p:cNvSpPr txBox="1"/>
+          <p:nvPr/>
+        </p:nvSpPr>
+        <p:spPr>
+          <a:xfrm>
+            <a:off x="457200" y="2331720"/>
+            <a:ext cx="2636443" cy="2011680"/>
+          </a:xfrm>
+          <a:prstGeom prst="rect">
+            <a:avLst/>
+          </a:prstGeom>
+          <a:noFill/>
+        </p:spPr>
+        <p:txBody>
+          <a:bodyPr wrap="square" anchor="t" lIns="0" rIns="0" tIns="0" bIns="0">
+            <a:spAutoFit/>
+          </a:bodyPr>
+          <a:lstStyle/>
+          <a:p>
+            <a:pPr algn="l"/>
+            <a:r>
+              <a:rPr sz="1300" b="0" i="0">
+                <a:solidFill>
+                  <a:srgbClr val="4A4A4A"/>
+                </a:solidFill>
+                <a:latin typeface="Arial"/>
+              </a:rPr>
+              <a:t>Las readmisiones presionan camas, personal y costo. El hospital necesita</a:t>
+            </a:r>
+          </a:p>
+          <a:p>
+            <a:pPr algn="l"/>
+            <a:r>
+              <a:rPr sz="1300" b="0" i="0">
+                <a:solidFill>
+                  <a:srgbClr val="4A4A4A"/>
+                </a:solidFill>
+                <a:latin typeface="Arial"/>
+              </a:rPr>
+              <a:t>identificar qué pacientes regresan, cuántas veces y cuánto tiempo se quedan.</a:t>
+            </a:r>
+          </a:p>
+        </p:txBody>
+      </p:sp>
+      <p:sp>
+        <p:nvSpPr>
+          <p:cNvPr id="12" name="Rectangle 11"/>
           <p:cNvSpPr/>
           <p:nvPr/>
         </p:nvSpPr>
         <p:spPr>
           <a:xfrm>
-            <a:off x="609447" y="2834640"/>
-            <a:ext cx="3474720" cy="2560320"/>
+            <a:off x="3230803" y="1828800"/>
+            <a:ext cx="2636443" cy="54864"/>
           </a:xfrm>
           <a:prstGeom prst="rect">
             <a:avLst/>
           </a:prstGeom>
           <a:solidFill>
-            <a:srgbClr val="EEEEEE"/>
+            <a:srgbClr val="FE5000"/>
           </a:solidFill>
           <a:ln>
             <a:noFill/>
           </a:ln>
+          <a:effectLst/>
         </p:spPr>
         <p:style>
           <a:lnRef idx="1">
@@ -3586,104 +4249,107 @@
       </p:sp>
       <p:sp>
         <p:nvSpPr>
-          <p:cNvPr id="8" name="TextBox 7"/>
-          <p:cNvSpPr txBox="1"/>
-          <p:nvPr/>
-        </p:nvSpPr>
-        <p:spPr>
-          <a:xfrm>
-            <a:off x="792327" y="2331720"/>
-            <a:ext cx="3108960" cy="457200"/>
-          </a:xfrm>
-          <a:prstGeom prst="rect">
-            <a:avLst/>
-          </a:prstGeom>
-          <a:noFill/>
-        </p:spPr>
-        <p:txBody>
-          <a:bodyPr wrap="square" anchor="ctr" lIns="0" rIns="0" tIns="0" bIns="0">
-            <a:spAutoFit/>
-          </a:bodyPr>
-          <a:lstStyle/>
-          <a:p>
-            <a:pPr algn="ctr"/>
-            <a:r>
-              <a:rPr sz="1500" b="1">
-                <a:solidFill>
-                  <a:srgbClr val="FFFFFF"/>
-                </a:solidFill>
-                <a:latin typeface="Helvetica"/>
-              </a:rPr>
-              <a:t>¿Quién regresa</a:t>
-            </a:r>
-            <a:br/>
-            <a:r>
-              <a:rPr sz="1500" b="1">
-                <a:solidFill>
-                  <a:srgbClr val="FFFFFF"/>
-                </a:solidFill>
-                <a:latin typeface="Helvetica"/>
-              </a:rPr>
-              <a:t>antes de 30 días?</a:t>
-            </a:r>
-          </a:p>
-        </p:txBody>
-      </p:sp>
-      <p:sp>
-        <p:nvSpPr>
-          <p:cNvPr id="9" name="TextBox 8"/>
-          <p:cNvSpPr txBox="1"/>
-          <p:nvPr/>
-        </p:nvSpPr>
-        <p:spPr>
-          <a:xfrm>
-            <a:off x="792327" y="3108960"/>
-            <a:ext cx="3108960" cy="2194560"/>
-          </a:xfrm>
-          <a:prstGeom prst="rect">
-            <a:avLst/>
-          </a:prstGeom>
-          <a:noFill/>
-        </p:spPr>
-        <p:txBody>
-          <a:bodyPr wrap="square" anchor="ctr" lIns="0" rIns="0" tIns="0" bIns="0">
-            <a:spAutoFit/>
-          </a:bodyPr>
-          <a:lstStyle/>
-          <a:p>
-            <a:pPr algn="ctr"/>
-            <a:r>
-              <a:rPr sz="1800" b="0">
+          <p:cNvPr id="13" name="TextBox 12"/>
+          <p:cNvSpPr txBox="1"/>
+          <p:nvPr/>
+        </p:nvSpPr>
+        <p:spPr>
+          <a:xfrm>
+            <a:off x="3230803" y="1965960"/>
+            <a:ext cx="2636443" cy="320040"/>
+          </a:xfrm>
+          <a:prstGeom prst="rect">
+            <a:avLst/>
+          </a:prstGeom>
+          <a:noFill/>
+        </p:spPr>
+        <p:txBody>
+          <a:bodyPr wrap="square" anchor="t" lIns="0" rIns="0" tIns="0" bIns="0">
+            <a:spAutoFit/>
+          </a:bodyPr>
+          <a:lstStyle/>
+          <a:p>
+            <a:pPr algn="l"/>
+            <a:r>
+              <a:rPr sz="1100" b="1" i="0">
+                <a:solidFill>
+                  <a:srgbClr val="051C2C"/>
+                </a:solidFill>
+                <a:latin typeface="Arial"/>
+              </a:rPr>
+              <a:t>READMISIÓN</a:t>
+            </a:r>
+          </a:p>
+        </p:txBody>
+      </p:sp>
+      <p:sp>
+        <p:nvSpPr>
+          <p:cNvPr id="14" name="TextBox 13"/>
+          <p:cNvSpPr txBox="1"/>
+          <p:nvPr/>
+        </p:nvSpPr>
+        <p:spPr>
+          <a:xfrm>
+            <a:off x="3230803" y="2331720"/>
+            <a:ext cx="2636443" cy="2011680"/>
+          </a:xfrm>
+          <a:prstGeom prst="rect">
+            <a:avLst/>
+          </a:prstGeom>
+          <a:noFill/>
+        </p:spPr>
+        <p:txBody>
+          <a:bodyPr wrap="square" anchor="t" lIns="0" rIns="0" tIns="0" bIns="0">
+            <a:spAutoFit/>
+          </a:bodyPr>
+          <a:lstStyle/>
+          <a:p>
+            <a:pPr algn="l"/>
+            <a:r>
+              <a:rPr sz="1300" b="0" i="0">
                 <a:solidFill>
                   <a:srgbClr val="4A4A4A"/>
                 </a:solidFill>
-                <a:latin typeface="Helvetica"/>
-              </a:rPr>
-              <a:t>8.97 % de los pacientes</a:t>
-            </a:r>
-          </a:p>
-        </p:txBody>
-      </p:sp>
-      <p:sp>
-        <p:nvSpPr>
-          <p:cNvPr id="10" name="Rectangle 9"/>
+                <a:latin typeface="Arial"/>
+              </a:rPr>
+              <a:t>Cada admisión previa multiplica la probabilidad de regresar</a:t>
+            </a:r>
+          </a:p>
+          <a:p>
+            <a:pPr algn="l"/>
+            <a:r>
+              <a:rPr sz="1300" b="0" i="0">
+                <a:solidFill>
+                  <a:srgbClr val="4A4A4A"/>
+                </a:solidFill>
+                <a:latin typeface="Arial"/>
+              </a:rPr>
+              <a:t>en menos de 30 días por 1.40.</a:t>
+            </a:r>
+          </a:p>
+        </p:txBody>
+      </p:sp>
+      <p:sp>
+        <p:nvSpPr>
+          <p:cNvPr id="15" name="Rectangle 14"/>
           <p:cNvSpPr/>
           <p:nvPr/>
         </p:nvSpPr>
         <p:spPr>
           <a:xfrm>
-            <a:off x="4358487" y="2286000"/>
-            <a:ext cx="3474720" cy="548640"/>
+            <a:off x="6004406" y="1828800"/>
+            <a:ext cx="2636443" cy="54864"/>
           </a:xfrm>
           <a:prstGeom prst="rect">
             <a:avLst/>
           </a:prstGeom>
           <a:solidFill>
-            <a:srgbClr val="B3582D"/>
+            <a:srgbClr val="FE5000"/>
           </a:solidFill>
           <a:ln>
             <a:noFill/>
           </a:ln>
+          <a:effectLst/>
         </p:spPr>
         <p:style>
           <a:lnRef idx="1">
@@ -3709,24 +4375,107 @@
       </p:sp>
       <p:sp>
         <p:nvSpPr>
-          <p:cNvPr id="11" name="Rectangle 10"/>
+          <p:cNvPr id="16" name="TextBox 15"/>
+          <p:cNvSpPr txBox="1"/>
+          <p:nvPr/>
+        </p:nvSpPr>
+        <p:spPr>
+          <a:xfrm>
+            <a:off x="6004406" y="1965960"/>
+            <a:ext cx="2636443" cy="320040"/>
+          </a:xfrm>
+          <a:prstGeom prst="rect">
+            <a:avLst/>
+          </a:prstGeom>
+          <a:noFill/>
+        </p:spPr>
+        <p:txBody>
+          <a:bodyPr wrap="square" anchor="t" lIns="0" rIns="0" tIns="0" bIns="0">
+            <a:spAutoFit/>
+          </a:bodyPr>
+          <a:lstStyle/>
+          <a:p>
+            <a:pPr algn="l"/>
+            <a:r>
+              <a:rPr sz="1100" b="1" i="0">
+                <a:solidFill>
+                  <a:srgbClr val="051C2C"/>
+                </a:solidFill>
+                <a:latin typeface="Arial"/>
+              </a:rPr>
+              <a:t>RECURRENCIA</a:t>
+            </a:r>
+          </a:p>
+        </p:txBody>
+      </p:sp>
+      <p:sp>
+        <p:nvSpPr>
+          <p:cNvPr id="17" name="TextBox 16"/>
+          <p:cNvSpPr txBox="1"/>
+          <p:nvPr/>
+        </p:nvSpPr>
+        <p:spPr>
+          <a:xfrm>
+            <a:off x="6004406" y="2331720"/>
+            <a:ext cx="2636443" cy="2011680"/>
+          </a:xfrm>
+          <a:prstGeom prst="rect">
+            <a:avLst/>
+          </a:prstGeom>
+          <a:noFill/>
+        </p:spPr>
+        <p:txBody>
+          <a:bodyPr wrap="square" anchor="t" lIns="0" rIns="0" tIns="0" bIns="0">
+            <a:spAutoFit/>
+          </a:bodyPr>
+          <a:lstStyle/>
+          <a:p>
+            <a:pPr algn="l"/>
+            <a:r>
+              <a:rPr sz="1300" b="0" i="0">
+                <a:solidFill>
+                  <a:srgbClr val="4A4A4A"/>
+                </a:solidFill>
+                <a:latin typeface="Arial"/>
+              </a:rPr>
+              <a:t>Las visitas previas a urgencias son la señal más fuerte: cada una</a:t>
+            </a:r>
+          </a:p>
+          <a:p>
+            <a:pPr algn="l"/>
+            <a:r>
+              <a:rPr sz="1300" b="0" i="0">
+                <a:solidFill>
+                  <a:srgbClr val="4A4A4A"/>
+                </a:solidFill>
+                <a:latin typeface="Arial"/>
+              </a:rPr>
+              <a:t>multiplica el número esperado de futuras admisiones por 1.77.</a:t>
+            </a:r>
+          </a:p>
+        </p:txBody>
+      </p:sp>
+      <p:sp>
+        <p:nvSpPr>
+          <p:cNvPr id="18" name="Rectangle 17"/>
           <p:cNvSpPr/>
           <p:nvPr/>
         </p:nvSpPr>
         <p:spPr>
           <a:xfrm>
-            <a:off x="4358487" y="2834640"/>
-            <a:ext cx="3474720" cy="2560320"/>
+            <a:off x="8778009" y="1828800"/>
+            <a:ext cx="2636443" cy="54864"/>
           </a:xfrm>
           <a:prstGeom prst="rect">
             <a:avLst/>
           </a:prstGeom>
           <a:solidFill>
-            <a:srgbClr val="EEEEEE"/>
+            <a:srgbClr val="FE5000"/>
           </a:solidFill>
           <a:ln>
             <a:noFill/>
           </a:ln>
+          <a:effectLst/>
         </p:spPr>
         <p:style>
           <a:lnRef idx="1">
@@ -3752,114 +4501,107 @@
       </p:sp>
       <p:sp>
         <p:nvSpPr>
-          <p:cNvPr id="12" name="TextBox 11"/>
-          <p:cNvSpPr txBox="1"/>
-          <p:nvPr/>
-        </p:nvSpPr>
-        <p:spPr>
-          <a:xfrm>
-            <a:off x="4541367" y="2331720"/>
-            <a:ext cx="3108960" cy="457200"/>
-          </a:xfrm>
-          <a:prstGeom prst="rect">
-            <a:avLst/>
-          </a:prstGeom>
-          <a:noFill/>
-        </p:spPr>
-        <p:txBody>
-          <a:bodyPr wrap="square" anchor="ctr" lIns="0" rIns="0" tIns="0" bIns="0">
-            <a:spAutoFit/>
-          </a:bodyPr>
-          <a:lstStyle/>
-          <a:p>
-            <a:pPr algn="ctr"/>
-            <a:r>
-              <a:rPr sz="1500" b="1">
-                <a:solidFill>
-                  <a:srgbClr val="FFFFFF"/>
-                </a:solidFill>
-                <a:latin typeface="Helvetica"/>
-              </a:rPr>
-              <a:t>¿Quién acumula</a:t>
-            </a:r>
-            <a:br/>
-            <a:r>
-              <a:rPr sz="1500" b="1">
-                <a:solidFill>
-                  <a:srgbClr val="FFFFFF"/>
-                </a:solidFill>
-                <a:latin typeface="Helvetica"/>
-              </a:rPr>
-              <a:t>más admisiones?</a:t>
-            </a:r>
-          </a:p>
-        </p:txBody>
-      </p:sp>
-      <p:sp>
-        <p:nvSpPr>
-          <p:cNvPr id="13" name="TextBox 12"/>
-          <p:cNvSpPr txBox="1"/>
-          <p:nvPr/>
-        </p:nvSpPr>
-        <p:spPr>
-          <a:xfrm>
-            <a:off x="4541367" y="3108960"/>
-            <a:ext cx="3108960" cy="2194560"/>
-          </a:xfrm>
-          <a:prstGeom prst="rect">
-            <a:avLst/>
-          </a:prstGeom>
-          <a:noFill/>
-        </p:spPr>
-        <p:txBody>
-          <a:bodyPr wrap="square" anchor="ctr" lIns="0" rIns="0" tIns="0" bIns="0">
-            <a:spAutoFit/>
-          </a:bodyPr>
-          <a:lstStyle/>
-          <a:p>
-            <a:pPr algn="ctr"/>
-            <a:r>
-              <a:rPr sz="1800" b="0">
+          <p:cNvPr id="19" name="TextBox 18"/>
+          <p:cNvSpPr txBox="1"/>
+          <p:nvPr/>
+        </p:nvSpPr>
+        <p:spPr>
+          <a:xfrm>
+            <a:off x="8778009" y="1965960"/>
+            <a:ext cx="2636443" cy="320040"/>
+          </a:xfrm>
+          <a:prstGeom prst="rect">
+            <a:avLst/>
+          </a:prstGeom>
+          <a:noFill/>
+        </p:spPr>
+        <p:txBody>
+          <a:bodyPr wrap="square" anchor="t" lIns="0" rIns="0" tIns="0" bIns="0">
+            <a:spAutoFit/>
+          </a:bodyPr>
+          <a:lstStyle/>
+          <a:p>
+            <a:pPr algn="l"/>
+            <a:r>
+              <a:rPr sz="1100" b="1" i="0">
+                <a:solidFill>
+                  <a:srgbClr val="051C2C"/>
+                </a:solidFill>
+                <a:latin typeface="Arial"/>
+              </a:rPr>
+              <a:t>ESTANCIA</a:t>
+            </a:r>
+          </a:p>
+        </p:txBody>
+      </p:sp>
+      <p:sp>
+        <p:nvSpPr>
+          <p:cNvPr id="20" name="TextBox 19"/>
+          <p:cNvSpPr txBox="1"/>
+          <p:nvPr/>
+        </p:nvSpPr>
+        <p:spPr>
+          <a:xfrm>
+            <a:off x="8778009" y="2331720"/>
+            <a:ext cx="2636443" cy="2011680"/>
+          </a:xfrm>
+          <a:prstGeom prst="rect">
+            <a:avLst/>
+          </a:prstGeom>
+          <a:noFill/>
+        </p:spPr>
+        <p:txBody>
+          <a:bodyPr wrap="square" anchor="t" lIns="0" rIns="0" tIns="0" bIns="0">
+            <a:spAutoFit/>
+          </a:bodyPr>
+          <a:lstStyle/>
+          <a:p>
+            <a:pPr algn="l"/>
+            <a:r>
+              <a:rPr sz="1300" b="0" i="0">
                 <a:solidFill>
                   <a:srgbClr val="4A4A4A"/>
                 </a:solidFill>
-                <a:latin typeface="Helvetica"/>
-              </a:rPr>
-              <a:t>cola larga, pocos pacientes</a:t>
-            </a:r>
-            <a:br/>
-            <a:r>
-              <a:rPr sz="1800" b="0">
+                <a:latin typeface="Arial"/>
+              </a:rPr>
+              <a:t>La complejidad clínica (diagnósticos múltiples) explica el 28 %</a:t>
+            </a:r>
+          </a:p>
+          <a:p>
+            <a:pPr algn="l"/>
+            <a:r>
+              <a:rPr sz="1300" b="0" i="0">
                 <a:solidFill>
                   <a:srgbClr val="4A4A4A"/>
                 </a:solidFill>
-                <a:latin typeface="Helvetica"/>
-              </a:rPr>
-              <a:t>concentran el uso</a:t>
-            </a:r>
-          </a:p>
-        </p:txBody>
-      </p:sp>
-      <p:sp>
-        <p:nvSpPr>
-          <p:cNvPr id="14" name="Rectangle 13"/>
+                <a:latin typeface="Arial"/>
+              </a:rPr>
+              <a:t>de la variabilidad en duración de la hospitalización.</a:t>
+            </a:r>
+          </a:p>
+        </p:txBody>
+      </p:sp>
+      <p:sp>
+        <p:nvSpPr>
+          <p:cNvPr id="21" name="Rectangle 20"/>
           <p:cNvSpPr/>
           <p:nvPr/>
         </p:nvSpPr>
         <p:spPr>
           <a:xfrm>
-            <a:off x="8107527" y="2286000"/>
-            <a:ext cx="3474720" cy="548640"/>
+            <a:off x="457200" y="4754880"/>
+            <a:ext cx="11277295" cy="1280160"/>
           </a:xfrm>
           <a:prstGeom prst="rect">
             <a:avLst/>
           </a:prstGeom>
           <a:solidFill>
-            <a:srgbClr val="6A9A4F"/>
+            <a:srgbClr val="F5F5F5"/>
           </a:solidFill>
           <a:ln>
             <a:noFill/>
           </a:ln>
+          <a:effectLst/>
         </p:spPr>
         <p:style>
           <a:lnRef idx="1">
@@ -3885,24 +4627,25 @@
       </p:sp>
       <p:sp>
         <p:nvSpPr>
-          <p:cNvPr id="15" name="Rectangle 14"/>
+          <p:cNvPr id="22" name="Rectangle 21"/>
           <p:cNvSpPr/>
           <p:nvPr/>
         </p:nvSpPr>
         <p:spPr>
           <a:xfrm>
-            <a:off x="8107527" y="2834640"/>
-            <a:ext cx="3474720" cy="2560320"/>
+            <a:off x="457200" y="4754880"/>
+            <a:ext cx="91440" cy="1280160"/>
           </a:xfrm>
           <a:prstGeom prst="rect">
             <a:avLst/>
           </a:prstGeom>
           <a:solidFill>
-            <a:srgbClr val="EEEEEE"/>
+            <a:srgbClr val="051C2C"/>
           </a:solidFill>
           <a:ln>
             <a:noFill/>
           </a:ln>
+          <a:effectLst/>
         </p:spPr>
         <p:style>
           <a:lnRef idx="1">
@@ -3928,160 +4671,82 @@
       </p:sp>
       <p:sp>
         <p:nvSpPr>
-          <p:cNvPr id="16" name="TextBox 15"/>
-          <p:cNvSpPr txBox="1"/>
-          <p:nvPr/>
-        </p:nvSpPr>
-        <p:spPr>
-          <a:xfrm>
-            <a:off x="8290407" y="2331720"/>
-            <a:ext cx="3108960" cy="457200"/>
-          </a:xfrm>
-          <a:prstGeom prst="rect">
-            <a:avLst/>
-          </a:prstGeom>
-          <a:noFill/>
-        </p:spPr>
-        <p:txBody>
-          <a:bodyPr wrap="square" anchor="ctr" lIns="0" rIns="0" tIns="0" bIns="0">
-            <a:spAutoFit/>
-          </a:bodyPr>
-          <a:lstStyle/>
-          <a:p>
-            <a:pPr algn="ctr"/>
-            <a:r>
-              <a:rPr sz="1500" b="1">
-                <a:solidFill>
-                  <a:srgbClr val="FFFFFF"/>
-                </a:solidFill>
-                <a:latin typeface="Helvetica"/>
-              </a:rPr>
-              <a:t>¿Quién se queda</a:t>
-            </a:r>
-            <a:br/>
-            <a:r>
-              <a:rPr sz="1500" b="1">
-                <a:solidFill>
-                  <a:srgbClr val="FFFFFF"/>
-                </a:solidFill>
-                <a:latin typeface="Helvetica"/>
-              </a:rPr>
-              <a:t>más tiempo?</a:t>
-            </a:r>
-          </a:p>
-        </p:txBody>
-      </p:sp>
-      <p:sp>
-        <p:nvSpPr>
-          <p:cNvPr id="17" name="TextBox 16"/>
-          <p:cNvSpPr txBox="1"/>
-          <p:nvPr/>
-        </p:nvSpPr>
-        <p:spPr>
-          <a:xfrm>
-            <a:off x="8290407" y="3108960"/>
-            <a:ext cx="3108960" cy="2194560"/>
-          </a:xfrm>
-          <a:prstGeom prst="rect">
-            <a:avLst/>
-          </a:prstGeom>
-          <a:noFill/>
-        </p:spPr>
-        <p:txBody>
-          <a:bodyPr wrap="square" anchor="ctr" lIns="0" rIns="0" tIns="0" bIns="0">
-            <a:spAutoFit/>
-          </a:bodyPr>
-          <a:lstStyle/>
-          <a:p>
-            <a:pPr algn="ctr"/>
-            <a:r>
-              <a:rPr sz="1800" b="0">
+          <p:cNvPr id="23" name="TextBox 22"/>
+          <p:cNvSpPr txBox="1"/>
+          <p:nvPr/>
+        </p:nvSpPr>
+        <p:spPr>
+          <a:xfrm>
+            <a:off x="731520" y="4892040"/>
+            <a:ext cx="10058400" cy="274320"/>
+          </a:xfrm>
+          <a:prstGeom prst="rect">
+            <a:avLst/>
+          </a:prstGeom>
+          <a:noFill/>
+        </p:spPr>
+        <p:txBody>
+          <a:bodyPr wrap="square" anchor="t" lIns="0" rIns="0" tIns="0" bIns="0">
+            <a:spAutoFit/>
+          </a:bodyPr>
+          <a:lstStyle/>
+          <a:p>
+            <a:pPr algn="l"/>
+            <a:r>
+              <a:rPr sz="1100" b="1" i="0">
+                <a:solidFill>
+                  <a:srgbClr val="051C2C"/>
+                </a:solidFill>
+                <a:latin typeface="Arial"/>
+              </a:rPr>
+              <a:t>IMPLICACIÓN OPERATIVA</a:t>
+            </a:r>
+          </a:p>
+        </p:txBody>
+      </p:sp>
+      <p:sp>
+        <p:nvSpPr>
+          <p:cNvPr id="24" name="TextBox 23"/>
+          <p:cNvSpPr txBox="1"/>
+          <p:nvPr/>
+        </p:nvSpPr>
+        <p:spPr>
+          <a:xfrm>
+            <a:off x="731520" y="5166360"/>
+            <a:ext cx="10972800" cy="822960"/>
+          </a:xfrm>
+          <a:prstGeom prst="rect">
+            <a:avLst/>
+          </a:prstGeom>
+          <a:noFill/>
+        </p:spPr>
+        <p:txBody>
+          <a:bodyPr wrap="square" anchor="t" lIns="0" rIns="0" tIns="0" bIns="0">
+            <a:spAutoFit/>
+          </a:bodyPr>
+          <a:lstStyle/>
+          <a:p>
+            <a:pPr algn="l"/>
+            <a:r>
+              <a:rPr sz="1500" b="0" i="0">
                 <a:solidFill>
                   <a:srgbClr val="4A4A4A"/>
                 </a:solidFill>
-                <a:latin typeface="Helvetica"/>
-              </a:rPr>
-              <a:t>mediana 3 días</a:t>
-            </a:r>
-            <a:br/>
-            <a:r>
-              <a:rPr sz="1800" b="0">
+                <a:latin typeface="Arial"/>
+              </a:rPr>
+              <a:t>Un mismo subgrupo de pacientes —con historia previa de uso hospitalario y mayor complejidad clínica—</a:t>
+            </a:r>
+          </a:p>
+          <a:p>
+            <a:pPr algn="l"/>
+            <a:r>
+              <a:rPr sz="1500" b="0" i="0">
                 <a:solidFill>
                   <a:srgbClr val="4A4A4A"/>
                 </a:solidFill>
-                <a:latin typeface="Helvetica"/>
-              </a:rPr>
-              <a:t>con estancias hasta 14+</a:t>
-            </a:r>
-          </a:p>
-        </p:txBody>
-      </p:sp>
-      <p:sp>
-        <p:nvSpPr>
-          <p:cNvPr id="18" name="TextBox 17"/>
-          <p:cNvSpPr txBox="1"/>
-          <p:nvPr/>
-        </p:nvSpPr>
-        <p:spPr>
-          <a:xfrm>
-            <a:off x="457200" y="6492240"/>
-            <a:ext cx="7315200" cy="274320"/>
-          </a:xfrm>
-          <a:prstGeom prst="rect">
-            <a:avLst/>
-          </a:prstGeom>
-          <a:noFill/>
-        </p:spPr>
-        <p:txBody>
-          <a:bodyPr wrap="square" anchor="t" lIns="0" rIns="0" tIns="0" bIns="0">
-            <a:spAutoFit/>
-          </a:bodyPr>
-          <a:lstStyle/>
-          <a:p>
-            <a:pPr algn="l"/>
-            <a:r>
-              <a:rPr sz="900" b="0">
-                <a:solidFill>
-                  <a:srgbClr val="4A4A4A"/>
-                </a:solidFill>
-                <a:latin typeface="Helvetica"/>
-              </a:rPr>
-              <a:t>Proyecto Final · Analítica de Datos · Universidad Iberoamericana</a:t>
-            </a:r>
-          </a:p>
-        </p:txBody>
-      </p:sp>
-      <p:sp>
-        <p:nvSpPr>
-          <p:cNvPr id="19" name="TextBox 18"/>
-          <p:cNvSpPr txBox="1"/>
-          <p:nvPr/>
-        </p:nvSpPr>
-        <p:spPr>
-          <a:xfrm>
-            <a:off x="11277295" y="6492240"/>
-            <a:ext cx="457200" cy="274320"/>
-          </a:xfrm>
-          <a:prstGeom prst="rect">
-            <a:avLst/>
-          </a:prstGeom>
-          <a:noFill/>
-        </p:spPr>
-        <p:txBody>
-          <a:bodyPr wrap="square" anchor="t" lIns="0" rIns="0" tIns="0" bIns="0">
-            <a:spAutoFit/>
-          </a:bodyPr>
-          <a:lstStyle/>
-          <a:p>
-            <a:pPr algn="r"/>
-            <a:r>
-              <a:rPr sz="900" b="0">
-                <a:solidFill>
-                  <a:srgbClr val="4A4A4A"/>
-                </a:solidFill>
-                <a:latin typeface="Helvetica"/>
-              </a:rPr>
-              <a:t>2/9</a:t>
+                <a:latin typeface="Arial"/>
+              </a:rPr>
+              <a:t>concentra los tres tipos de riesgo. Su identificación temprana es la palanca de mayor impacto.</a:t>
             </a:r>
           </a:p>
         </p:txBody>
@@ -4113,17 +4778,18 @@
         <p:spPr>
           <a:xfrm>
             <a:off x="0" y="0"/>
-            <a:ext cx="12191695" cy="822960"/>
+            <a:ext cx="12191695" cy="73152"/>
           </a:xfrm>
           <a:prstGeom prst="rect">
             <a:avLst/>
           </a:prstGeom>
           <a:solidFill>
-            <a:srgbClr val="3B6AA0"/>
+            <a:srgbClr val="051C2C"/>
           </a:solidFill>
           <a:ln>
             <a:noFill/>
           </a:ln>
+          <a:effectLst/>
         </p:spPr>
         <p:style>
           <a:lnRef idx="1">
@@ -4155,29 +4821,29 @@
         </p:nvSpPr>
         <p:spPr>
           <a:xfrm>
-            <a:off x="457200" y="164592"/>
-            <a:ext cx="11277295" cy="502920"/>
-          </a:xfrm>
-          <a:prstGeom prst="rect">
-            <a:avLst/>
-          </a:prstGeom>
-          <a:noFill/>
-        </p:spPr>
-        <p:txBody>
-          <a:bodyPr wrap="square" anchor="ctr" lIns="0" rIns="0" tIns="0" bIns="0">
+            <a:off x="457200" y="274320"/>
+            <a:ext cx="11277295" cy="274320"/>
+          </a:xfrm>
+          <a:prstGeom prst="rect">
+            <a:avLst/>
+          </a:prstGeom>
+          <a:noFill/>
+        </p:spPr>
+        <p:txBody>
+          <a:bodyPr wrap="square" anchor="t" lIns="0" rIns="0" tIns="0" bIns="0">
             <a:spAutoFit/>
           </a:bodyPr>
           <a:lstStyle/>
           <a:p>
             <a:pPr algn="l"/>
             <a:r>
-              <a:rPr sz="2600" b="1">
-                <a:solidFill>
-                  <a:srgbClr val="FFFFFF"/>
-                </a:solidFill>
-                <a:latin typeface="Helvetica"/>
-              </a:rPr>
-              <a:t>Los datos</a:t>
+              <a:rPr sz="1000" b="1" i="0">
+                <a:solidFill>
+                  <a:srgbClr val="8E8E8E"/>
+                </a:solidFill>
+                <a:latin typeface="Arial"/>
+              </a:rPr>
+              <a:t>PLANTEAMIENTO DEL PROBLEMA</a:t>
             </a:r>
           </a:p>
         </p:txBody>
@@ -4190,8 +4856,8 @@
         </p:nvSpPr>
         <p:spPr>
           <a:xfrm>
-            <a:off x="457200" y="841248"/>
-            <a:ext cx="11277295" cy="365760"/>
+            <a:off x="457200" y="548640"/>
+            <a:ext cx="11277295" cy="822960"/>
           </a:xfrm>
           <a:prstGeom prst="rect">
             <a:avLst/>
@@ -4206,27 +4872,97 @@
           <a:p>
             <a:pPr algn="l"/>
             <a:r>
-              <a:rPr sz="1400" b="0">
-                <a:solidFill>
-                  <a:srgbClr val="4A4A4A"/>
-                </a:solidFill>
-                <a:latin typeface="Helvetica"/>
-              </a:rPr>
-              <a:t>Diabetes 130-Hospitals (UCI) — más de 100 mil ingresos</a:t>
-            </a:r>
-          </a:p>
-        </p:txBody>
-      </p:sp>
-      <p:sp>
-        <p:nvSpPr>
-          <p:cNvPr id="5" name="TextBox 4"/>
-          <p:cNvSpPr txBox="1"/>
-          <p:nvPr/>
-        </p:nvSpPr>
-        <p:spPr>
-          <a:xfrm>
-            <a:off x="640080" y="1463040"/>
-            <a:ext cx="3657600" cy="914400"/>
+              <a:rPr sz="2200" b="1" i="0">
+                <a:solidFill>
+                  <a:srgbClr val="051C2C"/>
+                </a:solidFill>
+                <a:latin typeface="Arial"/>
+              </a:rPr>
+              <a:t>El hospital enfrenta tres preguntas operativas distintas pero relacionadas</a:t>
+            </a:r>
+          </a:p>
+        </p:txBody>
+      </p:sp>
+      <p:cxnSp>
+        <p:nvCxnSpPr>
+          <p:cNvPr id="5" name="Connector 4"/>
+          <p:cNvCxnSpPr/>
+          <p:nvPr/>
+        </p:nvCxnSpPr>
+        <p:spPr>
+          <a:xfrm>
+            <a:off x="457200" y="1417320"/>
+            <a:ext cx="11277295" cy="0"/>
+          </a:xfrm>
+          <a:prstGeom prst="line">
+            <a:avLst/>
+          </a:prstGeom>
+          <a:ln w="9525">
+            <a:solidFill>
+              <a:srgbClr val="E1E1E1"/>
+            </a:solidFill>
+          </a:ln>
+        </p:spPr>
+        <p:style>
+          <a:lnRef idx="2">
+            <a:schemeClr val="accent1"/>
+          </a:lnRef>
+          <a:fillRef idx="0">
+            <a:schemeClr val="accent1"/>
+          </a:fillRef>
+          <a:effectRef idx="1">
+            <a:schemeClr val="accent1"/>
+          </a:effectRef>
+          <a:fontRef idx="minor">
+            <a:schemeClr val="tx1"/>
+          </a:fontRef>
+        </p:style>
+      </p:cxnSp>
+      <p:cxnSp>
+        <p:nvCxnSpPr>
+          <p:cNvPr id="6" name="Connector 5"/>
+          <p:cNvCxnSpPr/>
+          <p:nvPr/>
+        </p:nvCxnSpPr>
+        <p:spPr>
+          <a:xfrm>
+            <a:off x="457200" y="6446520"/>
+            <a:ext cx="11277295" cy="0"/>
+          </a:xfrm>
+          <a:prstGeom prst="line">
+            <a:avLst/>
+          </a:prstGeom>
+          <a:ln w="9525">
+            <a:solidFill>
+              <a:srgbClr val="E1E1E1"/>
+            </a:solidFill>
+          </a:ln>
+        </p:spPr>
+        <p:style>
+          <a:lnRef idx="2">
+            <a:schemeClr val="accent1"/>
+          </a:lnRef>
+          <a:fillRef idx="0">
+            <a:schemeClr val="accent1"/>
+          </a:fillRef>
+          <a:effectRef idx="1">
+            <a:schemeClr val="accent1"/>
+          </a:effectRef>
+          <a:fontRef idx="minor">
+            <a:schemeClr val="tx1"/>
+          </a:fontRef>
+        </p:style>
+      </p:cxnSp>
+      <p:sp>
+        <p:nvSpPr>
+          <p:cNvPr id="7" name="TextBox 6"/>
+          <p:cNvSpPr txBox="1"/>
+          <p:nvPr/>
+        </p:nvSpPr>
+        <p:spPr>
+          <a:xfrm>
+            <a:off x="457200" y="6537960"/>
+            <a:ext cx="10058400" cy="228600"/>
           </a:xfrm>
           <a:prstGeom prst="rect">
             <a:avLst/>
@@ -4241,27 +4977,27 @@
           <a:p>
             <a:pPr algn="l"/>
             <a:r>
-              <a:rPr sz="5400" b="1">
-                <a:solidFill>
-                  <a:srgbClr val="3B6AA0"/>
-                </a:solidFill>
-                <a:latin typeface="Helvetica"/>
-              </a:rPr>
-              <a:t>101,766</a:t>
-            </a:r>
-          </a:p>
-        </p:txBody>
-      </p:sp>
-      <p:sp>
-        <p:nvSpPr>
-          <p:cNvPr id="6" name="TextBox 5"/>
-          <p:cNvSpPr txBox="1"/>
-          <p:nvPr/>
-        </p:nvSpPr>
-        <p:spPr>
-          <a:xfrm>
-            <a:off x="640080" y="2468880"/>
-            <a:ext cx="3657600" cy="365760"/>
+              <a:rPr sz="800" b="0" i="1">
+                <a:solidFill>
+                  <a:srgbClr val="8E8E8E"/>
+                </a:solidFill>
+                <a:latin typeface="Arial"/>
+              </a:rPr>
+              <a:t>Fuente: análisis del equipo basado en Diabetes 130-Hospitals (UCI, n=69,970)</a:t>
+            </a:r>
+          </a:p>
+        </p:txBody>
+      </p:sp>
+      <p:sp>
+        <p:nvSpPr>
+          <p:cNvPr id="8" name="TextBox 7"/>
+          <p:cNvSpPr txBox="1"/>
+          <p:nvPr/>
+        </p:nvSpPr>
+        <p:spPr>
+          <a:xfrm>
+            <a:off x="11551615" y="6537960"/>
+            <a:ext cx="274320" cy="228600"/>
           </a:xfrm>
           <a:prstGeom prst="rect">
             <a:avLst/>
@@ -4274,159 +5010,89 @@
           </a:bodyPr>
           <a:lstStyle/>
           <a:p>
+            <a:pPr algn="r"/>
+            <a:r>
+              <a:rPr sz="900" b="0" i="0">
+                <a:solidFill>
+                  <a:srgbClr val="8E8E8E"/>
+                </a:solidFill>
+                <a:latin typeface="Arial"/>
+              </a:rPr>
+              <a:t>3</a:t>
+            </a:r>
+          </a:p>
+        </p:txBody>
+      </p:sp>
+      <p:sp>
+        <p:nvSpPr>
+          <p:cNvPr id="9" name="TextBox 8"/>
+          <p:cNvSpPr txBox="1"/>
+          <p:nvPr/>
+        </p:nvSpPr>
+        <p:spPr>
+          <a:xfrm>
+            <a:off x="457200" y="1828800"/>
+            <a:ext cx="5029200" cy="365760"/>
+          </a:xfrm>
+          <a:prstGeom prst="rect">
+            <a:avLst/>
+          </a:prstGeom>
+          <a:noFill/>
+        </p:spPr>
+        <p:txBody>
+          <a:bodyPr wrap="square" anchor="t" lIns="0" rIns="0" tIns="0" bIns="0">
+            <a:spAutoFit/>
+          </a:bodyPr>
+          <a:lstStyle/>
+          <a:p>
             <a:pPr algn="l"/>
             <a:r>
-              <a:rPr sz="1400" b="0">
-                <a:solidFill>
-                  <a:srgbClr val="4A4A4A"/>
-                </a:solidFill>
-                <a:latin typeface="Helvetica"/>
-              </a:rPr>
-              <a:t>admisiones originales</a:t>
-            </a:r>
-          </a:p>
-        </p:txBody>
-      </p:sp>
-      <p:sp>
-        <p:nvSpPr>
-          <p:cNvPr id="7" name="TextBox 6"/>
-          <p:cNvSpPr txBox="1"/>
-          <p:nvPr/>
-        </p:nvSpPr>
-        <p:spPr>
-          <a:xfrm>
-            <a:off x="640080" y="3108960"/>
-            <a:ext cx="3657600" cy="914400"/>
-          </a:xfrm>
-          <a:prstGeom prst="rect">
-            <a:avLst/>
-          </a:prstGeom>
-          <a:noFill/>
-        </p:spPr>
-        <p:txBody>
-          <a:bodyPr wrap="square" anchor="t" lIns="0" rIns="0" tIns="0" bIns="0">
-            <a:spAutoFit/>
-          </a:bodyPr>
-          <a:lstStyle/>
-          <a:p>
-            <a:pPr algn="l"/>
-            <a:r>
-              <a:rPr sz="5400" b="1">
-                <a:solidFill>
-                  <a:srgbClr val="B3582D"/>
-                </a:solidFill>
-                <a:latin typeface="Helvetica"/>
-              </a:rPr>
-              <a:t>69,970</a:t>
-            </a:r>
-          </a:p>
-        </p:txBody>
-      </p:sp>
-      <p:sp>
-        <p:nvSpPr>
-          <p:cNvPr id="8" name="TextBox 7"/>
-          <p:cNvSpPr txBox="1"/>
-          <p:nvPr/>
-        </p:nvSpPr>
-        <p:spPr>
-          <a:xfrm>
-            <a:off x="640080" y="4114800"/>
-            <a:ext cx="3657600" cy="365760"/>
-          </a:xfrm>
-          <a:prstGeom prst="rect">
-            <a:avLst/>
-          </a:prstGeom>
-          <a:noFill/>
-        </p:spPr>
-        <p:txBody>
-          <a:bodyPr wrap="square" anchor="t" lIns="0" rIns="0" tIns="0" bIns="0">
-            <a:spAutoFit/>
-          </a:bodyPr>
-          <a:lstStyle/>
-          <a:p>
-            <a:pPr algn="l"/>
-            <a:r>
-              <a:rPr sz="1400" b="0">
-                <a:solidFill>
-                  <a:srgbClr val="4A4A4A"/>
-                </a:solidFill>
-                <a:latin typeface="Helvetica"/>
-              </a:rPr>
-              <a:t>pacientes únicos tras limpieza</a:t>
-            </a:r>
-          </a:p>
-        </p:txBody>
-      </p:sp>
-      <p:sp>
-        <p:nvSpPr>
-          <p:cNvPr id="9" name="TextBox 8"/>
-          <p:cNvSpPr txBox="1"/>
-          <p:nvPr/>
-        </p:nvSpPr>
-        <p:spPr>
-          <a:xfrm>
-            <a:off x="640080" y="4754880"/>
-            <a:ext cx="3657600" cy="914400"/>
-          </a:xfrm>
-          <a:prstGeom prst="rect">
-            <a:avLst/>
-          </a:prstGeom>
-          <a:noFill/>
-        </p:spPr>
-        <p:txBody>
-          <a:bodyPr wrap="square" anchor="t" lIns="0" rIns="0" tIns="0" bIns="0">
-            <a:spAutoFit/>
-          </a:bodyPr>
-          <a:lstStyle/>
-          <a:p>
-            <a:pPr algn="l"/>
-            <a:r>
-              <a:rPr sz="5400" b="1">
-                <a:solidFill>
-                  <a:srgbClr val="B03838"/>
-                </a:solidFill>
-                <a:latin typeface="Helvetica"/>
-              </a:rPr>
-              <a:t>8.97 %</a:t>
-            </a:r>
-          </a:p>
-        </p:txBody>
-      </p:sp>
-      <p:sp>
-        <p:nvSpPr>
-          <p:cNvPr id="10" name="TextBox 9"/>
-          <p:cNvSpPr txBox="1"/>
-          <p:nvPr/>
-        </p:nvSpPr>
-        <p:spPr>
-          <a:xfrm>
-            <a:off x="640080" y="5760720"/>
-            <a:ext cx="3657600" cy="365760"/>
-          </a:xfrm>
-          <a:prstGeom prst="rect">
-            <a:avLst/>
-          </a:prstGeom>
-          <a:noFill/>
-        </p:spPr>
-        <p:txBody>
-          <a:bodyPr wrap="square" anchor="t" lIns="0" rIns="0" tIns="0" bIns="0">
-            <a:spAutoFit/>
-          </a:bodyPr>
-          <a:lstStyle/>
-          <a:p>
-            <a:pPr algn="l"/>
-            <a:r>
-              <a:rPr sz="1400" b="0">
-                <a:solidFill>
-                  <a:srgbClr val="4A4A4A"/>
-                </a:solidFill>
-                <a:latin typeface="Helvetica"/>
-              </a:rPr>
-              <a:t>tasa global de readmisión a 30 días</a:t>
-            </a:r>
-          </a:p>
-        </p:txBody>
-      </p:sp>
+              <a:rPr sz="1400" b="1" i="0">
+                <a:solidFill>
+                  <a:srgbClr val="051C2C"/>
+                </a:solidFill>
+                <a:latin typeface="Arial"/>
+              </a:rPr>
+              <a:t>Por qué importa</a:t>
+            </a:r>
+          </a:p>
+        </p:txBody>
+      </p:sp>
+      <p:cxnSp>
+        <p:nvCxnSpPr>
+          <p:cNvPr id="10" name="Connector 9"/>
+          <p:cNvCxnSpPr/>
+          <p:nvPr/>
+        </p:nvCxnSpPr>
+        <p:spPr>
+          <a:xfrm>
+            <a:off x="457200" y="2194560"/>
+            <a:ext cx="5029200" cy="0"/>
+          </a:xfrm>
+          <a:prstGeom prst="line">
+            <a:avLst/>
+          </a:prstGeom>
+          <a:ln w="19050">
+            <a:solidFill>
+              <a:srgbClr val="051C2C"/>
+            </a:solidFill>
+          </a:ln>
+        </p:spPr>
+        <p:style>
+          <a:lnRef idx="2">
+            <a:schemeClr val="accent1"/>
+          </a:lnRef>
+          <a:fillRef idx="0">
+            <a:schemeClr val="accent1"/>
+          </a:fillRef>
+          <a:effectRef idx="1">
+            <a:schemeClr val="accent1"/>
+          </a:effectRef>
+          <a:fontRef idx="minor">
+            <a:schemeClr val="tx1"/>
+          </a:fontRef>
+        </p:style>
+      </p:cxnSp>
       <p:sp>
         <p:nvSpPr>
           <p:cNvPr id="11" name="TextBox 10"/>
@@ -4435,43 +5101,8 @@
         </p:nvSpPr>
         <p:spPr>
           <a:xfrm>
-            <a:off x="5943600" y="1371600"/>
-            <a:ext cx="5943600" cy="457200"/>
-          </a:xfrm>
-          <a:prstGeom prst="rect">
-            <a:avLst/>
-          </a:prstGeom>
-          <a:noFill/>
-        </p:spPr>
-        <p:txBody>
-          <a:bodyPr wrap="square" anchor="t" lIns="0" rIns="0" tIns="0" bIns="0">
-            <a:spAutoFit/>
-          </a:bodyPr>
-          <a:lstStyle/>
-          <a:p>
-            <a:pPr algn="l"/>
-            <a:r>
-              <a:rPr sz="2000" b="1">
-                <a:solidFill>
-                  <a:srgbClr val="3B6AA0"/>
-                </a:solidFill>
-                <a:latin typeface="Helvetica"/>
-              </a:rPr>
-              <a:t>Decisiones de limpieza</a:t>
-            </a:r>
-          </a:p>
-        </p:txBody>
-      </p:sp>
-      <p:sp>
-        <p:nvSpPr>
-          <p:cNvPr id="12" name="TextBox 11"/>
-          <p:cNvSpPr txBox="1"/>
-          <p:nvPr/>
-        </p:nvSpPr>
-        <p:spPr>
-          <a:xfrm>
-            <a:off x="5943600" y="1920240"/>
-            <a:ext cx="5943600" cy="4572000"/>
+            <a:off x="457200" y="2331720"/>
+            <a:ext cx="5029200" cy="3657600"/>
           </a:xfrm>
           <a:prstGeom prst="rect">
             <a:avLst/>
@@ -4486,95 +5117,79 @@
           <a:p>
             <a:pPr>
               <a:spcAft>
-                <a:spcPts val="800"/>
+                <a:spcPts val="1000"/>
               </a:spcAft>
             </a:pPr>
             <a:r>
-              <a:rPr sz="1500">
+              <a:rPr sz="1400">
                 <a:solidFill>
                   <a:srgbClr val="4A4A4A"/>
                 </a:solidFill>
-                <a:latin typeface="Helvetica"/>
-              </a:rPr>
-              <a:t>• Un solo registro por paciente (independencia estadística)</a:t>
+                <a:latin typeface="Arial"/>
+              </a:rPr>
+              <a:t>— Las readmisiones tempranas son un indicador de calidad clínica</a:t>
             </a:r>
           </a:p>
           <a:p>
             <a:pPr>
               <a:spcAft>
-                <a:spcPts val="800"/>
+                <a:spcPts val="1000"/>
               </a:spcAft>
             </a:pPr>
             <a:r>
-              <a:rPr sz="1500">
+              <a:rPr sz="1400">
                 <a:solidFill>
                   <a:srgbClr val="4A4A4A"/>
                 </a:solidFill>
-                <a:latin typeface="Helvetica"/>
-              </a:rPr>
-              <a:t>• Excluir pacientes fallecidos y egresos a hospicio</a:t>
+                <a:latin typeface="Arial"/>
+              </a:rPr>
+              <a:t>— Cada reingreso ocupa cama, personal y consume presupuesto</a:t>
             </a:r>
           </a:p>
           <a:p>
             <a:pPr>
               <a:spcAft>
-                <a:spcPts val="800"/>
+                <a:spcPts val="1000"/>
               </a:spcAft>
             </a:pPr>
             <a:r>
-              <a:rPr sz="1500">
+              <a:rPr sz="1400">
                 <a:solidFill>
                   <a:srgbClr val="4A4A4A"/>
                 </a:solidFill>
-                <a:latin typeface="Helvetica"/>
-              </a:rPr>
-              <a:t>• Eliminar variables casi vacías (weight: 97 % faltantes)</a:t>
+                <a:latin typeface="Arial"/>
+              </a:rPr>
+              <a:t>— Un grupo pequeño puede explicar gran parte del costo total</a:t>
             </a:r>
           </a:p>
           <a:p>
             <a:pPr>
               <a:spcAft>
-                <a:spcPts val="800"/>
+                <a:spcPts val="1000"/>
               </a:spcAft>
             </a:pPr>
             <a:r>
-              <a:rPr sz="1500">
+              <a:rPr sz="1400">
                 <a:solidFill>
                   <a:srgbClr val="4A4A4A"/>
                 </a:solidFill>
-                <a:latin typeface="Helvetica"/>
-              </a:rPr>
-              <a:t>• Conservar 'Desconocido' como categoría observable</a:t>
-            </a:r>
-          </a:p>
-          <a:p>
-            <a:pPr>
-              <a:spcAft>
-                <a:spcPts val="800"/>
-              </a:spcAft>
-            </a:pPr>
-            <a:r>
-              <a:rPr sz="1500">
-                <a:solidFill>
-                  <a:srgbClr val="4A4A4A"/>
-                </a:solidFill>
-                <a:latin typeface="Helvetica"/>
-              </a:rPr>
-              <a:t>•    ↳ validado: tasa 11.6 % vs 10.8 % (p ≈ 4×10⁻⁵)</a:t>
-            </a:r>
-          </a:p>
-        </p:txBody>
-      </p:sp>
-      <p:sp>
-        <p:nvSpPr>
-          <p:cNvPr id="13" name="TextBox 12"/>
-          <p:cNvSpPr txBox="1"/>
-          <p:nvPr/>
-        </p:nvSpPr>
-        <p:spPr>
-          <a:xfrm>
-            <a:off x="457200" y="6492240"/>
-            <a:ext cx="7315200" cy="274320"/>
+                <a:latin typeface="Arial"/>
+              </a:rPr>
+              <a:t>— Identificarlos antes del alta abre ventana de intervención</a:t>
+            </a:r>
+          </a:p>
+        </p:txBody>
+      </p:sp>
+      <p:sp>
+        <p:nvSpPr>
+          <p:cNvPr id="12" name="TextBox 11"/>
+          <p:cNvSpPr txBox="1"/>
+          <p:nvPr/>
+        </p:nvSpPr>
+        <p:spPr>
+          <a:xfrm>
+            <a:off x="6400800" y="1828800"/>
+            <a:ext cx="5303520" cy="365760"/>
           </a:xfrm>
           <a:prstGeom prst="rect">
             <a:avLst/>
@@ -4589,27 +5204,185 @@
           <a:p>
             <a:pPr algn="l"/>
             <a:r>
-              <a:rPr sz="900" b="0">
-                <a:solidFill>
-                  <a:srgbClr val="4A4A4A"/>
-                </a:solidFill>
-                <a:latin typeface="Helvetica"/>
-              </a:rPr>
-              <a:t>Proyecto Final · Analítica de Datos · Universidad Iberoamericana</a:t>
-            </a:r>
-          </a:p>
-        </p:txBody>
-      </p:sp>
-      <p:sp>
-        <p:nvSpPr>
-          <p:cNvPr id="14" name="TextBox 13"/>
-          <p:cNvSpPr txBox="1"/>
-          <p:nvPr/>
-        </p:nvSpPr>
-        <p:spPr>
-          <a:xfrm>
-            <a:off x="11277295" y="6492240"/>
-            <a:ext cx="457200" cy="274320"/>
+              <a:rPr sz="1400" b="1" i="0">
+                <a:solidFill>
+                  <a:srgbClr val="051C2C"/>
+                </a:solidFill>
+                <a:latin typeface="Arial"/>
+              </a:rPr>
+              <a:t>Las tres preguntas</a:t>
+            </a:r>
+          </a:p>
+        </p:txBody>
+      </p:sp>
+      <p:cxnSp>
+        <p:nvCxnSpPr>
+          <p:cNvPr id="13" name="Connector 12"/>
+          <p:cNvCxnSpPr/>
+          <p:nvPr/>
+        </p:nvCxnSpPr>
+        <p:spPr>
+          <a:xfrm>
+            <a:off x="6400800" y="2194560"/>
+            <a:ext cx="5303520" cy="0"/>
+          </a:xfrm>
+          <a:prstGeom prst="line">
+            <a:avLst/>
+          </a:prstGeom>
+          <a:ln w="19050">
+            <a:solidFill>
+              <a:srgbClr val="051C2C"/>
+            </a:solidFill>
+          </a:ln>
+        </p:spPr>
+        <p:style>
+          <a:lnRef idx="2">
+            <a:schemeClr val="accent1"/>
+          </a:lnRef>
+          <a:fillRef idx="0">
+            <a:schemeClr val="accent1"/>
+          </a:fillRef>
+          <a:effectRef idx="1">
+            <a:schemeClr val="accent1"/>
+          </a:effectRef>
+          <a:fontRef idx="minor">
+            <a:schemeClr val="tx1"/>
+          </a:fontRef>
+        </p:style>
+      </p:cxnSp>
+      <p:sp>
+        <p:nvSpPr>
+          <p:cNvPr id="14" name="Rectangle 13"/>
+          <p:cNvSpPr/>
+          <p:nvPr/>
+        </p:nvSpPr>
+        <p:spPr>
+          <a:xfrm>
+            <a:off x="6400800" y="2377440"/>
+            <a:ext cx="457200" cy="960120"/>
+          </a:xfrm>
+          <a:prstGeom prst="rect">
+            <a:avLst/>
+          </a:prstGeom>
+          <a:solidFill>
+            <a:srgbClr val="003D62"/>
+          </a:solidFill>
+          <a:ln>
+            <a:noFill/>
+          </a:ln>
+          <a:effectLst/>
+        </p:spPr>
+        <p:style>
+          <a:lnRef idx="1">
+            <a:schemeClr val="accent1"/>
+          </a:lnRef>
+          <a:fillRef idx="3">
+            <a:schemeClr val="accent1"/>
+          </a:fillRef>
+          <a:effectRef idx="2">
+            <a:schemeClr val="accent1"/>
+          </a:effectRef>
+          <a:fontRef idx="minor">
+            <a:schemeClr val="lt1"/>
+          </a:fontRef>
+        </p:style>
+        <p:txBody>
+          <a:bodyPr rtlCol="0" anchor="ctr"/>
+          <a:lstStyle/>
+          <a:p>
+            <a:pPr algn="ctr"/>
+          </a:p>
+        </p:txBody>
+      </p:sp>
+      <p:sp>
+        <p:nvSpPr>
+          <p:cNvPr id="15" name="TextBox 14"/>
+          <p:cNvSpPr txBox="1"/>
+          <p:nvPr/>
+        </p:nvSpPr>
+        <p:spPr>
+          <a:xfrm>
+            <a:off x="6400800" y="2377440"/>
+            <a:ext cx="457200" cy="960120"/>
+          </a:xfrm>
+          <a:prstGeom prst="rect">
+            <a:avLst/>
+          </a:prstGeom>
+          <a:noFill/>
+        </p:spPr>
+        <p:txBody>
+          <a:bodyPr wrap="square" anchor="ctr" lIns="0" rIns="0" tIns="0" bIns="0">
+            <a:spAutoFit/>
+          </a:bodyPr>
+          <a:lstStyle/>
+          <a:p>
+            <a:pPr algn="ctr"/>
+            <a:r>
+              <a:rPr sz="2400" b="1" i="0">
+                <a:solidFill>
+                  <a:srgbClr val="FFFFFF"/>
+                </a:solidFill>
+                <a:latin typeface="Arial"/>
+              </a:rPr>
+              <a:t>1</a:t>
+            </a:r>
+          </a:p>
+        </p:txBody>
+      </p:sp>
+      <p:sp>
+        <p:nvSpPr>
+          <p:cNvPr id="16" name="Rectangle 15"/>
+          <p:cNvSpPr/>
+          <p:nvPr/>
+        </p:nvSpPr>
+        <p:spPr>
+          <a:xfrm>
+            <a:off x="6903720" y="2377440"/>
+            <a:ext cx="4800600" cy="960120"/>
+          </a:xfrm>
+          <a:prstGeom prst="rect">
+            <a:avLst/>
+          </a:prstGeom>
+          <a:solidFill>
+            <a:srgbClr val="F5F5F5"/>
+          </a:solidFill>
+          <a:ln>
+            <a:noFill/>
+          </a:ln>
+          <a:effectLst/>
+        </p:spPr>
+        <p:style>
+          <a:lnRef idx="1">
+            <a:schemeClr val="accent1"/>
+          </a:lnRef>
+          <a:fillRef idx="3">
+            <a:schemeClr val="accent1"/>
+          </a:fillRef>
+          <a:effectRef idx="2">
+            <a:schemeClr val="accent1"/>
+          </a:effectRef>
+          <a:fontRef idx="minor">
+            <a:schemeClr val="lt1"/>
+          </a:fontRef>
+        </p:style>
+        <p:txBody>
+          <a:bodyPr rtlCol="0" anchor="ctr"/>
+          <a:lstStyle/>
+          <a:p>
+            <a:pPr algn="ctr"/>
+          </a:p>
+        </p:txBody>
+      </p:sp>
+      <p:sp>
+        <p:nvSpPr>
+          <p:cNvPr id="17" name="TextBox 16"/>
+          <p:cNvSpPr txBox="1"/>
+          <p:nvPr/>
+        </p:nvSpPr>
+        <p:spPr>
+          <a:xfrm>
+            <a:off x="7040880" y="2450592"/>
+            <a:ext cx="4663440" cy="365760"/>
           </a:xfrm>
           <a:prstGeom prst="rect">
             <a:avLst/>
@@ -4622,15 +5395,436 @@
           </a:bodyPr>
           <a:lstStyle/>
           <a:p>
-            <a:pPr algn="r"/>
-            <a:r>
-              <a:rPr sz="900" b="0">
-                <a:solidFill>
-                  <a:srgbClr val="4A4A4A"/>
-                </a:solidFill>
-                <a:latin typeface="Helvetica"/>
-              </a:rPr>
-              <a:t>3/9</a:t>
+            <a:pPr algn="l"/>
+            <a:r>
+              <a:rPr sz="1400" b="1" i="0">
+                <a:solidFill>
+                  <a:srgbClr val="051C2C"/>
+                </a:solidFill>
+                <a:latin typeface="Arial"/>
+              </a:rPr>
+              <a:t>¿Quién regresa antes de 30 días?</a:t>
+            </a:r>
+          </a:p>
+        </p:txBody>
+      </p:sp>
+      <p:sp>
+        <p:nvSpPr>
+          <p:cNvPr id="18" name="TextBox 17"/>
+          <p:cNvSpPr txBox="1"/>
+          <p:nvPr/>
+        </p:nvSpPr>
+        <p:spPr>
+          <a:xfrm>
+            <a:off x="7040880" y="2880360"/>
+            <a:ext cx="4663440" cy="365760"/>
+          </a:xfrm>
+          <a:prstGeom prst="rect">
+            <a:avLst/>
+          </a:prstGeom>
+          <a:noFill/>
+        </p:spPr>
+        <p:txBody>
+          <a:bodyPr wrap="square" anchor="t" lIns="0" rIns="0" tIns="0" bIns="0">
+            <a:spAutoFit/>
+          </a:bodyPr>
+          <a:lstStyle/>
+          <a:p>
+            <a:pPr algn="l"/>
+            <a:r>
+              <a:rPr sz="1100" b="0" i="1">
+                <a:solidFill>
+                  <a:srgbClr val="8E8E8E"/>
+                </a:solidFill>
+                <a:latin typeface="Arial"/>
+              </a:rPr>
+              <a:t>Variable binaria · target principal</a:t>
+            </a:r>
+          </a:p>
+        </p:txBody>
+      </p:sp>
+      <p:sp>
+        <p:nvSpPr>
+          <p:cNvPr id="19" name="Rectangle 18"/>
+          <p:cNvSpPr/>
+          <p:nvPr/>
+        </p:nvSpPr>
+        <p:spPr>
+          <a:xfrm>
+            <a:off x="6400800" y="3520440"/>
+            <a:ext cx="457200" cy="960120"/>
+          </a:xfrm>
+          <a:prstGeom prst="rect">
+            <a:avLst/>
+          </a:prstGeom>
+          <a:solidFill>
+            <a:srgbClr val="003D62"/>
+          </a:solidFill>
+          <a:ln>
+            <a:noFill/>
+          </a:ln>
+          <a:effectLst/>
+        </p:spPr>
+        <p:style>
+          <a:lnRef idx="1">
+            <a:schemeClr val="accent1"/>
+          </a:lnRef>
+          <a:fillRef idx="3">
+            <a:schemeClr val="accent1"/>
+          </a:fillRef>
+          <a:effectRef idx="2">
+            <a:schemeClr val="accent1"/>
+          </a:effectRef>
+          <a:fontRef idx="minor">
+            <a:schemeClr val="lt1"/>
+          </a:fontRef>
+        </p:style>
+        <p:txBody>
+          <a:bodyPr rtlCol="0" anchor="ctr"/>
+          <a:lstStyle/>
+          <a:p>
+            <a:pPr algn="ctr"/>
+          </a:p>
+        </p:txBody>
+      </p:sp>
+      <p:sp>
+        <p:nvSpPr>
+          <p:cNvPr id="20" name="TextBox 19"/>
+          <p:cNvSpPr txBox="1"/>
+          <p:nvPr/>
+        </p:nvSpPr>
+        <p:spPr>
+          <a:xfrm>
+            <a:off x="6400800" y="3520440"/>
+            <a:ext cx="457200" cy="960120"/>
+          </a:xfrm>
+          <a:prstGeom prst="rect">
+            <a:avLst/>
+          </a:prstGeom>
+          <a:noFill/>
+        </p:spPr>
+        <p:txBody>
+          <a:bodyPr wrap="square" anchor="ctr" lIns="0" rIns="0" tIns="0" bIns="0">
+            <a:spAutoFit/>
+          </a:bodyPr>
+          <a:lstStyle/>
+          <a:p>
+            <a:pPr algn="ctr"/>
+            <a:r>
+              <a:rPr sz="2400" b="1" i="0">
+                <a:solidFill>
+                  <a:srgbClr val="FFFFFF"/>
+                </a:solidFill>
+                <a:latin typeface="Arial"/>
+              </a:rPr>
+              <a:t>2</a:t>
+            </a:r>
+          </a:p>
+        </p:txBody>
+      </p:sp>
+      <p:sp>
+        <p:nvSpPr>
+          <p:cNvPr id="21" name="Rectangle 20"/>
+          <p:cNvSpPr/>
+          <p:nvPr/>
+        </p:nvSpPr>
+        <p:spPr>
+          <a:xfrm>
+            <a:off x="6903720" y="3520440"/>
+            <a:ext cx="4800600" cy="960120"/>
+          </a:xfrm>
+          <a:prstGeom prst="rect">
+            <a:avLst/>
+          </a:prstGeom>
+          <a:solidFill>
+            <a:srgbClr val="F5F5F5"/>
+          </a:solidFill>
+          <a:ln>
+            <a:noFill/>
+          </a:ln>
+          <a:effectLst/>
+        </p:spPr>
+        <p:style>
+          <a:lnRef idx="1">
+            <a:schemeClr val="accent1"/>
+          </a:lnRef>
+          <a:fillRef idx="3">
+            <a:schemeClr val="accent1"/>
+          </a:fillRef>
+          <a:effectRef idx="2">
+            <a:schemeClr val="accent1"/>
+          </a:effectRef>
+          <a:fontRef idx="minor">
+            <a:schemeClr val="lt1"/>
+          </a:fontRef>
+        </p:style>
+        <p:txBody>
+          <a:bodyPr rtlCol="0" anchor="ctr"/>
+          <a:lstStyle/>
+          <a:p>
+            <a:pPr algn="ctr"/>
+          </a:p>
+        </p:txBody>
+      </p:sp>
+      <p:sp>
+        <p:nvSpPr>
+          <p:cNvPr id="22" name="TextBox 21"/>
+          <p:cNvSpPr txBox="1"/>
+          <p:nvPr/>
+        </p:nvSpPr>
+        <p:spPr>
+          <a:xfrm>
+            <a:off x="7040880" y="3593592"/>
+            <a:ext cx="4663440" cy="365760"/>
+          </a:xfrm>
+          <a:prstGeom prst="rect">
+            <a:avLst/>
+          </a:prstGeom>
+          <a:noFill/>
+        </p:spPr>
+        <p:txBody>
+          <a:bodyPr wrap="square" anchor="t" lIns="0" rIns="0" tIns="0" bIns="0">
+            <a:spAutoFit/>
+          </a:bodyPr>
+          <a:lstStyle/>
+          <a:p>
+            <a:pPr algn="l"/>
+            <a:r>
+              <a:rPr sz="1400" b="1" i="0">
+                <a:solidFill>
+                  <a:srgbClr val="051C2C"/>
+                </a:solidFill>
+                <a:latin typeface="Arial"/>
+              </a:rPr>
+              <a:t>¿Quién acumula más admisiones?</a:t>
+            </a:r>
+          </a:p>
+        </p:txBody>
+      </p:sp>
+      <p:sp>
+        <p:nvSpPr>
+          <p:cNvPr id="23" name="TextBox 22"/>
+          <p:cNvSpPr txBox="1"/>
+          <p:nvPr/>
+        </p:nvSpPr>
+        <p:spPr>
+          <a:xfrm>
+            <a:off x="7040880" y="4023360"/>
+            <a:ext cx="4663440" cy="365760"/>
+          </a:xfrm>
+          <a:prstGeom prst="rect">
+            <a:avLst/>
+          </a:prstGeom>
+          <a:noFill/>
+        </p:spPr>
+        <p:txBody>
+          <a:bodyPr wrap="square" anchor="t" lIns="0" rIns="0" tIns="0" bIns="0">
+            <a:spAutoFit/>
+          </a:bodyPr>
+          <a:lstStyle/>
+          <a:p>
+            <a:pPr algn="l"/>
+            <a:r>
+              <a:rPr sz="1100" b="0" i="1">
+                <a:solidFill>
+                  <a:srgbClr val="8E8E8E"/>
+                </a:solidFill>
+                <a:latin typeface="Arial"/>
+              </a:rPr>
+              <a:t>Conteo con cola larga</a:t>
+            </a:r>
+          </a:p>
+        </p:txBody>
+      </p:sp>
+      <p:sp>
+        <p:nvSpPr>
+          <p:cNvPr id="24" name="Rectangle 23"/>
+          <p:cNvSpPr/>
+          <p:nvPr/>
+        </p:nvSpPr>
+        <p:spPr>
+          <a:xfrm>
+            <a:off x="6400800" y="4663440"/>
+            <a:ext cx="457200" cy="960120"/>
+          </a:xfrm>
+          <a:prstGeom prst="rect">
+            <a:avLst/>
+          </a:prstGeom>
+          <a:solidFill>
+            <a:srgbClr val="003D62"/>
+          </a:solidFill>
+          <a:ln>
+            <a:noFill/>
+          </a:ln>
+          <a:effectLst/>
+        </p:spPr>
+        <p:style>
+          <a:lnRef idx="1">
+            <a:schemeClr val="accent1"/>
+          </a:lnRef>
+          <a:fillRef idx="3">
+            <a:schemeClr val="accent1"/>
+          </a:fillRef>
+          <a:effectRef idx="2">
+            <a:schemeClr val="accent1"/>
+          </a:effectRef>
+          <a:fontRef idx="minor">
+            <a:schemeClr val="lt1"/>
+          </a:fontRef>
+        </p:style>
+        <p:txBody>
+          <a:bodyPr rtlCol="0" anchor="ctr"/>
+          <a:lstStyle/>
+          <a:p>
+            <a:pPr algn="ctr"/>
+          </a:p>
+        </p:txBody>
+      </p:sp>
+      <p:sp>
+        <p:nvSpPr>
+          <p:cNvPr id="25" name="TextBox 24"/>
+          <p:cNvSpPr txBox="1"/>
+          <p:nvPr/>
+        </p:nvSpPr>
+        <p:spPr>
+          <a:xfrm>
+            <a:off x="6400800" y="4663440"/>
+            <a:ext cx="457200" cy="960120"/>
+          </a:xfrm>
+          <a:prstGeom prst="rect">
+            <a:avLst/>
+          </a:prstGeom>
+          <a:noFill/>
+        </p:spPr>
+        <p:txBody>
+          <a:bodyPr wrap="square" anchor="ctr" lIns="0" rIns="0" tIns="0" bIns="0">
+            <a:spAutoFit/>
+          </a:bodyPr>
+          <a:lstStyle/>
+          <a:p>
+            <a:pPr algn="ctr"/>
+            <a:r>
+              <a:rPr sz="2400" b="1" i="0">
+                <a:solidFill>
+                  <a:srgbClr val="FFFFFF"/>
+                </a:solidFill>
+                <a:latin typeface="Arial"/>
+              </a:rPr>
+              <a:t>3</a:t>
+            </a:r>
+          </a:p>
+        </p:txBody>
+      </p:sp>
+      <p:sp>
+        <p:nvSpPr>
+          <p:cNvPr id="26" name="Rectangle 25"/>
+          <p:cNvSpPr/>
+          <p:nvPr/>
+        </p:nvSpPr>
+        <p:spPr>
+          <a:xfrm>
+            <a:off x="6903720" y="4663440"/>
+            <a:ext cx="4800600" cy="960120"/>
+          </a:xfrm>
+          <a:prstGeom prst="rect">
+            <a:avLst/>
+          </a:prstGeom>
+          <a:solidFill>
+            <a:srgbClr val="F5F5F5"/>
+          </a:solidFill>
+          <a:ln>
+            <a:noFill/>
+          </a:ln>
+          <a:effectLst/>
+        </p:spPr>
+        <p:style>
+          <a:lnRef idx="1">
+            <a:schemeClr val="accent1"/>
+          </a:lnRef>
+          <a:fillRef idx="3">
+            <a:schemeClr val="accent1"/>
+          </a:fillRef>
+          <a:effectRef idx="2">
+            <a:schemeClr val="accent1"/>
+          </a:effectRef>
+          <a:fontRef idx="minor">
+            <a:schemeClr val="lt1"/>
+          </a:fontRef>
+        </p:style>
+        <p:txBody>
+          <a:bodyPr rtlCol="0" anchor="ctr"/>
+          <a:lstStyle/>
+          <a:p>
+            <a:pPr algn="ctr"/>
+          </a:p>
+        </p:txBody>
+      </p:sp>
+      <p:sp>
+        <p:nvSpPr>
+          <p:cNvPr id="27" name="TextBox 26"/>
+          <p:cNvSpPr txBox="1"/>
+          <p:nvPr/>
+        </p:nvSpPr>
+        <p:spPr>
+          <a:xfrm>
+            <a:off x="7040880" y="4736592"/>
+            <a:ext cx="4663440" cy="365760"/>
+          </a:xfrm>
+          <a:prstGeom prst="rect">
+            <a:avLst/>
+          </a:prstGeom>
+          <a:noFill/>
+        </p:spPr>
+        <p:txBody>
+          <a:bodyPr wrap="square" anchor="t" lIns="0" rIns="0" tIns="0" bIns="0">
+            <a:spAutoFit/>
+          </a:bodyPr>
+          <a:lstStyle/>
+          <a:p>
+            <a:pPr algn="l"/>
+            <a:r>
+              <a:rPr sz="1400" b="1" i="0">
+                <a:solidFill>
+                  <a:srgbClr val="051C2C"/>
+                </a:solidFill>
+                <a:latin typeface="Arial"/>
+              </a:rPr>
+              <a:t>¿Quién se queda más tiempo internado?</a:t>
+            </a:r>
+          </a:p>
+        </p:txBody>
+      </p:sp>
+      <p:sp>
+        <p:nvSpPr>
+          <p:cNvPr id="28" name="TextBox 27"/>
+          <p:cNvSpPr txBox="1"/>
+          <p:nvPr/>
+        </p:nvSpPr>
+        <p:spPr>
+          <a:xfrm>
+            <a:off x="7040880" y="5166359"/>
+            <a:ext cx="4663440" cy="365760"/>
+          </a:xfrm>
+          <a:prstGeom prst="rect">
+            <a:avLst/>
+          </a:prstGeom>
+          <a:noFill/>
+        </p:spPr>
+        <p:txBody>
+          <a:bodyPr wrap="square" anchor="t" lIns="0" rIns="0" tIns="0" bIns="0">
+            <a:spAutoFit/>
+          </a:bodyPr>
+          <a:lstStyle/>
+          <a:p>
+            <a:pPr algn="l"/>
+            <a:r>
+              <a:rPr sz="1100" b="0" i="1">
+                <a:solidFill>
+                  <a:srgbClr val="8E8E8E"/>
+                </a:solidFill>
+                <a:latin typeface="Arial"/>
+              </a:rPr>
+              <a:t>Duración continua de la estancia</a:t>
             </a:r>
           </a:p>
         </p:txBody>
@@ -4662,17 +5856,18 @@
         <p:spPr>
           <a:xfrm>
             <a:off x="0" y="0"/>
-            <a:ext cx="12191695" cy="822960"/>
+            <a:ext cx="12191695" cy="73152"/>
           </a:xfrm>
           <a:prstGeom prst="rect">
             <a:avLst/>
           </a:prstGeom>
           <a:solidFill>
-            <a:srgbClr val="3B6AA0"/>
+            <a:srgbClr val="051C2C"/>
           </a:solidFill>
           <a:ln>
             <a:noFill/>
           </a:ln>
+          <a:effectLst/>
         </p:spPr>
         <p:style>
           <a:lnRef idx="1">
@@ -4704,29 +5899,29 @@
         </p:nvSpPr>
         <p:spPr>
           <a:xfrm>
-            <a:off x="457200" y="164592"/>
-            <a:ext cx="11277295" cy="502920"/>
-          </a:xfrm>
-          <a:prstGeom prst="rect">
-            <a:avLst/>
-          </a:prstGeom>
-          <a:noFill/>
-        </p:spPr>
-        <p:txBody>
-          <a:bodyPr wrap="square" anchor="ctr" lIns="0" rIns="0" tIns="0" bIns="0">
+            <a:off x="457200" y="274320"/>
+            <a:ext cx="11277295" cy="274320"/>
+          </a:xfrm>
+          <a:prstGeom prst="rect">
+            <a:avLst/>
+          </a:prstGeom>
+          <a:noFill/>
+        </p:spPr>
+        <p:txBody>
+          <a:bodyPr wrap="square" anchor="t" lIns="0" rIns="0" tIns="0" bIns="0">
             <a:spAutoFit/>
           </a:bodyPr>
           <a:lstStyle/>
           <a:p>
             <a:pPr algn="l"/>
             <a:r>
-              <a:rPr sz="2600" b="1">
-                <a:solidFill>
-                  <a:srgbClr val="FFFFFF"/>
-                </a:solidFill>
-                <a:latin typeface="Helvetica"/>
-              </a:rPr>
-              <a:t>Tres fenómenos, tres modelos</a:t>
+              <a:rPr sz="1000" b="1" i="0">
+                <a:solidFill>
+                  <a:srgbClr val="8E8E8E"/>
+                </a:solidFill>
+                <a:latin typeface="Arial"/>
+              </a:rPr>
+              <a:t>DATOS Y PREPARACIÓN</a:t>
             </a:r>
           </a:p>
         </p:txBody>
@@ -4739,8 +5934,8 @@
         </p:nvSpPr>
         <p:spPr>
           <a:xfrm>
-            <a:off x="457200" y="841248"/>
-            <a:ext cx="11277295" cy="365760"/>
+            <a:off x="457200" y="548640"/>
+            <a:ext cx="11277295" cy="822960"/>
           </a:xfrm>
           <a:prstGeom prst="rect">
             <a:avLst/>
@@ -4755,51 +5950,97 @@
           <a:p>
             <a:pPr algn="l"/>
             <a:r>
-              <a:rPr sz="1400" b="0">
-                <a:solidFill>
-                  <a:srgbClr val="4A4A4A"/>
-                </a:solidFill>
-                <a:latin typeface="Helvetica"/>
-              </a:rPr>
-              <a:t>Cada variable de respuesta requiere su propia familia estadística</a:t>
-            </a:r>
-          </a:p>
-        </p:txBody>
-      </p:sp>
-      <p:pic>
-        <p:nvPicPr>
-          <p:cNvPr id="5" name="Picture 4" descr="fig1_distribuciones.png"/>
-          <p:cNvPicPr>
-            <a:picLocks noChangeAspect="1"/>
-          </p:cNvPicPr>
-          <p:nvPr/>
-        </p:nvPicPr>
-        <p:blipFill>
-          <a:blip r:embed="rId2"/>
-          <a:stretch>
-            <a:fillRect/>
-          </a:stretch>
-        </p:blipFill>
-        <p:spPr>
-          <a:xfrm>
-            <a:off x="457200" y="1371600"/>
-            <a:ext cx="6858000" cy="1747284"/>
-          </a:xfrm>
-          <a:prstGeom prst="rect">
-            <a:avLst/>
-          </a:prstGeom>
-        </p:spPr>
-      </p:pic>
-      <p:sp>
-        <p:nvSpPr>
-          <p:cNvPr id="6" name="TextBox 5"/>
-          <p:cNvSpPr txBox="1"/>
-          <p:nvPr/>
-        </p:nvSpPr>
-        <p:spPr>
-          <a:xfrm>
-            <a:off x="7589520" y="1463040"/>
-            <a:ext cx="4114800" cy="365760"/>
+              <a:rPr sz="2200" b="1" i="0">
+                <a:solidFill>
+                  <a:srgbClr val="051C2C"/>
+                </a:solidFill>
+                <a:latin typeface="Arial"/>
+              </a:rPr>
+              <a:t>Los 70 mil pacientes únicos del dataset permiten responder las tres preguntas con confianza estadística</a:t>
+            </a:r>
+          </a:p>
+        </p:txBody>
+      </p:sp>
+      <p:cxnSp>
+        <p:nvCxnSpPr>
+          <p:cNvPr id="5" name="Connector 4"/>
+          <p:cNvCxnSpPr/>
+          <p:nvPr/>
+        </p:nvCxnSpPr>
+        <p:spPr>
+          <a:xfrm>
+            <a:off x="457200" y="1417320"/>
+            <a:ext cx="11277295" cy="0"/>
+          </a:xfrm>
+          <a:prstGeom prst="line">
+            <a:avLst/>
+          </a:prstGeom>
+          <a:ln w="9525">
+            <a:solidFill>
+              <a:srgbClr val="E1E1E1"/>
+            </a:solidFill>
+          </a:ln>
+        </p:spPr>
+        <p:style>
+          <a:lnRef idx="2">
+            <a:schemeClr val="accent1"/>
+          </a:lnRef>
+          <a:fillRef idx="0">
+            <a:schemeClr val="accent1"/>
+          </a:fillRef>
+          <a:effectRef idx="1">
+            <a:schemeClr val="accent1"/>
+          </a:effectRef>
+          <a:fontRef idx="minor">
+            <a:schemeClr val="tx1"/>
+          </a:fontRef>
+        </p:style>
+      </p:cxnSp>
+      <p:cxnSp>
+        <p:nvCxnSpPr>
+          <p:cNvPr id="6" name="Connector 5"/>
+          <p:cNvCxnSpPr/>
+          <p:nvPr/>
+        </p:nvCxnSpPr>
+        <p:spPr>
+          <a:xfrm>
+            <a:off x="457200" y="6446520"/>
+            <a:ext cx="11277295" cy="0"/>
+          </a:xfrm>
+          <a:prstGeom prst="line">
+            <a:avLst/>
+          </a:prstGeom>
+          <a:ln w="9525">
+            <a:solidFill>
+              <a:srgbClr val="E1E1E1"/>
+            </a:solidFill>
+          </a:ln>
+        </p:spPr>
+        <p:style>
+          <a:lnRef idx="2">
+            <a:schemeClr val="accent1"/>
+          </a:lnRef>
+          <a:fillRef idx="0">
+            <a:schemeClr val="accent1"/>
+          </a:fillRef>
+          <a:effectRef idx="1">
+            <a:schemeClr val="accent1"/>
+          </a:effectRef>
+          <a:fontRef idx="minor">
+            <a:schemeClr val="tx1"/>
+          </a:fontRef>
+        </p:style>
+      </p:cxnSp>
+      <p:sp>
+        <p:nvSpPr>
+          <p:cNvPr id="7" name="TextBox 6"/>
+          <p:cNvSpPr txBox="1"/>
+          <p:nvPr/>
+        </p:nvSpPr>
+        <p:spPr>
+          <a:xfrm>
+            <a:off x="457200" y="6537960"/>
+            <a:ext cx="10058400" cy="228600"/>
           </a:xfrm>
           <a:prstGeom prst="rect">
             <a:avLst/>
@@ -4814,37 +6055,73 @@
           <a:p>
             <a:pPr algn="l"/>
             <a:r>
-              <a:rPr sz="1500" b="1">
-                <a:solidFill>
-                  <a:srgbClr val="4A4A4A"/>
-                </a:solidFill>
-                <a:latin typeface="Helvetica"/>
-              </a:rPr>
-              <a:t>Modelo elegido en cada caso:</a:t>
-            </a:r>
-          </a:p>
-        </p:txBody>
-      </p:sp>
-      <p:sp>
-        <p:nvSpPr>
-          <p:cNvPr id="7" name="Rectangle 6"/>
+              <a:rPr sz="800" b="0" i="1">
+                <a:solidFill>
+                  <a:srgbClr val="8E8E8E"/>
+                </a:solidFill>
+                <a:latin typeface="Arial"/>
+              </a:rPr>
+              <a:t>Fuente: análisis del equipo basado en Diabetes 130-Hospitals (UCI, n=69,970)</a:t>
+            </a:r>
+          </a:p>
+        </p:txBody>
+      </p:sp>
+      <p:sp>
+        <p:nvSpPr>
+          <p:cNvPr id="8" name="TextBox 7"/>
+          <p:cNvSpPr txBox="1"/>
+          <p:nvPr/>
+        </p:nvSpPr>
+        <p:spPr>
+          <a:xfrm>
+            <a:off x="11551615" y="6537960"/>
+            <a:ext cx="274320" cy="228600"/>
+          </a:xfrm>
+          <a:prstGeom prst="rect">
+            <a:avLst/>
+          </a:prstGeom>
+          <a:noFill/>
+        </p:spPr>
+        <p:txBody>
+          <a:bodyPr wrap="square" anchor="t" lIns="0" rIns="0" tIns="0" bIns="0">
+            <a:spAutoFit/>
+          </a:bodyPr>
+          <a:lstStyle/>
+          <a:p>
+            <a:pPr algn="r"/>
+            <a:r>
+              <a:rPr sz="900" b="0" i="0">
+                <a:solidFill>
+                  <a:srgbClr val="8E8E8E"/>
+                </a:solidFill>
+                <a:latin typeface="Arial"/>
+              </a:rPr>
+              <a:t>4</a:t>
+            </a:r>
+          </a:p>
+        </p:txBody>
+      </p:sp>
+      <p:sp>
+        <p:nvSpPr>
+          <p:cNvPr id="9" name="Rectangle 8"/>
           <p:cNvSpPr/>
           <p:nvPr/>
         </p:nvSpPr>
         <p:spPr>
           <a:xfrm>
-            <a:off x="7589520" y="2011680"/>
-            <a:ext cx="137160" cy="914400"/>
+            <a:off x="457200" y="1828800"/>
+            <a:ext cx="54864" cy="1463040"/>
           </a:xfrm>
           <a:prstGeom prst="rect">
             <a:avLst/>
           </a:prstGeom>
           <a:solidFill>
-            <a:srgbClr val="3B6AA0"/>
+            <a:srgbClr val="003D62"/>
           </a:solidFill>
           <a:ln>
             <a:noFill/>
           </a:ln>
+          <a:effectLst/>
         </p:spPr>
         <p:style>
           <a:lnRef idx="1">
@@ -4870,14 +6147,14 @@
       </p:sp>
       <p:sp>
         <p:nvSpPr>
-          <p:cNvPr id="8" name="TextBox 7"/>
-          <p:cNvSpPr txBox="1"/>
-          <p:nvPr/>
-        </p:nvSpPr>
-        <p:spPr>
-          <a:xfrm>
-            <a:off x="7863840" y="2057400"/>
-            <a:ext cx="3931920" cy="365760"/>
+          <p:cNvPr id="10" name="TextBox 9"/>
+          <p:cNvSpPr txBox="1"/>
+          <p:nvPr/>
+        </p:nvSpPr>
+        <p:spPr>
+          <a:xfrm>
+            <a:off x="640080" y="1828800"/>
+            <a:ext cx="3454298" cy="822960"/>
           </a:xfrm>
           <a:prstGeom prst="rect">
             <a:avLst/>
@@ -4892,72 +6169,85 @@
           <a:p>
             <a:pPr algn="l"/>
             <a:r>
-              <a:rPr sz="1200" b="0">
+              <a:rPr sz="4200" b="1" i="0">
+                <a:solidFill>
+                  <a:srgbClr val="051C2C"/>
+                </a:solidFill>
+                <a:latin typeface="Arial"/>
+              </a:rPr>
+              <a:t>101,766</a:t>
+            </a:r>
+          </a:p>
+        </p:txBody>
+      </p:sp>
+      <p:sp>
+        <p:nvSpPr>
+          <p:cNvPr id="11" name="TextBox 10"/>
+          <p:cNvSpPr txBox="1"/>
+          <p:nvPr/>
+        </p:nvSpPr>
+        <p:spPr>
+          <a:xfrm>
+            <a:off x="640080" y="2697480"/>
+            <a:ext cx="3454298" cy="731520"/>
+          </a:xfrm>
+          <a:prstGeom prst="rect">
+            <a:avLst/>
+          </a:prstGeom>
+          <a:noFill/>
+        </p:spPr>
+        <p:txBody>
+          <a:bodyPr wrap="square" anchor="t" lIns="0" rIns="0" tIns="0" bIns="0">
+            <a:spAutoFit/>
+          </a:bodyPr>
+          <a:lstStyle/>
+          <a:p>
+            <a:pPr algn="l"/>
+            <a:r>
+              <a:rPr sz="1200" b="0" i="0">
                 <a:solidFill>
                   <a:srgbClr val="4A4A4A"/>
                 </a:solidFill>
-                <a:latin typeface="Helvetica"/>
-              </a:rPr>
-              <a:t>Readmisión (sí/no)</a:t>
-            </a:r>
-          </a:p>
-        </p:txBody>
-      </p:sp>
-      <p:sp>
-        <p:nvSpPr>
-          <p:cNvPr id="9" name="TextBox 8"/>
-          <p:cNvSpPr txBox="1"/>
-          <p:nvPr/>
-        </p:nvSpPr>
-        <p:spPr>
-          <a:xfrm>
-            <a:off x="7863840" y="2395728"/>
-            <a:ext cx="3931920" cy="457200"/>
-          </a:xfrm>
-          <a:prstGeom prst="rect">
-            <a:avLst/>
-          </a:prstGeom>
-          <a:noFill/>
-        </p:spPr>
-        <p:txBody>
-          <a:bodyPr wrap="square" anchor="t" lIns="0" rIns="0" tIns="0" bIns="0">
-            <a:spAutoFit/>
-          </a:bodyPr>
-          <a:lstStyle/>
+                <a:latin typeface="Arial"/>
+              </a:rPr>
+              <a:t>admisiones originales</a:t>
+            </a:r>
+          </a:p>
           <a:p>
             <a:pPr algn="l"/>
             <a:r>
-              <a:rPr sz="1800" b="1">
-                <a:solidFill>
-                  <a:srgbClr val="3B6AA0"/>
-                </a:solidFill>
-                <a:latin typeface="Helvetica"/>
-              </a:rPr>
-              <a:t>Regresión logística</a:t>
-            </a:r>
-          </a:p>
-        </p:txBody>
-      </p:sp>
-      <p:sp>
-        <p:nvSpPr>
-          <p:cNvPr id="10" name="Rectangle 9"/>
+              <a:rPr sz="1200" b="0" i="0">
+                <a:solidFill>
+                  <a:srgbClr val="4A4A4A"/>
+                </a:solidFill>
+                <a:latin typeface="Arial"/>
+              </a:rPr>
+              <a:t>en 130 hospitales (EE.UU., 1999–2008)</a:t>
+            </a:r>
+          </a:p>
+        </p:txBody>
+      </p:sp>
+      <p:sp>
+        <p:nvSpPr>
+          <p:cNvPr id="12" name="Rectangle 11"/>
           <p:cNvSpPr/>
           <p:nvPr/>
         </p:nvSpPr>
         <p:spPr>
           <a:xfrm>
-            <a:off x="7589520" y="3200400"/>
-            <a:ext cx="137160" cy="914400"/>
+            <a:off x="4277258" y="1828800"/>
+            <a:ext cx="54864" cy="1463040"/>
           </a:xfrm>
           <a:prstGeom prst="rect">
             <a:avLst/>
           </a:prstGeom>
           <a:solidFill>
-            <a:srgbClr val="B3582D"/>
+            <a:srgbClr val="003D62"/>
           </a:solidFill>
           <a:ln>
             <a:noFill/>
           </a:ln>
+          <a:effectLst/>
         </p:spPr>
         <p:style>
           <a:lnRef idx="1">
@@ -4983,14 +6273,14 @@
       </p:sp>
       <p:sp>
         <p:nvSpPr>
-          <p:cNvPr id="11" name="TextBox 10"/>
-          <p:cNvSpPr txBox="1"/>
-          <p:nvPr/>
-        </p:nvSpPr>
-        <p:spPr>
-          <a:xfrm>
-            <a:off x="7863840" y="3246120"/>
-            <a:ext cx="3931920" cy="365760"/>
+          <p:cNvPr id="13" name="TextBox 12"/>
+          <p:cNvSpPr txBox="1"/>
+          <p:nvPr/>
+        </p:nvSpPr>
+        <p:spPr>
+          <a:xfrm>
+            <a:off x="4460138" y="1828800"/>
+            <a:ext cx="3454298" cy="822960"/>
           </a:xfrm>
           <a:prstGeom prst="rect">
             <a:avLst/>
@@ -5005,72 +6295,85 @@
           <a:p>
             <a:pPr algn="l"/>
             <a:r>
-              <a:rPr sz="1200" b="0">
+              <a:rPr sz="4200" b="1" i="0">
+                <a:solidFill>
+                  <a:srgbClr val="051C2C"/>
+                </a:solidFill>
+                <a:latin typeface="Arial"/>
+              </a:rPr>
+              <a:t>69,970</a:t>
+            </a:r>
+          </a:p>
+        </p:txBody>
+      </p:sp>
+      <p:sp>
+        <p:nvSpPr>
+          <p:cNvPr id="14" name="TextBox 13"/>
+          <p:cNvSpPr txBox="1"/>
+          <p:nvPr/>
+        </p:nvSpPr>
+        <p:spPr>
+          <a:xfrm>
+            <a:off x="4460138" y="2697480"/>
+            <a:ext cx="3454298" cy="731520"/>
+          </a:xfrm>
+          <a:prstGeom prst="rect">
+            <a:avLst/>
+          </a:prstGeom>
+          <a:noFill/>
+        </p:spPr>
+        <p:txBody>
+          <a:bodyPr wrap="square" anchor="t" lIns="0" rIns="0" tIns="0" bIns="0">
+            <a:spAutoFit/>
+          </a:bodyPr>
+          <a:lstStyle/>
+          <a:p>
+            <a:pPr algn="l"/>
+            <a:r>
+              <a:rPr sz="1200" b="0" i="0">
                 <a:solidFill>
                   <a:srgbClr val="4A4A4A"/>
                 </a:solidFill>
-                <a:latin typeface="Helvetica"/>
-              </a:rPr>
-              <a:t>Admisiones previas (conteo)</a:t>
-            </a:r>
-          </a:p>
-        </p:txBody>
-      </p:sp>
-      <p:sp>
-        <p:nvSpPr>
-          <p:cNvPr id="12" name="TextBox 11"/>
-          <p:cNvSpPr txBox="1"/>
-          <p:nvPr/>
-        </p:nvSpPr>
-        <p:spPr>
-          <a:xfrm>
-            <a:off x="7863840" y="3584448"/>
-            <a:ext cx="3931920" cy="457200"/>
-          </a:xfrm>
-          <a:prstGeom prst="rect">
-            <a:avLst/>
-          </a:prstGeom>
-          <a:noFill/>
-        </p:spPr>
-        <p:txBody>
-          <a:bodyPr wrap="square" anchor="t" lIns="0" rIns="0" tIns="0" bIns="0">
-            <a:spAutoFit/>
-          </a:bodyPr>
-          <a:lstStyle/>
+                <a:latin typeface="Arial"/>
+              </a:rPr>
+              <a:t>pacientes únicos tras limpieza</a:t>
+            </a:r>
+          </a:p>
           <a:p>
             <a:pPr algn="l"/>
             <a:r>
-              <a:rPr sz="1800" b="1">
-                <a:solidFill>
-                  <a:srgbClr val="B3582D"/>
-                </a:solidFill>
-                <a:latin typeface="Helvetica"/>
-              </a:rPr>
-              <a:t>Binomial Negativa</a:t>
-            </a:r>
-          </a:p>
-        </p:txBody>
-      </p:sp>
-      <p:sp>
-        <p:nvSpPr>
-          <p:cNvPr id="13" name="Rectangle 12"/>
+              <a:rPr sz="1200" b="0" i="0">
+                <a:solidFill>
+                  <a:srgbClr val="4A4A4A"/>
+                </a:solidFill>
+                <a:latin typeface="Arial"/>
+              </a:rPr>
+              <a:t>(un solo registro por paciente)</a:t>
+            </a:r>
+          </a:p>
+        </p:txBody>
+      </p:sp>
+      <p:sp>
+        <p:nvSpPr>
+          <p:cNvPr id="15" name="Rectangle 14"/>
           <p:cNvSpPr/>
           <p:nvPr/>
         </p:nvSpPr>
         <p:spPr>
           <a:xfrm>
-            <a:off x="7589520" y="4389120"/>
-            <a:ext cx="137160" cy="914400"/>
+            <a:off x="8097316" y="1828800"/>
+            <a:ext cx="54864" cy="1463040"/>
           </a:xfrm>
           <a:prstGeom prst="rect">
             <a:avLst/>
           </a:prstGeom>
           <a:solidFill>
-            <a:srgbClr val="6A9A4F"/>
+            <a:srgbClr val="FE5000"/>
           </a:solidFill>
           <a:ln>
             <a:noFill/>
           </a:ln>
+          <a:effectLst/>
         </p:spPr>
         <p:style>
           <a:lnRef idx="1">
@@ -5096,14 +6399,14 @@
       </p:sp>
       <p:sp>
         <p:nvSpPr>
-          <p:cNvPr id="14" name="TextBox 13"/>
-          <p:cNvSpPr txBox="1"/>
-          <p:nvPr/>
-        </p:nvSpPr>
-        <p:spPr>
-          <a:xfrm>
-            <a:off x="7863840" y="4434840"/>
-            <a:ext cx="3931920" cy="365760"/>
+          <p:cNvPr id="16" name="TextBox 15"/>
+          <p:cNvSpPr txBox="1"/>
+          <p:nvPr/>
+        </p:nvSpPr>
+        <p:spPr>
+          <a:xfrm>
+            <a:off x="8280196" y="1828800"/>
+            <a:ext cx="3454298" cy="822960"/>
           </a:xfrm>
           <a:prstGeom prst="rect">
             <a:avLst/>
@@ -5118,27 +6421,74 @@
           <a:p>
             <a:pPr algn="l"/>
             <a:r>
-              <a:rPr sz="1200" b="0">
+              <a:rPr sz="4200" b="1" i="0">
+                <a:solidFill>
+                  <a:srgbClr val="051C2C"/>
+                </a:solidFill>
+                <a:latin typeface="Arial"/>
+              </a:rPr>
+              <a:t>8.97 %</a:t>
+            </a:r>
+          </a:p>
+        </p:txBody>
+      </p:sp>
+      <p:sp>
+        <p:nvSpPr>
+          <p:cNvPr id="17" name="TextBox 16"/>
+          <p:cNvSpPr txBox="1"/>
+          <p:nvPr/>
+        </p:nvSpPr>
+        <p:spPr>
+          <a:xfrm>
+            <a:off x="8280196" y="2697480"/>
+            <a:ext cx="3454298" cy="731520"/>
+          </a:xfrm>
+          <a:prstGeom prst="rect">
+            <a:avLst/>
+          </a:prstGeom>
+          <a:noFill/>
+        </p:spPr>
+        <p:txBody>
+          <a:bodyPr wrap="square" anchor="t" lIns="0" rIns="0" tIns="0" bIns="0">
+            <a:spAutoFit/>
+          </a:bodyPr>
+          <a:lstStyle/>
+          <a:p>
+            <a:pPr algn="l"/>
+            <a:r>
+              <a:rPr sz="1200" b="0" i="0">
                 <a:solidFill>
                   <a:srgbClr val="4A4A4A"/>
                 </a:solidFill>
-                <a:latin typeface="Helvetica"/>
-              </a:rPr>
-              <a:t>Días de estancia (continuo)</a:t>
-            </a:r>
-          </a:p>
-        </p:txBody>
-      </p:sp>
-      <p:sp>
-        <p:nvSpPr>
-          <p:cNvPr id="15" name="TextBox 14"/>
-          <p:cNvSpPr txBox="1"/>
-          <p:nvPr/>
-        </p:nvSpPr>
-        <p:spPr>
-          <a:xfrm>
-            <a:off x="7863840" y="4773168"/>
-            <a:ext cx="3931920" cy="457200"/>
+                <a:latin typeface="Arial"/>
+              </a:rPr>
+              <a:t>tasa global de readmisión</a:t>
+            </a:r>
+          </a:p>
+          <a:p>
+            <a:pPr algn="l"/>
+            <a:r>
+              <a:rPr sz="1200" b="0" i="0">
+                <a:solidFill>
+                  <a:srgbClr val="4A4A4A"/>
+                </a:solidFill>
+                <a:latin typeface="Arial"/>
+              </a:rPr>
+              <a:t>en menos de 30 días</a:t>
+            </a:r>
+          </a:p>
+        </p:txBody>
+      </p:sp>
+      <p:sp>
+        <p:nvSpPr>
+          <p:cNvPr id="18" name="TextBox 17"/>
+          <p:cNvSpPr txBox="1"/>
+          <p:nvPr/>
+        </p:nvSpPr>
+        <p:spPr>
+          <a:xfrm>
+            <a:off x="457200" y="4114800"/>
+            <a:ext cx="10972800" cy="365760"/>
           </a:xfrm>
           <a:prstGeom prst="rect">
             <a:avLst/>
@@ -5153,83 +6503,190 @@
           <a:p>
             <a:pPr algn="l"/>
             <a:r>
-              <a:rPr sz="1800" b="1">
-                <a:solidFill>
-                  <a:srgbClr val="6A9A4F"/>
-                </a:solidFill>
-                <a:latin typeface="Helvetica"/>
-              </a:rPr>
-              <a:t>Regresión Gamma</a:t>
-            </a:r>
-          </a:p>
-        </p:txBody>
-      </p:sp>
-      <p:sp>
-        <p:nvSpPr>
-          <p:cNvPr id="16" name="TextBox 15"/>
-          <p:cNvSpPr txBox="1"/>
-          <p:nvPr/>
-        </p:nvSpPr>
-        <p:spPr>
-          <a:xfrm>
-            <a:off x="457200" y="6492240"/>
-            <a:ext cx="7315200" cy="274320"/>
-          </a:xfrm>
-          <a:prstGeom prst="rect">
-            <a:avLst/>
-          </a:prstGeom>
-          <a:noFill/>
-        </p:spPr>
-        <p:txBody>
-          <a:bodyPr wrap="square" anchor="t" lIns="0" rIns="0" tIns="0" bIns="0">
-            <a:spAutoFit/>
-          </a:bodyPr>
-          <a:lstStyle/>
-          <a:p>
-            <a:pPr algn="l"/>
-            <a:r>
-              <a:rPr sz="900" b="0">
+              <a:rPr sz="1400" b="1" i="0">
+                <a:solidFill>
+                  <a:srgbClr val="051C2C"/>
+                </a:solidFill>
+                <a:latin typeface="Arial"/>
+              </a:rPr>
+              <a:t>Decisiones clave de preparación</a:t>
+            </a:r>
+          </a:p>
+        </p:txBody>
+      </p:sp>
+      <p:cxnSp>
+        <p:nvCxnSpPr>
+          <p:cNvPr id="19" name="Connector 18"/>
+          <p:cNvCxnSpPr/>
+          <p:nvPr/>
+        </p:nvCxnSpPr>
+        <p:spPr>
+          <a:xfrm>
+            <a:off x="457200" y="4480560"/>
+            <a:ext cx="10972800" cy="0"/>
+          </a:xfrm>
+          <a:prstGeom prst="line">
+            <a:avLst/>
+          </a:prstGeom>
+          <a:ln w="19050">
+            <a:solidFill>
+              <a:srgbClr val="051C2C"/>
+            </a:solidFill>
+          </a:ln>
+        </p:spPr>
+        <p:style>
+          <a:lnRef idx="2">
+            <a:schemeClr val="accent1"/>
+          </a:lnRef>
+          <a:fillRef idx="0">
+            <a:schemeClr val="accent1"/>
+          </a:fillRef>
+          <a:effectRef idx="1">
+            <a:schemeClr val="accent1"/>
+          </a:effectRef>
+          <a:fontRef idx="minor">
+            <a:schemeClr val="tx1"/>
+          </a:fontRef>
+        </p:style>
+      </p:cxnSp>
+      <p:sp>
+        <p:nvSpPr>
+          <p:cNvPr id="20" name="TextBox 19"/>
+          <p:cNvSpPr txBox="1"/>
+          <p:nvPr/>
+        </p:nvSpPr>
+        <p:spPr>
+          <a:xfrm>
+            <a:off x="457200" y="4617720"/>
+            <a:ext cx="5486400" cy="1828800"/>
+          </a:xfrm>
+          <a:prstGeom prst="rect">
+            <a:avLst/>
+          </a:prstGeom>
+          <a:noFill/>
+        </p:spPr>
+        <p:txBody>
+          <a:bodyPr wrap="square" lIns="0" rIns="0" tIns="0" bIns="0">
+            <a:spAutoFit/>
+          </a:bodyPr>
+          <a:lstStyle/>
+          <a:p>
+            <a:pPr>
+              <a:spcAft>
+                <a:spcPts val="600"/>
+              </a:spcAft>
+            </a:pPr>
+            <a:r>
+              <a:rPr sz="1200">
                 <a:solidFill>
                   <a:srgbClr val="4A4A4A"/>
                 </a:solidFill>
-                <a:latin typeface="Helvetica"/>
-              </a:rPr>
-              <a:t>Proyecto Final · Analítica de Datos · Universidad Iberoamericana</a:t>
-            </a:r>
-          </a:p>
-        </p:txBody>
-      </p:sp>
-      <p:sp>
-        <p:nvSpPr>
-          <p:cNvPr id="17" name="TextBox 16"/>
-          <p:cNvSpPr txBox="1"/>
-          <p:nvPr/>
-        </p:nvSpPr>
-        <p:spPr>
-          <a:xfrm>
-            <a:off x="11277295" y="6492240"/>
-            <a:ext cx="457200" cy="274320"/>
-          </a:xfrm>
-          <a:prstGeom prst="rect">
-            <a:avLst/>
-          </a:prstGeom>
-          <a:noFill/>
-        </p:spPr>
-        <p:txBody>
-          <a:bodyPr wrap="square" anchor="t" lIns="0" rIns="0" tIns="0" bIns="0">
-            <a:spAutoFit/>
-          </a:bodyPr>
-          <a:lstStyle/>
-          <a:p>
-            <a:pPr algn="r"/>
-            <a:r>
-              <a:rPr sz="900" b="0">
+                <a:latin typeface="Arial"/>
+              </a:rPr>
+              <a:t>— Un solo registro por paciente para preservar la independencia estadística</a:t>
+            </a:r>
+          </a:p>
+          <a:p>
+            <a:pPr>
+              <a:spcAft>
+                <a:spcPts val="600"/>
+              </a:spcAft>
+            </a:pPr>
+            <a:r>
+              <a:rPr sz="1200">
                 <a:solidFill>
                   <a:srgbClr val="4A4A4A"/>
                 </a:solidFill>
-                <a:latin typeface="Helvetica"/>
-              </a:rPr>
-              <a:t>4/9</a:t>
+                <a:latin typeface="Arial"/>
+              </a:rPr>
+              <a:t>— Exclusión de egresos terminales y a hospicio (no pueden reingresar)</a:t>
+            </a:r>
+          </a:p>
+          <a:p>
+            <a:pPr>
+              <a:spcAft>
+                <a:spcPts val="600"/>
+              </a:spcAft>
+            </a:pPr>
+            <a:r>
+              <a:rPr sz="1200">
+                <a:solidFill>
+                  <a:srgbClr val="4A4A4A"/>
+                </a:solidFill>
+                <a:latin typeface="Arial"/>
+              </a:rPr>
+              <a:t>— Eliminación de variables con &gt;95 % de faltantes (ej. weight)</a:t>
+            </a:r>
+          </a:p>
+        </p:txBody>
+      </p:sp>
+      <p:sp>
+        <p:nvSpPr>
+          <p:cNvPr id="21" name="TextBox 20"/>
+          <p:cNvSpPr txBox="1"/>
+          <p:nvPr/>
+        </p:nvSpPr>
+        <p:spPr>
+          <a:xfrm>
+            <a:off x="6217920" y="4617720"/>
+            <a:ext cx="5486400" cy="1828800"/>
+          </a:xfrm>
+          <a:prstGeom prst="rect">
+            <a:avLst/>
+          </a:prstGeom>
+          <a:noFill/>
+        </p:spPr>
+        <p:txBody>
+          <a:bodyPr wrap="square" lIns="0" rIns="0" tIns="0" bIns="0">
+            <a:spAutoFit/>
+          </a:bodyPr>
+          <a:lstStyle/>
+          <a:p>
+            <a:pPr>
+              <a:spcAft>
+                <a:spcPts val="600"/>
+              </a:spcAft>
+            </a:pPr>
+            <a:r>
+              <a:rPr sz="1200">
+                <a:solidFill>
+                  <a:srgbClr val="4A4A4A"/>
+                </a:solidFill>
+                <a:latin typeface="Arial"/>
+              </a:rPr>
+              <a:t>— Faltantes informativos conservados como categoría 'Desconocido'</a:t>
+            </a:r>
+          </a:p>
+          <a:p>
+            <a:pPr>
+              <a:spcAft>
+                <a:spcPts val="600"/>
+              </a:spcAft>
+            </a:pPr>
+            <a:r>
+              <a:rPr sz="1200">
+                <a:solidFill>
+                  <a:srgbClr val="4A4A4A"/>
+                </a:solidFill>
+                <a:latin typeface="Arial"/>
+              </a:rPr>
+              <a:t>— Validación empírica: tasa 11.6 % (faltante) vs 10.8 % (conocido), p ≈ 4×10⁻⁵</a:t>
+            </a:r>
+          </a:p>
+          <a:p>
+            <a:pPr>
+              <a:spcAft>
+                <a:spcPts val="600"/>
+              </a:spcAft>
+            </a:pPr>
+            <a:r>
+              <a:rPr sz="1200">
+                <a:solidFill>
+                  <a:srgbClr val="4A4A4A"/>
+                </a:solidFill>
+                <a:latin typeface="Arial"/>
+              </a:rPr>
+              <a:t>— Diagnóstico ICD-9 agrupado en 9 categorías clínicas (taxonomía AHRQ)</a:t>
             </a:r>
           </a:p>
         </p:txBody>
@@ -5261,17 +6718,18 @@
         <p:spPr>
           <a:xfrm>
             <a:off x="0" y="0"/>
-            <a:ext cx="12191695" cy="822960"/>
+            <a:ext cx="12191695" cy="73152"/>
           </a:xfrm>
           <a:prstGeom prst="rect">
             <a:avLst/>
           </a:prstGeom>
           <a:solidFill>
-            <a:srgbClr val="3B6AA0"/>
+            <a:srgbClr val="051C2C"/>
           </a:solidFill>
           <a:ln>
             <a:noFill/>
           </a:ln>
+          <a:effectLst/>
         </p:spPr>
         <p:style>
           <a:lnRef idx="1">
@@ -5303,29 +6761,29 @@
         </p:nvSpPr>
         <p:spPr>
           <a:xfrm>
-            <a:off x="457200" y="164592"/>
-            <a:ext cx="11277295" cy="502920"/>
-          </a:xfrm>
-          <a:prstGeom prst="rect">
-            <a:avLst/>
-          </a:prstGeom>
-          <a:noFill/>
-        </p:spPr>
-        <p:txBody>
-          <a:bodyPr wrap="square" anchor="ctr" lIns="0" rIns="0" tIns="0" bIns="0">
+            <a:off x="457200" y="274320"/>
+            <a:ext cx="11277295" cy="274320"/>
+          </a:xfrm>
+          <a:prstGeom prst="rect">
+            <a:avLst/>
+          </a:prstGeom>
+          <a:noFill/>
+        </p:spPr>
+        <p:txBody>
+          <a:bodyPr wrap="square" anchor="t" lIns="0" rIns="0" tIns="0" bIns="0">
             <a:spAutoFit/>
           </a:bodyPr>
           <a:lstStyle/>
           <a:p>
             <a:pPr algn="l"/>
             <a:r>
-              <a:rPr sz="2600" b="1">
-                <a:solidFill>
-                  <a:srgbClr val="FFFFFF"/>
-                </a:solidFill>
-                <a:latin typeface="Helvetica"/>
-              </a:rPr>
-              <a:t>Hallazgo 1 — Readmisión a 30 días</a:t>
+              <a:rPr sz="1000" b="1" i="0">
+                <a:solidFill>
+                  <a:srgbClr val="8E8E8E"/>
+                </a:solidFill>
+                <a:latin typeface="Arial"/>
+              </a:rPr>
+              <a:t>ENFOQUE METODOLÓGICO</a:t>
             </a:r>
           </a:p>
         </p:txBody>
@@ -5338,8 +6796,8 @@
         </p:nvSpPr>
         <p:spPr>
           <a:xfrm>
-            <a:off x="457200" y="841248"/>
-            <a:ext cx="11277295" cy="365760"/>
+            <a:off x="457200" y="548640"/>
+            <a:ext cx="11277295" cy="822960"/>
           </a:xfrm>
           <a:prstGeom prst="rect">
             <a:avLst/>
@@ -5354,61 +6812,178 @@
           <a:p>
             <a:pPr algn="l"/>
             <a:r>
-              <a:rPr sz="1400" b="0">
-                <a:solidFill>
-                  <a:srgbClr val="4A4A4A"/>
-                </a:solidFill>
-                <a:latin typeface="Helvetica"/>
-              </a:rPr>
-              <a:t>El historial de admisiones previas es el mayor predictor del reingreso temprano</a:t>
-            </a:r>
-          </a:p>
-        </p:txBody>
-      </p:sp>
-      <p:pic>
-        <p:nvPicPr>
-          <p:cNvPr id="5" name="Picture 4" descr="fig4_or_logistica.png"/>
-          <p:cNvPicPr>
-            <a:picLocks noChangeAspect="1"/>
-          </p:cNvPicPr>
-          <p:nvPr/>
-        </p:nvPicPr>
-        <p:blipFill>
-          <a:blip r:embed="rId2"/>
-          <a:stretch>
-            <a:fillRect/>
-          </a:stretch>
-        </p:blipFill>
-        <p:spPr>
-          <a:xfrm>
-            <a:off x="365760" y="1371600"/>
-            <a:ext cx="6400800" cy="3985131"/>
-          </a:xfrm>
-          <a:prstGeom prst="rect">
-            <a:avLst/>
-          </a:prstGeom>
-        </p:spPr>
-      </p:pic>
-      <p:sp>
-        <p:nvSpPr>
-          <p:cNvPr id="6" name="Rectangle 5"/>
+              <a:rPr sz="2200" b="1" i="0">
+                <a:solidFill>
+                  <a:srgbClr val="051C2C"/>
+                </a:solidFill>
+                <a:latin typeface="Arial"/>
+              </a:rPr>
+              <a:t>Cada pregunta requiere su propia familia estadística para producir resultados defendibles</a:t>
+            </a:r>
+          </a:p>
+        </p:txBody>
+      </p:sp>
+      <p:cxnSp>
+        <p:nvCxnSpPr>
+          <p:cNvPr id="5" name="Connector 4"/>
+          <p:cNvCxnSpPr/>
+          <p:nvPr/>
+        </p:nvCxnSpPr>
+        <p:spPr>
+          <a:xfrm>
+            <a:off x="457200" y="1417320"/>
+            <a:ext cx="11277295" cy="0"/>
+          </a:xfrm>
+          <a:prstGeom prst="line">
+            <a:avLst/>
+          </a:prstGeom>
+          <a:ln w="9525">
+            <a:solidFill>
+              <a:srgbClr val="E1E1E1"/>
+            </a:solidFill>
+          </a:ln>
+        </p:spPr>
+        <p:style>
+          <a:lnRef idx="2">
+            <a:schemeClr val="accent1"/>
+          </a:lnRef>
+          <a:fillRef idx="0">
+            <a:schemeClr val="accent1"/>
+          </a:fillRef>
+          <a:effectRef idx="1">
+            <a:schemeClr val="accent1"/>
+          </a:effectRef>
+          <a:fontRef idx="minor">
+            <a:schemeClr val="tx1"/>
+          </a:fontRef>
+        </p:style>
+      </p:cxnSp>
+      <p:cxnSp>
+        <p:nvCxnSpPr>
+          <p:cNvPr id="6" name="Connector 5"/>
+          <p:cNvCxnSpPr/>
+          <p:nvPr/>
+        </p:nvCxnSpPr>
+        <p:spPr>
+          <a:xfrm>
+            <a:off x="457200" y="6446520"/>
+            <a:ext cx="11277295" cy="0"/>
+          </a:xfrm>
+          <a:prstGeom prst="line">
+            <a:avLst/>
+          </a:prstGeom>
+          <a:ln w="9525">
+            <a:solidFill>
+              <a:srgbClr val="E1E1E1"/>
+            </a:solidFill>
+          </a:ln>
+        </p:spPr>
+        <p:style>
+          <a:lnRef idx="2">
+            <a:schemeClr val="accent1"/>
+          </a:lnRef>
+          <a:fillRef idx="0">
+            <a:schemeClr val="accent1"/>
+          </a:fillRef>
+          <a:effectRef idx="1">
+            <a:schemeClr val="accent1"/>
+          </a:effectRef>
+          <a:fontRef idx="minor">
+            <a:schemeClr val="tx1"/>
+          </a:fontRef>
+        </p:style>
+      </p:cxnSp>
+      <p:sp>
+        <p:nvSpPr>
+          <p:cNvPr id="7" name="TextBox 6"/>
+          <p:cNvSpPr txBox="1"/>
+          <p:nvPr/>
+        </p:nvSpPr>
+        <p:spPr>
+          <a:xfrm>
+            <a:off x="457200" y="6537960"/>
+            <a:ext cx="10058400" cy="228600"/>
+          </a:xfrm>
+          <a:prstGeom prst="rect">
+            <a:avLst/>
+          </a:prstGeom>
+          <a:noFill/>
+        </p:spPr>
+        <p:txBody>
+          <a:bodyPr wrap="square" anchor="t" lIns="0" rIns="0" tIns="0" bIns="0">
+            <a:spAutoFit/>
+          </a:bodyPr>
+          <a:lstStyle/>
+          <a:p>
+            <a:pPr algn="l"/>
+            <a:r>
+              <a:rPr sz="800" b="0" i="1">
+                <a:solidFill>
+                  <a:srgbClr val="8E8E8E"/>
+                </a:solidFill>
+                <a:latin typeface="Arial"/>
+              </a:rPr>
+              <a:t>Fuente: análisis del equipo basado en Diabetes 130-Hospitals (UCI, n=69,970)</a:t>
+            </a:r>
+          </a:p>
+        </p:txBody>
+      </p:sp>
+      <p:sp>
+        <p:nvSpPr>
+          <p:cNvPr id="8" name="TextBox 7"/>
+          <p:cNvSpPr txBox="1"/>
+          <p:nvPr/>
+        </p:nvSpPr>
+        <p:spPr>
+          <a:xfrm>
+            <a:off x="11551615" y="6537960"/>
+            <a:ext cx="274320" cy="228600"/>
+          </a:xfrm>
+          <a:prstGeom prst="rect">
+            <a:avLst/>
+          </a:prstGeom>
+          <a:noFill/>
+        </p:spPr>
+        <p:txBody>
+          <a:bodyPr wrap="square" anchor="t" lIns="0" rIns="0" tIns="0" bIns="0">
+            <a:spAutoFit/>
+          </a:bodyPr>
+          <a:lstStyle/>
+          <a:p>
+            <a:pPr algn="r"/>
+            <a:r>
+              <a:rPr sz="900" b="0" i="0">
+                <a:solidFill>
+                  <a:srgbClr val="8E8E8E"/>
+                </a:solidFill>
+                <a:latin typeface="Arial"/>
+              </a:rPr>
+              <a:t>5</a:t>
+            </a:r>
+          </a:p>
+        </p:txBody>
+      </p:sp>
+      <p:sp>
+        <p:nvSpPr>
+          <p:cNvPr id="9" name="Rectangle 8"/>
           <p:cNvSpPr/>
           <p:nvPr/>
         </p:nvSpPr>
         <p:spPr>
           <a:xfrm>
-            <a:off x="7132320" y="1463040"/>
-            <a:ext cx="4754880" cy="2286000"/>
+            <a:off x="457200" y="1828800"/>
+            <a:ext cx="11277295" cy="457200"/>
           </a:xfrm>
           <a:prstGeom prst="rect">
             <a:avLst/>
           </a:prstGeom>
           <a:solidFill>
-            <a:srgbClr val="EEEEEE"/>
+            <a:srgbClr val="051C2C"/>
           </a:solidFill>
           <a:ln>
             <a:noFill/>
           </a:ln>
+          <a:effectLst/>
         </p:spPr>
         <p:style>
           <a:lnRef idx="1">
@@ -5434,129 +7009,671 @@
       </p:sp>
       <p:sp>
         <p:nvSpPr>
-          <p:cNvPr id="7" name="TextBox 6"/>
-          <p:cNvSpPr txBox="1"/>
-          <p:nvPr/>
-        </p:nvSpPr>
-        <p:spPr>
-          <a:xfrm>
-            <a:off x="7132320" y="1554480"/>
-            <a:ext cx="4754880" cy="1097280"/>
-          </a:xfrm>
-          <a:prstGeom prst="rect">
-            <a:avLst/>
-          </a:prstGeom>
-          <a:noFill/>
-        </p:spPr>
-        <p:txBody>
-          <a:bodyPr wrap="square" anchor="ctr" lIns="0" rIns="0" tIns="0" bIns="0">
-            <a:spAutoFit/>
-          </a:bodyPr>
+          <p:cNvPr id="10" name="TextBox 9"/>
+          <p:cNvSpPr txBox="1"/>
+          <p:nvPr/>
+        </p:nvSpPr>
+        <p:spPr>
+          <a:xfrm>
+            <a:off x="640080" y="1947672"/>
+            <a:ext cx="2743200" cy="274320"/>
+          </a:xfrm>
+          <a:prstGeom prst="rect">
+            <a:avLst/>
+          </a:prstGeom>
+          <a:noFill/>
+        </p:spPr>
+        <p:txBody>
+          <a:bodyPr wrap="square" anchor="t" lIns="0" rIns="0" tIns="0" bIns="0">
+            <a:spAutoFit/>
+          </a:bodyPr>
+          <a:lstStyle/>
+          <a:p>
+            <a:pPr algn="l"/>
+            <a:r>
+              <a:rPr sz="1000" b="1" i="0">
+                <a:solidFill>
+                  <a:srgbClr val="FFFFFF"/>
+                </a:solidFill>
+                <a:latin typeface="Arial"/>
+              </a:rPr>
+              <a:t>PREGUNTA</a:t>
+            </a:r>
+          </a:p>
+        </p:txBody>
+      </p:sp>
+      <p:sp>
+        <p:nvSpPr>
+          <p:cNvPr id="11" name="TextBox 10"/>
+          <p:cNvSpPr txBox="1"/>
+          <p:nvPr/>
+        </p:nvSpPr>
+        <p:spPr>
+          <a:xfrm>
+            <a:off x="3840480" y="1947672"/>
+            <a:ext cx="2743200" cy="274320"/>
+          </a:xfrm>
+          <a:prstGeom prst="rect">
+            <a:avLst/>
+          </a:prstGeom>
+          <a:noFill/>
+        </p:spPr>
+        <p:txBody>
+          <a:bodyPr wrap="square" anchor="t" lIns="0" rIns="0" tIns="0" bIns="0">
+            <a:spAutoFit/>
+          </a:bodyPr>
+          <a:lstStyle/>
+          <a:p>
+            <a:pPr algn="l"/>
+            <a:r>
+              <a:rPr sz="1000" b="1" i="0">
+                <a:solidFill>
+                  <a:srgbClr val="FFFFFF"/>
+                </a:solidFill>
+                <a:latin typeface="Arial"/>
+              </a:rPr>
+              <a:t>VARIABLE DE RESPUESTA</a:t>
+            </a:r>
+          </a:p>
+        </p:txBody>
+      </p:sp>
+      <p:sp>
+        <p:nvSpPr>
+          <p:cNvPr id="12" name="TextBox 11"/>
+          <p:cNvSpPr txBox="1"/>
+          <p:nvPr/>
+        </p:nvSpPr>
+        <p:spPr>
+          <a:xfrm>
+            <a:off x="6858000" y="1947672"/>
+            <a:ext cx="2743200" cy="274320"/>
+          </a:xfrm>
+          <a:prstGeom prst="rect">
+            <a:avLst/>
+          </a:prstGeom>
+          <a:noFill/>
+        </p:spPr>
+        <p:txBody>
+          <a:bodyPr wrap="square" anchor="t" lIns="0" rIns="0" tIns="0" bIns="0">
+            <a:spAutoFit/>
+          </a:bodyPr>
+          <a:lstStyle/>
+          <a:p>
+            <a:pPr algn="l"/>
+            <a:r>
+              <a:rPr sz="1000" b="1" i="0">
+                <a:solidFill>
+                  <a:srgbClr val="FFFFFF"/>
+                </a:solidFill>
+                <a:latin typeface="Arial"/>
+              </a:rPr>
+              <a:t>MODELO</a:t>
+            </a:r>
+          </a:p>
+        </p:txBody>
+      </p:sp>
+      <p:sp>
+        <p:nvSpPr>
+          <p:cNvPr id="13" name="TextBox 12"/>
+          <p:cNvSpPr txBox="1"/>
+          <p:nvPr/>
+        </p:nvSpPr>
+        <p:spPr>
+          <a:xfrm>
+            <a:off x="9601200" y="1947672"/>
+            <a:ext cx="2743200" cy="274320"/>
+          </a:xfrm>
+          <a:prstGeom prst="rect">
+            <a:avLst/>
+          </a:prstGeom>
+          <a:noFill/>
+        </p:spPr>
+        <p:txBody>
+          <a:bodyPr wrap="square" anchor="t" lIns="0" rIns="0" tIns="0" bIns="0">
+            <a:spAutoFit/>
+          </a:bodyPr>
+          <a:lstStyle/>
+          <a:p>
+            <a:pPr algn="l"/>
+            <a:r>
+              <a:rPr sz="1000" b="1" i="0">
+                <a:solidFill>
+                  <a:srgbClr val="FFFFFF"/>
+                </a:solidFill>
+                <a:latin typeface="Arial"/>
+              </a:rPr>
+              <a:t>MÉTRICA CLAVE</a:t>
+            </a:r>
+          </a:p>
+        </p:txBody>
+      </p:sp>
+      <p:sp>
+        <p:nvSpPr>
+          <p:cNvPr id="14" name="Rectangle 13"/>
+          <p:cNvSpPr/>
+          <p:nvPr/>
+        </p:nvSpPr>
+        <p:spPr>
+          <a:xfrm>
+            <a:off x="457200" y="2286000"/>
+            <a:ext cx="11277295" cy="822960"/>
+          </a:xfrm>
+          <a:prstGeom prst="rect">
+            <a:avLst/>
+          </a:prstGeom>
+          <a:solidFill>
+            <a:srgbClr val="FFFFFF"/>
+          </a:solidFill>
+          <a:ln>
+            <a:noFill/>
+          </a:ln>
+          <a:effectLst/>
+        </p:spPr>
+        <p:style>
+          <a:lnRef idx="1">
+            <a:schemeClr val="accent1"/>
+          </a:lnRef>
+          <a:fillRef idx="3">
+            <a:schemeClr val="accent1"/>
+          </a:fillRef>
+          <a:effectRef idx="2">
+            <a:schemeClr val="accent1"/>
+          </a:effectRef>
+          <a:fontRef idx="minor">
+            <a:schemeClr val="lt1"/>
+          </a:fontRef>
+        </p:style>
+        <p:txBody>
+          <a:bodyPr rtlCol="0" anchor="ctr"/>
           <a:lstStyle/>
           <a:p>
             <a:pPr algn="ctr"/>
-            <a:r>
-              <a:rPr sz="6400" b="1">
-                <a:solidFill>
-                  <a:srgbClr val="B03838"/>
-                </a:solidFill>
-                <a:latin typeface="Helvetica"/>
-              </a:rPr>
-              <a:t>×1.40</a:t>
-            </a:r>
-          </a:p>
-        </p:txBody>
-      </p:sp>
-      <p:sp>
-        <p:nvSpPr>
-          <p:cNvPr id="8" name="TextBox 7"/>
-          <p:cNvSpPr txBox="1"/>
-          <p:nvPr/>
-        </p:nvSpPr>
-        <p:spPr>
-          <a:xfrm>
-            <a:off x="7132320" y="2651760"/>
-            <a:ext cx="4754880" cy="548640"/>
-          </a:xfrm>
-          <a:prstGeom prst="rect">
-            <a:avLst/>
-          </a:prstGeom>
-          <a:noFill/>
-        </p:spPr>
-        <p:txBody>
-          <a:bodyPr wrap="square" anchor="ctr" lIns="0" rIns="0" tIns="0" bIns="0">
-            <a:spAutoFit/>
-          </a:bodyPr>
+          </a:p>
+        </p:txBody>
+      </p:sp>
+      <p:sp>
+        <p:nvSpPr>
+          <p:cNvPr id="15" name="TextBox 14"/>
+          <p:cNvSpPr txBox="1"/>
+          <p:nvPr/>
+        </p:nvSpPr>
+        <p:spPr>
+          <a:xfrm>
+            <a:off x="640080" y="2532888"/>
+            <a:ext cx="3200400" cy="365760"/>
+          </a:xfrm>
+          <a:prstGeom prst="rect">
+            <a:avLst/>
+          </a:prstGeom>
+          <a:noFill/>
+        </p:spPr>
+        <p:txBody>
+          <a:bodyPr wrap="square" anchor="t" lIns="0" rIns="0" tIns="0" bIns="0">
+            <a:spAutoFit/>
+          </a:bodyPr>
+          <a:lstStyle/>
+          <a:p>
+            <a:pPr algn="l"/>
+            <a:r>
+              <a:rPr sz="1200" b="1" i="0">
+                <a:solidFill>
+                  <a:srgbClr val="051C2C"/>
+                </a:solidFill>
+                <a:latin typeface="Arial"/>
+              </a:rPr>
+              <a:t>Readmisión &lt;30 días</a:t>
+            </a:r>
+          </a:p>
+        </p:txBody>
+      </p:sp>
+      <p:sp>
+        <p:nvSpPr>
+          <p:cNvPr id="16" name="TextBox 15"/>
+          <p:cNvSpPr txBox="1"/>
+          <p:nvPr/>
+        </p:nvSpPr>
+        <p:spPr>
+          <a:xfrm>
+            <a:off x="3840480" y="2532888"/>
+            <a:ext cx="3200400" cy="365760"/>
+          </a:xfrm>
+          <a:prstGeom prst="rect">
+            <a:avLst/>
+          </a:prstGeom>
+          <a:noFill/>
+        </p:spPr>
+        <p:txBody>
+          <a:bodyPr wrap="square" anchor="t" lIns="0" rIns="0" tIns="0" bIns="0">
+            <a:spAutoFit/>
+          </a:bodyPr>
+          <a:lstStyle/>
+          <a:p>
+            <a:pPr algn="l"/>
+            <a:r>
+              <a:rPr sz="1200" b="0" i="0">
+                <a:solidFill>
+                  <a:srgbClr val="4A4A4A"/>
+                </a:solidFill>
+                <a:latin typeface="Arial"/>
+              </a:rPr>
+              <a:t>binaria (sí/no)</a:t>
+            </a:r>
+          </a:p>
+        </p:txBody>
+      </p:sp>
+      <p:sp>
+        <p:nvSpPr>
+          <p:cNvPr id="17" name="TextBox 16"/>
+          <p:cNvSpPr txBox="1"/>
+          <p:nvPr/>
+        </p:nvSpPr>
+        <p:spPr>
+          <a:xfrm>
+            <a:off x="6858000" y="2532888"/>
+            <a:ext cx="3200400" cy="365760"/>
+          </a:xfrm>
+          <a:prstGeom prst="rect">
+            <a:avLst/>
+          </a:prstGeom>
+          <a:noFill/>
+        </p:spPr>
+        <p:txBody>
+          <a:bodyPr wrap="square" anchor="t" lIns="0" rIns="0" tIns="0" bIns="0">
+            <a:spAutoFit/>
+          </a:bodyPr>
+          <a:lstStyle/>
+          <a:p>
+            <a:pPr algn="l"/>
+            <a:r>
+              <a:rPr sz="1200" b="0" i="0">
+                <a:solidFill>
+                  <a:srgbClr val="4A4A4A"/>
+                </a:solidFill>
+                <a:latin typeface="Arial"/>
+              </a:rPr>
+              <a:t>Regresión logística</a:t>
+            </a:r>
+          </a:p>
+        </p:txBody>
+      </p:sp>
+      <p:sp>
+        <p:nvSpPr>
+          <p:cNvPr id="18" name="TextBox 17"/>
+          <p:cNvSpPr txBox="1"/>
+          <p:nvPr/>
+        </p:nvSpPr>
+        <p:spPr>
+          <a:xfrm>
+            <a:off x="9601200" y="2532888"/>
+            <a:ext cx="3200400" cy="365760"/>
+          </a:xfrm>
+          <a:prstGeom prst="rect">
+            <a:avLst/>
+          </a:prstGeom>
+          <a:noFill/>
+        </p:spPr>
+        <p:txBody>
+          <a:bodyPr wrap="square" anchor="t" lIns="0" rIns="0" tIns="0" bIns="0">
+            <a:spAutoFit/>
+          </a:bodyPr>
+          <a:lstStyle/>
+          <a:p>
+            <a:pPr algn="l"/>
+            <a:r>
+              <a:rPr sz="1200" b="0" i="0">
+                <a:solidFill>
+                  <a:srgbClr val="4A4A4A"/>
+                </a:solidFill>
+                <a:latin typeface="Arial"/>
+              </a:rPr>
+              <a:t>AUC 0.61 · PR-AUC 0.14</a:t>
+            </a:r>
+          </a:p>
+        </p:txBody>
+      </p:sp>
+      <p:sp>
+        <p:nvSpPr>
+          <p:cNvPr id="19" name="Rectangle 18"/>
+          <p:cNvSpPr/>
+          <p:nvPr/>
+        </p:nvSpPr>
+        <p:spPr>
+          <a:xfrm>
+            <a:off x="457200" y="3108960"/>
+            <a:ext cx="11277295" cy="822960"/>
+          </a:xfrm>
+          <a:prstGeom prst="rect">
+            <a:avLst/>
+          </a:prstGeom>
+          <a:solidFill>
+            <a:srgbClr val="F5F5F5"/>
+          </a:solidFill>
+          <a:ln>
+            <a:noFill/>
+          </a:ln>
+          <a:effectLst/>
+        </p:spPr>
+        <p:style>
+          <a:lnRef idx="1">
+            <a:schemeClr val="accent1"/>
+          </a:lnRef>
+          <a:fillRef idx="3">
+            <a:schemeClr val="accent1"/>
+          </a:fillRef>
+          <a:effectRef idx="2">
+            <a:schemeClr val="accent1"/>
+          </a:effectRef>
+          <a:fontRef idx="minor">
+            <a:schemeClr val="lt1"/>
+          </a:fontRef>
+        </p:style>
+        <p:txBody>
+          <a:bodyPr rtlCol="0" anchor="ctr"/>
           <a:lstStyle/>
           <a:p>
             <a:pPr algn="ctr"/>
-            <a:r>
-              <a:rPr sz="1500" b="0">
+          </a:p>
+        </p:txBody>
+      </p:sp>
+      <p:sp>
+        <p:nvSpPr>
+          <p:cNvPr id="20" name="TextBox 19"/>
+          <p:cNvSpPr txBox="1"/>
+          <p:nvPr/>
+        </p:nvSpPr>
+        <p:spPr>
+          <a:xfrm>
+            <a:off x="640080" y="3355848"/>
+            <a:ext cx="3200400" cy="365760"/>
+          </a:xfrm>
+          <a:prstGeom prst="rect">
+            <a:avLst/>
+          </a:prstGeom>
+          <a:noFill/>
+        </p:spPr>
+        <p:txBody>
+          <a:bodyPr wrap="square" anchor="t" lIns="0" rIns="0" tIns="0" bIns="0">
+            <a:spAutoFit/>
+          </a:bodyPr>
+          <a:lstStyle/>
+          <a:p>
+            <a:pPr algn="l"/>
+            <a:r>
+              <a:rPr sz="1200" b="1" i="0">
+                <a:solidFill>
+                  <a:srgbClr val="051C2C"/>
+                </a:solidFill>
+                <a:latin typeface="Arial"/>
+              </a:rPr>
+              <a:t>Recurrencia</a:t>
+            </a:r>
+          </a:p>
+        </p:txBody>
+      </p:sp>
+      <p:sp>
+        <p:nvSpPr>
+          <p:cNvPr id="21" name="TextBox 20"/>
+          <p:cNvSpPr txBox="1"/>
+          <p:nvPr/>
+        </p:nvSpPr>
+        <p:spPr>
+          <a:xfrm>
+            <a:off x="3840480" y="3355848"/>
+            <a:ext cx="3200400" cy="365760"/>
+          </a:xfrm>
+          <a:prstGeom prst="rect">
+            <a:avLst/>
+          </a:prstGeom>
+          <a:noFill/>
+        </p:spPr>
+        <p:txBody>
+          <a:bodyPr wrap="square" anchor="t" lIns="0" rIns="0" tIns="0" bIns="0">
+            <a:spAutoFit/>
+          </a:bodyPr>
+          <a:lstStyle/>
+          <a:p>
+            <a:pPr algn="l"/>
+            <a:r>
+              <a:rPr sz="1200" b="0" i="0">
                 <a:solidFill>
                   <a:srgbClr val="4A4A4A"/>
                 </a:solidFill>
-                <a:latin typeface="Helvetica"/>
-              </a:rPr>
-              <a:t>por cada admisión previa adicional</a:t>
-            </a:r>
-          </a:p>
-        </p:txBody>
-      </p:sp>
-      <p:sp>
-        <p:nvSpPr>
-          <p:cNvPr id="9" name="TextBox 8"/>
-          <p:cNvSpPr txBox="1"/>
-          <p:nvPr/>
-        </p:nvSpPr>
-        <p:spPr>
-          <a:xfrm>
-            <a:off x="7132320" y="3017520"/>
-            <a:ext cx="4754880" cy="640080"/>
-          </a:xfrm>
-          <a:prstGeom prst="rect">
-            <a:avLst/>
-          </a:prstGeom>
-          <a:noFill/>
-        </p:spPr>
-        <p:txBody>
-          <a:bodyPr wrap="square" anchor="ctr" lIns="0" rIns="0" tIns="0" bIns="0">
-            <a:spAutoFit/>
-          </a:bodyPr>
+                <a:latin typeface="Arial"/>
+              </a:rPr>
+              <a:t>conteo (admisiones)</a:t>
+            </a:r>
+          </a:p>
+        </p:txBody>
+      </p:sp>
+      <p:sp>
+        <p:nvSpPr>
+          <p:cNvPr id="22" name="TextBox 21"/>
+          <p:cNvSpPr txBox="1"/>
+          <p:nvPr/>
+        </p:nvSpPr>
+        <p:spPr>
+          <a:xfrm>
+            <a:off x="6858000" y="3355848"/>
+            <a:ext cx="3200400" cy="365760"/>
+          </a:xfrm>
+          <a:prstGeom prst="rect">
+            <a:avLst/>
+          </a:prstGeom>
+          <a:noFill/>
+        </p:spPr>
+        <p:txBody>
+          <a:bodyPr wrap="square" anchor="t" lIns="0" rIns="0" tIns="0" bIns="0">
+            <a:spAutoFit/>
+          </a:bodyPr>
+          <a:lstStyle/>
+          <a:p>
+            <a:pPr algn="l"/>
+            <a:r>
+              <a:rPr sz="1200" b="0" i="0">
+                <a:solidFill>
+                  <a:srgbClr val="4A4A4A"/>
+                </a:solidFill>
+                <a:latin typeface="Arial"/>
+              </a:rPr>
+              <a:t>Binomial Negativa (vs Poisson)</a:t>
+            </a:r>
+          </a:p>
+        </p:txBody>
+      </p:sp>
+      <p:sp>
+        <p:nvSpPr>
+          <p:cNvPr id="23" name="TextBox 22"/>
+          <p:cNvSpPr txBox="1"/>
+          <p:nvPr/>
+        </p:nvSpPr>
+        <p:spPr>
+          <a:xfrm>
+            <a:off x="9601200" y="3355848"/>
+            <a:ext cx="3200400" cy="365760"/>
+          </a:xfrm>
+          <a:prstGeom prst="rect">
+            <a:avLst/>
+          </a:prstGeom>
+          <a:noFill/>
+        </p:spPr>
+        <p:txBody>
+          <a:bodyPr wrap="square" anchor="t" lIns="0" rIns="0" tIns="0" bIns="0">
+            <a:spAutoFit/>
+          </a:bodyPr>
+          <a:lstStyle/>
+          <a:p>
+            <a:pPr algn="l"/>
+            <a:r>
+              <a:rPr sz="1200" b="0" i="0">
+                <a:solidFill>
+                  <a:srgbClr val="4A4A4A"/>
+                </a:solidFill>
+                <a:latin typeface="Arial"/>
+              </a:rPr>
+              <a:t>AIC favorece NB (Δ=8,688)</a:t>
+            </a:r>
+          </a:p>
+        </p:txBody>
+      </p:sp>
+      <p:sp>
+        <p:nvSpPr>
+          <p:cNvPr id="24" name="Rectangle 23"/>
+          <p:cNvSpPr/>
+          <p:nvPr/>
+        </p:nvSpPr>
+        <p:spPr>
+          <a:xfrm>
+            <a:off x="457200" y="3931920"/>
+            <a:ext cx="11277295" cy="822960"/>
+          </a:xfrm>
+          <a:prstGeom prst="rect">
+            <a:avLst/>
+          </a:prstGeom>
+          <a:solidFill>
+            <a:srgbClr val="FFFFFF"/>
+          </a:solidFill>
+          <a:ln>
+            <a:noFill/>
+          </a:ln>
+          <a:effectLst/>
+        </p:spPr>
+        <p:style>
+          <a:lnRef idx="1">
+            <a:schemeClr val="accent1"/>
+          </a:lnRef>
+          <a:fillRef idx="3">
+            <a:schemeClr val="accent1"/>
+          </a:fillRef>
+          <a:effectRef idx="2">
+            <a:schemeClr val="accent1"/>
+          </a:effectRef>
+          <a:fontRef idx="minor">
+            <a:schemeClr val="lt1"/>
+          </a:fontRef>
+        </p:style>
+        <p:txBody>
+          <a:bodyPr rtlCol="0" anchor="ctr"/>
           <a:lstStyle/>
           <a:p>
             <a:pPr algn="ctr"/>
-            <a:r>
-              <a:rPr sz="1100" b="0">
+          </a:p>
+        </p:txBody>
+      </p:sp>
+      <p:sp>
+        <p:nvSpPr>
+          <p:cNvPr id="25" name="TextBox 24"/>
+          <p:cNvSpPr txBox="1"/>
+          <p:nvPr/>
+        </p:nvSpPr>
+        <p:spPr>
+          <a:xfrm>
+            <a:off x="640080" y="4178808"/>
+            <a:ext cx="3200400" cy="365760"/>
+          </a:xfrm>
+          <a:prstGeom prst="rect">
+            <a:avLst/>
+          </a:prstGeom>
+          <a:noFill/>
+        </p:spPr>
+        <p:txBody>
+          <a:bodyPr wrap="square" anchor="t" lIns="0" rIns="0" tIns="0" bIns="0">
+            <a:spAutoFit/>
+          </a:bodyPr>
+          <a:lstStyle/>
+          <a:p>
+            <a:pPr algn="l"/>
+            <a:r>
+              <a:rPr sz="1200" b="1" i="0">
+                <a:solidFill>
+                  <a:srgbClr val="051C2C"/>
+                </a:solidFill>
+                <a:latin typeface="Arial"/>
+              </a:rPr>
+              <a:t>Estancia</a:t>
+            </a:r>
+          </a:p>
+        </p:txBody>
+      </p:sp>
+      <p:sp>
+        <p:nvSpPr>
+          <p:cNvPr id="26" name="TextBox 25"/>
+          <p:cNvSpPr txBox="1"/>
+          <p:nvPr/>
+        </p:nvSpPr>
+        <p:spPr>
+          <a:xfrm>
+            <a:off x="3840480" y="4178808"/>
+            <a:ext cx="3200400" cy="365760"/>
+          </a:xfrm>
+          <a:prstGeom prst="rect">
+            <a:avLst/>
+          </a:prstGeom>
+          <a:noFill/>
+        </p:spPr>
+        <p:txBody>
+          <a:bodyPr wrap="square" anchor="t" lIns="0" rIns="0" tIns="0" bIns="0">
+            <a:spAutoFit/>
+          </a:bodyPr>
+          <a:lstStyle/>
+          <a:p>
+            <a:pPr algn="l"/>
+            <a:r>
+              <a:rPr sz="1200" b="0" i="0">
                 <a:solidFill>
                   <a:srgbClr val="4A4A4A"/>
                 </a:solidFill>
-                <a:latin typeface="Helvetica"/>
-              </a:rPr>
-              <a:t>(40 % más probabilidad que un paciente comparable</a:t>
-            </a:r>
-            <a:br/>
-            <a:r>
-              <a:rPr sz="1100" b="0">
+                <a:latin typeface="Arial"/>
+              </a:rPr>
+              <a:t>continua positiva (días)</a:t>
+            </a:r>
+          </a:p>
+        </p:txBody>
+      </p:sp>
+      <p:sp>
+        <p:nvSpPr>
+          <p:cNvPr id="27" name="TextBox 26"/>
+          <p:cNvSpPr txBox="1"/>
+          <p:nvPr/>
+        </p:nvSpPr>
+        <p:spPr>
+          <a:xfrm>
+            <a:off x="6858000" y="4178808"/>
+            <a:ext cx="3200400" cy="365760"/>
+          </a:xfrm>
+          <a:prstGeom prst="rect">
+            <a:avLst/>
+          </a:prstGeom>
+          <a:noFill/>
+        </p:spPr>
+        <p:txBody>
+          <a:bodyPr wrap="square" anchor="t" lIns="0" rIns="0" tIns="0" bIns="0">
+            <a:spAutoFit/>
+          </a:bodyPr>
+          <a:lstStyle/>
+          <a:p>
+            <a:pPr algn="l"/>
+            <a:r>
+              <a:rPr sz="1200" b="0" i="0">
                 <a:solidFill>
                   <a:srgbClr val="4A4A4A"/>
                 </a:solidFill>
-                <a:latin typeface="Helvetica"/>
-              </a:rPr>
-              <a:t>sin ese antecedente)</a:t>
-            </a:r>
-          </a:p>
-        </p:txBody>
-      </p:sp>
-      <p:sp>
-        <p:nvSpPr>
-          <p:cNvPr id="10" name="TextBox 9"/>
-          <p:cNvSpPr txBox="1"/>
-          <p:nvPr/>
-        </p:nvSpPr>
-        <p:spPr>
-          <a:xfrm>
-            <a:off x="7132320" y="4023360"/>
-            <a:ext cx="4754880" cy="365760"/>
+                <a:latin typeface="Arial"/>
+              </a:rPr>
+              <a:t>Regresión Gamma con liga log</a:t>
+            </a:r>
+          </a:p>
+        </p:txBody>
+      </p:sp>
+      <p:sp>
+        <p:nvSpPr>
+          <p:cNvPr id="28" name="TextBox 27"/>
+          <p:cNvSpPr txBox="1"/>
+          <p:nvPr/>
+        </p:nvSpPr>
+        <p:spPr>
+          <a:xfrm>
+            <a:off x="9601200" y="4178808"/>
+            <a:ext cx="3200400" cy="365760"/>
           </a:xfrm>
           <a:prstGeom prst="rect">
             <a:avLst/>
@@ -5571,98 +7688,71 @@
           <a:p>
             <a:pPr algn="l"/>
             <a:r>
-              <a:rPr sz="1500" b="1">
-                <a:solidFill>
-                  <a:srgbClr val="3B6AA0"/>
-                </a:solidFill>
-                <a:latin typeface="Helvetica"/>
-              </a:rPr>
-              <a:t>Otros factores significativos:</a:t>
-            </a:r>
-          </a:p>
-        </p:txBody>
-      </p:sp>
-      <p:sp>
-        <p:nvSpPr>
-          <p:cNvPr id="11" name="TextBox 10"/>
-          <p:cNvSpPr txBox="1"/>
-          <p:nvPr/>
-        </p:nvSpPr>
-        <p:spPr>
-          <a:xfrm>
-            <a:off x="7132320" y="4480560"/>
-            <a:ext cx="4754880" cy="1828800"/>
-          </a:xfrm>
-          <a:prstGeom prst="rect">
-            <a:avLst/>
-          </a:prstGeom>
-          <a:noFill/>
-        </p:spPr>
-        <p:txBody>
-          <a:bodyPr wrap="square" lIns="0" rIns="0" tIns="0" bIns="0">
-            <a:spAutoFit/>
-          </a:bodyPr>
-          <a:lstStyle/>
-          <a:p>
-            <a:pPr>
-              <a:spcAft>
-                <a:spcPts val="800"/>
-              </a:spcAft>
-            </a:pPr>
-            <a:r>
-              <a:rPr sz="1400">
+              <a:rPr sz="1200" b="0" i="0">
                 <a:solidFill>
                   <a:srgbClr val="4A4A4A"/>
                 </a:solidFill>
-                <a:latin typeface="Helvetica"/>
-              </a:rPr>
-              <a:t>• Uso de medicamento para diabetes (+21 %)</a:t>
-            </a:r>
-          </a:p>
-          <a:p>
-            <a:pPr>
-              <a:spcAft>
-                <a:spcPts val="800"/>
-              </a:spcAft>
-            </a:pPr>
-            <a:r>
-              <a:rPr sz="1400">
-                <a:solidFill>
-                  <a:srgbClr val="4A4A4A"/>
-                </a:solidFill>
-                <a:latin typeface="Helvetica"/>
-              </a:rPr>
-              <a:t>• Visitas previas a urgencias (+7 % cada una)</a:t>
-            </a:r>
-          </a:p>
-          <a:p>
-            <a:pPr>
-              <a:spcAft>
-                <a:spcPts val="800"/>
-              </a:spcAft>
-            </a:pPr>
-            <a:r>
-              <a:rPr sz="1400">
-                <a:solidFill>
-                  <a:srgbClr val="4A4A4A"/>
-                </a:solidFill>
-                <a:latin typeface="Helvetica"/>
-              </a:rPr>
-              <a:t>• Días de estancia (+4 % por día)</a:t>
-            </a:r>
-          </a:p>
-        </p:txBody>
-      </p:sp>
-      <p:sp>
-        <p:nvSpPr>
-          <p:cNvPr id="12" name="TextBox 11"/>
-          <p:cNvSpPr txBox="1"/>
-          <p:nvPr/>
-        </p:nvSpPr>
-        <p:spPr>
-          <a:xfrm>
-            <a:off x="457200" y="6492240"/>
-            <a:ext cx="7315200" cy="274320"/>
+                <a:latin typeface="Arial"/>
+              </a:rPr>
+              <a:t>Pseudo R² = 0.28</a:t>
+            </a:r>
+          </a:p>
+        </p:txBody>
+      </p:sp>
+      <p:sp>
+        <p:nvSpPr>
+          <p:cNvPr id="29" name="Rectangle 28"/>
+          <p:cNvSpPr/>
+          <p:nvPr/>
+        </p:nvSpPr>
+        <p:spPr>
+          <a:xfrm>
+            <a:off x="457200" y="5486400"/>
+            <a:ext cx="91440" cy="640080"/>
+          </a:xfrm>
+          <a:prstGeom prst="rect">
+            <a:avLst/>
+          </a:prstGeom>
+          <a:solidFill>
+            <a:srgbClr val="FE5000"/>
+          </a:solidFill>
+          <a:ln>
+            <a:noFill/>
+          </a:ln>
+          <a:effectLst/>
+        </p:spPr>
+        <p:style>
+          <a:lnRef idx="1">
+            <a:schemeClr val="accent1"/>
+          </a:lnRef>
+          <a:fillRef idx="3">
+            <a:schemeClr val="accent1"/>
+          </a:fillRef>
+          <a:effectRef idx="2">
+            <a:schemeClr val="accent1"/>
+          </a:effectRef>
+          <a:fontRef idx="minor">
+            <a:schemeClr val="lt1"/>
+          </a:fontRef>
+        </p:style>
+        <p:txBody>
+          <a:bodyPr rtlCol="0" anchor="ctr"/>
+          <a:lstStyle/>
+          <a:p>
+            <a:pPr algn="ctr"/>
+          </a:p>
+        </p:txBody>
+      </p:sp>
+      <p:sp>
+        <p:nvSpPr>
+          <p:cNvPr id="30" name="TextBox 29"/>
+          <p:cNvSpPr txBox="1"/>
+          <p:nvPr/>
+        </p:nvSpPr>
+        <p:spPr>
+          <a:xfrm>
+            <a:off x="685800" y="5486400"/>
+            <a:ext cx="10972800" cy="365760"/>
           </a:xfrm>
           <a:prstGeom prst="rect">
             <a:avLst/>
@@ -5677,27 +7767,27 @@
           <a:p>
             <a:pPr algn="l"/>
             <a:r>
-              <a:rPr sz="900" b="0">
-                <a:solidFill>
-                  <a:srgbClr val="4A4A4A"/>
-                </a:solidFill>
-                <a:latin typeface="Helvetica"/>
-              </a:rPr>
-              <a:t>Proyecto Final · Analítica de Datos · Universidad Iberoamericana</a:t>
-            </a:r>
-          </a:p>
-        </p:txBody>
-      </p:sp>
-      <p:sp>
-        <p:nvSpPr>
-          <p:cNvPr id="13" name="TextBox 12"/>
-          <p:cNvSpPr txBox="1"/>
-          <p:nvPr/>
-        </p:nvSpPr>
-        <p:spPr>
-          <a:xfrm>
-            <a:off x="11277295" y="6492240"/>
-            <a:ext cx="457200" cy="274320"/>
+              <a:rPr sz="1300" b="1" i="0">
+                <a:solidFill>
+                  <a:srgbClr val="051C2C"/>
+                </a:solidFill>
+                <a:latin typeface="Arial"/>
+              </a:rPr>
+              <a:t>La elección del modelo está guiada por la forma de los datos, no por el AUC más alto</a:t>
+            </a:r>
+          </a:p>
+        </p:txBody>
+      </p:sp>
+      <p:sp>
+        <p:nvSpPr>
+          <p:cNvPr id="31" name="TextBox 30"/>
+          <p:cNvSpPr txBox="1"/>
+          <p:nvPr/>
+        </p:nvSpPr>
+        <p:spPr>
+          <a:xfrm>
+            <a:off x="685800" y="5852160"/>
+            <a:ext cx="10972800" cy="365760"/>
           </a:xfrm>
           <a:prstGeom prst="rect">
             <a:avLst/>
@@ -5710,15 +7800,15 @@
           </a:bodyPr>
           <a:lstStyle/>
           <a:p>
-            <a:pPr algn="r"/>
-            <a:r>
-              <a:rPr sz="900" b="0">
-                <a:solidFill>
-                  <a:srgbClr val="4A4A4A"/>
-                </a:solidFill>
-                <a:latin typeface="Helvetica"/>
-              </a:rPr>
-              <a:t>5/9</a:t>
+            <a:pPr algn="l"/>
+            <a:r>
+              <a:rPr sz="1100" b="0" i="0">
+                <a:solidFill>
+                  <a:srgbClr val="8E8E8E"/>
+                </a:solidFill>
+                <a:latin typeface="Arial"/>
+              </a:rPr>
+              <a:t>Modelos interpretables permiten explicar a la dirección por qué cada paciente representa un riesgo</a:t>
             </a:r>
           </a:p>
         </p:txBody>
@@ -5750,17 +7840,18 @@
         <p:spPr>
           <a:xfrm>
             <a:off x="0" y="0"/>
-            <a:ext cx="12191695" cy="822960"/>
+            <a:ext cx="12191695" cy="73152"/>
           </a:xfrm>
           <a:prstGeom prst="rect">
             <a:avLst/>
           </a:prstGeom>
           <a:solidFill>
-            <a:srgbClr val="3B6AA0"/>
+            <a:srgbClr val="051C2C"/>
           </a:solidFill>
           <a:ln>
             <a:noFill/>
           </a:ln>
+          <a:effectLst/>
         </p:spPr>
         <p:style>
           <a:lnRef idx="1">
@@ -5792,29 +7883,29 @@
         </p:nvSpPr>
         <p:spPr>
           <a:xfrm>
-            <a:off x="457200" y="164592"/>
-            <a:ext cx="11277295" cy="502920"/>
-          </a:xfrm>
-          <a:prstGeom prst="rect">
-            <a:avLst/>
-          </a:prstGeom>
-          <a:noFill/>
-        </p:spPr>
-        <p:txBody>
-          <a:bodyPr wrap="square" anchor="ctr" lIns="0" rIns="0" tIns="0" bIns="0">
+            <a:off x="457200" y="274320"/>
+            <a:ext cx="11277295" cy="274320"/>
+          </a:xfrm>
+          <a:prstGeom prst="rect">
+            <a:avLst/>
+          </a:prstGeom>
+          <a:noFill/>
+        </p:spPr>
+        <p:txBody>
+          <a:bodyPr wrap="square" anchor="t" lIns="0" rIns="0" tIns="0" bIns="0">
             <a:spAutoFit/>
           </a:bodyPr>
           <a:lstStyle/>
           <a:p>
             <a:pPr algn="l"/>
             <a:r>
-              <a:rPr sz="2600" b="1">
-                <a:solidFill>
-                  <a:srgbClr val="FFFFFF"/>
-                </a:solidFill>
-                <a:latin typeface="Helvetica"/>
-              </a:rPr>
-              <a:t>Hallazgo 2 — Recurrencia hospitalaria</a:t>
+              <a:rPr sz="1000" b="1" i="0">
+                <a:solidFill>
+                  <a:srgbClr val="8E8E8E"/>
+                </a:solidFill>
+                <a:latin typeface="Arial"/>
+              </a:rPr>
+              <a:t>HALLAZGO 1 · READMISIÓN TEMPRANA</a:t>
             </a:r>
           </a:p>
         </p:txBody>
@@ -5827,8 +7918,8 @@
         </p:nvSpPr>
         <p:spPr>
           <a:xfrm>
-            <a:off x="457200" y="841248"/>
-            <a:ext cx="11277295" cy="365760"/>
+            <a:off x="457200" y="548640"/>
+            <a:ext cx="11277295" cy="822960"/>
           </a:xfrm>
           <a:prstGeom prst="rect">
             <a:avLst/>
@@ -5843,20 +7934,160 @@
           <a:p>
             <a:pPr algn="l"/>
             <a:r>
-              <a:rPr sz="1400" b="0">
-                <a:solidFill>
-                  <a:srgbClr val="4A4A4A"/>
-                </a:solidFill>
-                <a:latin typeface="Helvetica"/>
-              </a:rPr>
-              <a:t>Un grupo pequeño concentra una porción desproporcionada del uso</a:t>
+              <a:rPr sz="2200" b="1" i="0">
+                <a:solidFill>
+                  <a:srgbClr val="051C2C"/>
+                </a:solidFill>
+                <a:latin typeface="Arial"/>
+              </a:rPr>
+              <a:t>Cada admisión previa multiplica por 1.40 la probabilidad de readmisión a 30 días</a:t>
+            </a:r>
+          </a:p>
+        </p:txBody>
+      </p:sp>
+      <p:cxnSp>
+        <p:nvCxnSpPr>
+          <p:cNvPr id="5" name="Connector 4"/>
+          <p:cNvCxnSpPr/>
+          <p:nvPr/>
+        </p:nvCxnSpPr>
+        <p:spPr>
+          <a:xfrm>
+            <a:off x="457200" y="1417320"/>
+            <a:ext cx="11277295" cy="0"/>
+          </a:xfrm>
+          <a:prstGeom prst="line">
+            <a:avLst/>
+          </a:prstGeom>
+          <a:ln w="9525">
+            <a:solidFill>
+              <a:srgbClr val="E1E1E1"/>
+            </a:solidFill>
+          </a:ln>
+        </p:spPr>
+        <p:style>
+          <a:lnRef idx="2">
+            <a:schemeClr val="accent1"/>
+          </a:lnRef>
+          <a:fillRef idx="0">
+            <a:schemeClr val="accent1"/>
+          </a:fillRef>
+          <a:effectRef idx="1">
+            <a:schemeClr val="accent1"/>
+          </a:effectRef>
+          <a:fontRef idx="minor">
+            <a:schemeClr val="tx1"/>
+          </a:fontRef>
+        </p:style>
+      </p:cxnSp>
+      <p:cxnSp>
+        <p:nvCxnSpPr>
+          <p:cNvPr id="6" name="Connector 5"/>
+          <p:cNvCxnSpPr/>
+          <p:nvPr/>
+        </p:nvCxnSpPr>
+        <p:spPr>
+          <a:xfrm>
+            <a:off x="457200" y="6446520"/>
+            <a:ext cx="11277295" cy="0"/>
+          </a:xfrm>
+          <a:prstGeom prst="line">
+            <a:avLst/>
+          </a:prstGeom>
+          <a:ln w="9525">
+            <a:solidFill>
+              <a:srgbClr val="E1E1E1"/>
+            </a:solidFill>
+          </a:ln>
+        </p:spPr>
+        <p:style>
+          <a:lnRef idx="2">
+            <a:schemeClr val="accent1"/>
+          </a:lnRef>
+          <a:fillRef idx="0">
+            <a:schemeClr val="accent1"/>
+          </a:fillRef>
+          <a:effectRef idx="1">
+            <a:schemeClr val="accent1"/>
+          </a:effectRef>
+          <a:fontRef idx="minor">
+            <a:schemeClr val="tx1"/>
+          </a:fontRef>
+        </p:style>
+      </p:cxnSp>
+      <p:sp>
+        <p:nvSpPr>
+          <p:cNvPr id="7" name="TextBox 6"/>
+          <p:cNvSpPr txBox="1"/>
+          <p:nvPr/>
+        </p:nvSpPr>
+        <p:spPr>
+          <a:xfrm>
+            <a:off x="457200" y="6537960"/>
+            <a:ext cx="10058400" cy="228600"/>
+          </a:xfrm>
+          <a:prstGeom prst="rect">
+            <a:avLst/>
+          </a:prstGeom>
+          <a:noFill/>
+        </p:spPr>
+        <p:txBody>
+          <a:bodyPr wrap="square" anchor="t" lIns="0" rIns="0" tIns="0" bIns="0">
+            <a:spAutoFit/>
+          </a:bodyPr>
+          <a:lstStyle/>
+          <a:p>
+            <a:pPr algn="l"/>
+            <a:r>
+              <a:rPr sz="800" b="0" i="1">
+                <a:solidFill>
+                  <a:srgbClr val="8E8E8E"/>
+                </a:solidFill>
+                <a:latin typeface="Arial"/>
+              </a:rPr>
+              <a:t>Fuente: análisis del equipo basado en Diabetes 130-Hospitals (UCI, n=69,970)</a:t>
+            </a:r>
+          </a:p>
+        </p:txBody>
+      </p:sp>
+      <p:sp>
+        <p:nvSpPr>
+          <p:cNvPr id="8" name="TextBox 7"/>
+          <p:cNvSpPr txBox="1"/>
+          <p:nvPr/>
+        </p:nvSpPr>
+        <p:spPr>
+          <a:xfrm>
+            <a:off x="11551615" y="6537960"/>
+            <a:ext cx="274320" cy="228600"/>
+          </a:xfrm>
+          <a:prstGeom prst="rect">
+            <a:avLst/>
+          </a:prstGeom>
+          <a:noFill/>
+        </p:spPr>
+        <p:txBody>
+          <a:bodyPr wrap="square" anchor="t" lIns="0" rIns="0" tIns="0" bIns="0">
+            <a:spAutoFit/>
+          </a:bodyPr>
+          <a:lstStyle/>
+          <a:p>
+            <a:pPr algn="r"/>
+            <a:r>
+              <a:rPr sz="900" b="0" i="0">
+                <a:solidFill>
+                  <a:srgbClr val="8E8E8E"/>
+                </a:solidFill>
+                <a:latin typeface="Arial"/>
+              </a:rPr>
+              <a:t>6</a:t>
             </a:r>
           </a:p>
         </p:txBody>
       </p:sp>
       <p:pic>
         <p:nvPicPr>
-          <p:cNvPr id="5" name="Picture 4" descr="fig7_aic_poisson_nb.png"/>
+          <p:cNvPr id="9" name="Picture 8" descr="fig4_or_logistica.png"/>
           <p:cNvPicPr>
             <a:picLocks noChangeAspect="1"/>
           </p:cNvPicPr>
@@ -5870,8 +8101,8 @@
         </p:blipFill>
         <p:spPr>
           <a:xfrm>
-            <a:off x="365760" y="1371600"/>
-            <a:ext cx="6400800" cy="1936490"/>
+            <a:off x="457200" y="1828800"/>
+            <a:ext cx="6400800" cy="3985131"/>
           </a:xfrm>
           <a:prstGeom prst="rect">
             <a:avLst/>
@@ -5880,24 +8111,25 @@
       </p:pic>
       <p:sp>
         <p:nvSpPr>
-          <p:cNvPr id="6" name="Rectangle 5"/>
+          <p:cNvPr id="10" name="Rectangle 9"/>
           <p:cNvSpPr/>
           <p:nvPr/>
         </p:nvSpPr>
         <p:spPr>
           <a:xfrm>
-            <a:off x="7132320" y="1463040"/>
-            <a:ext cx="4754880" cy="2286000"/>
+            <a:off x="7223760" y="1828800"/>
+            <a:ext cx="4572000" cy="2194560"/>
           </a:xfrm>
           <a:prstGeom prst="rect">
             <a:avLst/>
           </a:prstGeom>
           <a:solidFill>
-            <a:srgbClr val="EEEEEE"/>
+            <a:srgbClr val="F5F5F5"/>
           </a:solidFill>
           <a:ln>
             <a:noFill/>
           </a:ln>
+          <a:effectLst/>
         </p:spPr>
         <p:style>
           <a:lnRef idx="1">
@@ -5923,129 +8155,163 @@
       </p:sp>
       <p:sp>
         <p:nvSpPr>
-          <p:cNvPr id="7" name="TextBox 6"/>
-          <p:cNvSpPr txBox="1"/>
-          <p:nvPr/>
-        </p:nvSpPr>
-        <p:spPr>
-          <a:xfrm>
-            <a:off x="7132320" y="1554480"/>
-            <a:ext cx="4754880" cy="1097280"/>
-          </a:xfrm>
-          <a:prstGeom prst="rect">
-            <a:avLst/>
-          </a:prstGeom>
-          <a:noFill/>
-        </p:spPr>
-        <p:txBody>
-          <a:bodyPr wrap="square" anchor="ctr" lIns="0" rIns="0" tIns="0" bIns="0">
-            <a:spAutoFit/>
-          </a:bodyPr>
+          <p:cNvPr id="11" name="Rectangle 10"/>
+          <p:cNvSpPr/>
+          <p:nvPr/>
+        </p:nvSpPr>
+        <p:spPr>
+          <a:xfrm>
+            <a:off x="7223760" y="1828800"/>
+            <a:ext cx="91440" cy="2194560"/>
+          </a:xfrm>
+          <a:prstGeom prst="rect">
+            <a:avLst/>
+          </a:prstGeom>
+          <a:solidFill>
+            <a:srgbClr val="FE5000"/>
+          </a:solidFill>
+          <a:ln>
+            <a:noFill/>
+          </a:ln>
+          <a:effectLst/>
+        </p:spPr>
+        <p:style>
+          <a:lnRef idx="1">
+            <a:schemeClr val="accent1"/>
+          </a:lnRef>
+          <a:fillRef idx="3">
+            <a:schemeClr val="accent1"/>
+          </a:fillRef>
+          <a:effectRef idx="2">
+            <a:schemeClr val="accent1"/>
+          </a:effectRef>
+          <a:fontRef idx="minor">
+            <a:schemeClr val="lt1"/>
+          </a:fontRef>
+        </p:style>
+        <p:txBody>
+          <a:bodyPr rtlCol="0" anchor="ctr"/>
           <a:lstStyle/>
           <a:p>
             <a:pPr algn="ctr"/>
-            <a:r>
-              <a:rPr sz="6400" b="1">
-                <a:solidFill>
-                  <a:srgbClr val="B03838"/>
-                </a:solidFill>
-                <a:latin typeface="Helvetica"/>
-              </a:rPr>
-              <a:t>×1.77</a:t>
-            </a:r>
-          </a:p>
-        </p:txBody>
-      </p:sp>
-      <p:sp>
-        <p:nvSpPr>
-          <p:cNvPr id="8" name="TextBox 7"/>
-          <p:cNvSpPr txBox="1"/>
-          <p:nvPr/>
-        </p:nvSpPr>
-        <p:spPr>
-          <a:xfrm>
-            <a:off x="7132320" y="2651760"/>
-            <a:ext cx="4754880" cy="548640"/>
-          </a:xfrm>
-          <a:prstGeom prst="rect">
-            <a:avLst/>
-          </a:prstGeom>
-          <a:noFill/>
-        </p:spPr>
-        <p:txBody>
-          <a:bodyPr wrap="square" anchor="ctr" lIns="0" rIns="0" tIns="0" bIns="0">
-            <a:spAutoFit/>
-          </a:bodyPr>
-          <a:lstStyle/>
-          <a:p>
-            <a:pPr algn="ctr"/>
-            <a:r>
-              <a:rPr sz="1500" b="0">
+          </a:p>
+        </p:txBody>
+      </p:sp>
+      <p:sp>
+        <p:nvSpPr>
+          <p:cNvPr id="12" name="TextBox 11"/>
+          <p:cNvSpPr txBox="1"/>
+          <p:nvPr/>
+        </p:nvSpPr>
+        <p:spPr>
+          <a:xfrm>
+            <a:off x="7452360" y="1965960"/>
+            <a:ext cx="4206240" cy="274320"/>
+          </a:xfrm>
+          <a:prstGeom prst="rect">
+            <a:avLst/>
+          </a:prstGeom>
+          <a:noFill/>
+        </p:spPr>
+        <p:txBody>
+          <a:bodyPr wrap="square" anchor="t" lIns="0" rIns="0" tIns="0" bIns="0">
+            <a:spAutoFit/>
+          </a:bodyPr>
+          <a:lstStyle/>
+          <a:p>
+            <a:pPr algn="l"/>
+            <a:r>
+              <a:rPr sz="1000" b="1" i="0">
+                <a:solidFill>
+                  <a:srgbClr val="8E8E8E"/>
+                </a:solidFill>
+                <a:latin typeface="Arial"/>
+              </a:rPr>
+              <a:t>FACTOR DOMINANTE</a:t>
+            </a:r>
+          </a:p>
+        </p:txBody>
+      </p:sp>
+      <p:sp>
+        <p:nvSpPr>
+          <p:cNvPr id="13" name="TextBox 12"/>
+          <p:cNvSpPr txBox="1"/>
+          <p:nvPr/>
+        </p:nvSpPr>
+        <p:spPr>
+          <a:xfrm>
+            <a:off x="7452360" y="2286000"/>
+            <a:ext cx="4206240" cy="914400"/>
+          </a:xfrm>
+          <a:prstGeom prst="rect">
+            <a:avLst/>
+          </a:prstGeom>
+          <a:noFill/>
+        </p:spPr>
+        <p:txBody>
+          <a:bodyPr wrap="square" anchor="t" lIns="0" rIns="0" tIns="0" bIns="0">
+            <a:spAutoFit/>
+          </a:bodyPr>
+          <a:lstStyle/>
+          <a:p>
+            <a:pPr algn="l"/>
+            <a:r>
+              <a:rPr sz="5400" b="1" i="0">
+                <a:solidFill>
+                  <a:srgbClr val="051C2C"/>
+                </a:solidFill>
+                <a:latin typeface="Arial"/>
+              </a:rPr>
+              <a:t>×1.40</a:t>
+            </a:r>
+          </a:p>
+        </p:txBody>
+      </p:sp>
+      <p:sp>
+        <p:nvSpPr>
+          <p:cNvPr id="14" name="TextBox 13"/>
+          <p:cNvSpPr txBox="1"/>
+          <p:nvPr/>
+        </p:nvSpPr>
+        <p:spPr>
+          <a:xfrm>
+            <a:off x="7452360" y="3200400"/>
+            <a:ext cx="4206240" cy="365760"/>
+          </a:xfrm>
+          <a:prstGeom prst="rect">
+            <a:avLst/>
+          </a:prstGeom>
+          <a:noFill/>
+        </p:spPr>
+        <p:txBody>
+          <a:bodyPr wrap="square" anchor="t" lIns="0" rIns="0" tIns="0" bIns="0">
+            <a:spAutoFit/>
+          </a:bodyPr>
+          <a:lstStyle/>
+          <a:p>
+            <a:pPr algn="l"/>
+            <a:r>
+              <a:rPr sz="1300" b="1" i="0">
                 <a:solidFill>
                   <a:srgbClr val="4A4A4A"/>
                 </a:solidFill>
-                <a:latin typeface="Helvetica"/>
-              </a:rPr>
-              <a:t>por cada visita previa a urgencias</a:t>
-            </a:r>
-          </a:p>
-        </p:txBody>
-      </p:sp>
-      <p:sp>
-        <p:nvSpPr>
-          <p:cNvPr id="9" name="TextBox 8"/>
-          <p:cNvSpPr txBox="1"/>
-          <p:nvPr/>
-        </p:nvSpPr>
-        <p:spPr>
-          <a:xfrm>
-            <a:off x="7132320" y="3017520"/>
-            <a:ext cx="4754880" cy="640080"/>
-          </a:xfrm>
-          <a:prstGeom prst="rect">
-            <a:avLst/>
-          </a:prstGeom>
-          <a:noFill/>
-        </p:spPr>
-        <p:txBody>
-          <a:bodyPr wrap="square" anchor="ctr" lIns="0" rIns="0" tIns="0" bIns="0">
-            <a:spAutoFit/>
-          </a:bodyPr>
-          <a:lstStyle/>
-          <a:p>
-            <a:pPr algn="ctr"/>
-            <a:r>
-              <a:rPr sz="1100" b="0">
-                <a:solidFill>
-                  <a:srgbClr val="4A4A4A"/>
-                </a:solidFill>
-                <a:latin typeface="Helvetica"/>
-              </a:rPr>
-              <a:t>(multiplicador del número esperado de</a:t>
-            </a:r>
-            <a:br/>
-            <a:r>
-              <a:rPr sz="1100" b="0">
-                <a:solidFill>
-                  <a:srgbClr val="4A4A4A"/>
-                </a:solidFill>
-                <a:latin typeface="Helvetica"/>
-              </a:rPr>
-              <a:t>futuras admisiones)</a:t>
-            </a:r>
-          </a:p>
-        </p:txBody>
-      </p:sp>
-      <p:sp>
-        <p:nvSpPr>
-          <p:cNvPr id="10" name="TextBox 9"/>
-          <p:cNvSpPr txBox="1"/>
-          <p:nvPr/>
-        </p:nvSpPr>
-        <p:spPr>
-          <a:xfrm>
-            <a:off x="7132320" y="4023360"/>
-            <a:ext cx="4754880" cy="365760"/>
+                <a:latin typeface="Arial"/>
+              </a:rPr>
+              <a:t>por cada admisión previa adicional</a:t>
+            </a:r>
+          </a:p>
+        </p:txBody>
+      </p:sp>
+      <p:sp>
+        <p:nvSpPr>
+          <p:cNvPr id="15" name="TextBox 14"/>
+          <p:cNvSpPr txBox="1"/>
+          <p:nvPr/>
+        </p:nvSpPr>
+        <p:spPr>
+          <a:xfrm>
+            <a:off x="7452360" y="3566160"/>
+            <a:ext cx="4206240" cy="457200"/>
           </a:xfrm>
           <a:prstGeom prst="rect">
             <a:avLst/>
@@ -6060,27 +8326,97 @@
           <a:p>
             <a:pPr algn="l"/>
             <a:r>
-              <a:rPr sz="1500" b="1">
-                <a:solidFill>
-                  <a:srgbClr val="3B6AA0"/>
-                </a:solidFill>
-                <a:latin typeface="Helvetica"/>
-              </a:rPr>
-              <a:t>Lo que significa:</a:t>
-            </a:r>
-          </a:p>
-        </p:txBody>
-      </p:sp>
-      <p:sp>
-        <p:nvSpPr>
-          <p:cNvPr id="11" name="TextBox 10"/>
-          <p:cNvSpPr txBox="1"/>
-          <p:nvPr/>
-        </p:nvSpPr>
-        <p:spPr>
-          <a:xfrm>
-            <a:off x="7132320" y="4480560"/>
-            <a:ext cx="4754880" cy="2194560"/>
+              <a:rPr sz="1100" b="0" i="0">
+                <a:solidFill>
+                  <a:srgbClr val="8E8E8E"/>
+                </a:solidFill>
+                <a:latin typeface="Arial"/>
+              </a:rPr>
+              <a:t>≈ 40 % más probabilidad que un paciente comparable sin ese antecedente</a:t>
+            </a:r>
+          </a:p>
+        </p:txBody>
+      </p:sp>
+      <p:sp>
+        <p:nvSpPr>
+          <p:cNvPr id="16" name="TextBox 15"/>
+          <p:cNvSpPr txBox="1"/>
+          <p:nvPr/>
+        </p:nvSpPr>
+        <p:spPr>
+          <a:xfrm>
+            <a:off x="7223760" y="4206240"/>
+            <a:ext cx="4572000" cy="365760"/>
+          </a:xfrm>
+          <a:prstGeom prst="rect">
+            <a:avLst/>
+          </a:prstGeom>
+          <a:noFill/>
+        </p:spPr>
+        <p:txBody>
+          <a:bodyPr wrap="square" anchor="t" lIns="0" rIns="0" tIns="0" bIns="0">
+            <a:spAutoFit/>
+          </a:bodyPr>
+          <a:lstStyle/>
+          <a:p>
+            <a:pPr algn="l"/>
+            <a:r>
+              <a:rPr sz="1200" b="1" i="0">
+                <a:solidFill>
+                  <a:srgbClr val="051C2C"/>
+                </a:solidFill>
+                <a:latin typeface="Arial"/>
+              </a:rPr>
+              <a:t>Otros predictores significativos</a:t>
+            </a:r>
+          </a:p>
+        </p:txBody>
+      </p:sp>
+      <p:cxnSp>
+        <p:nvCxnSpPr>
+          <p:cNvPr id="17" name="Connector 16"/>
+          <p:cNvCxnSpPr/>
+          <p:nvPr/>
+        </p:nvCxnSpPr>
+        <p:spPr>
+          <a:xfrm>
+            <a:off x="7223760" y="4526280"/>
+            <a:ext cx="4572000" cy="0"/>
+          </a:xfrm>
+          <a:prstGeom prst="line">
+            <a:avLst/>
+          </a:prstGeom>
+          <a:ln w="12700">
+            <a:solidFill>
+              <a:srgbClr val="051C2C"/>
+            </a:solidFill>
+          </a:ln>
+        </p:spPr>
+        <p:style>
+          <a:lnRef idx="2">
+            <a:schemeClr val="accent1"/>
+          </a:lnRef>
+          <a:fillRef idx="0">
+            <a:schemeClr val="accent1"/>
+          </a:fillRef>
+          <a:effectRef idx="1">
+            <a:schemeClr val="accent1"/>
+          </a:effectRef>
+          <a:fontRef idx="minor">
+            <a:schemeClr val="tx1"/>
+          </a:fontRef>
+        </p:style>
+      </p:cxnSp>
+      <p:sp>
+        <p:nvSpPr>
+          <p:cNvPr id="18" name="TextBox 17"/>
+          <p:cNvSpPr txBox="1"/>
+          <p:nvPr/>
+        </p:nvSpPr>
+        <p:spPr>
+          <a:xfrm>
+            <a:off x="7223760" y="4663440"/>
+            <a:ext cx="4572000" cy="1828800"/>
           </a:xfrm>
           <a:prstGeom prst="rect">
             <a:avLst/>
@@ -6095,139 +8431,49 @@
           <a:p>
             <a:pPr>
               <a:spcAft>
-                <a:spcPts val="800"/>
+                <a:spcPts val="600"/>
               </a:spcAft>
             </a:pPr>
             <a:r>
-              <a:rPr sz="1400">
+              <a:rPr sz="1200">
                 <a:solidFill>
                   <a:srgbClr val="4A4A4A"/>
                 </a:solidFill>
-                <a:latin typeface="Helvetica"/>
-              </a:rPr>
-              <a:t>• No es una distribución pareja: pocos pacientes</a:t>
-            </a:r>
-            <a:br/>
-            <a:r>
-              <a:rPr sz="1400">
-                <a:solidFill>
-                  <a:srgbClr val="4A4A4A"/>
-                </a:solidFill>
-                <a:latin typeface="Helvetica"/>
-              </a:rPr>
-              <a:t>concentran muchas más admisiones</a:t>
+                <a:latin typeface="Arial"/>
+              </a:rPr>
+              <a:t>— Uso de medicamento para diabetes  +21 %</a:t>
             </a:r>
           </a:p>
           <a:p>
             <a:pPr>
               <a:spcAft>
-                <a:spcPts val="800"/>
+                <a:spcPts val="600"/>
               </a:spcAft>
             </a:pPr>
             <a:r>
-              <a:rPr sz="1400">
+              <a:rPr sz="1200">
                 <a:solidFill>
                   <a:srgbClr val="4A4A4A"/>
                 </a:solidFill>
-                <a:latin typeface="Helvetica"/>
-              </a:rPr>
-              <a:t>• Las visitas a urgencias son señal temprana</a:t>
-            </a:r>
-            <a:br/>
-            <a:r>
-              <a:rPr sz="1400">
-                <a:solidFill>
-                  <a:srgbClr val="4A4A4A"/>
-                </a:solidFill>
-                <a:latin typeface="Helvetica"/>
-              </a:rPr>
-              <a:t>de recurrencia inminente</a:t>
+                <a:latin typeface="Arial"/>
+              </a:rPr>
+              <a:t>— Cada visita previa a urgencias  +7 %</a:t>
             </a:r>
           </a:p>
           <a:p>
             <a:pPr>
               <a:spcAft>
-                <a:spcPts val="800"/>
+                <a:spcPts val="600"/>
               </a:spcAft>
             </a:pPr>
             <a:r>
-              <a:rPr sz="1400">
+              <a:rPr sz="1200">
                 <a:solidFill>
                   <a:srgbClr val="4A4A4A"/>
                 </a:solidFill>
-                <a:latin typeface="Helvetica"/>
-              </a:rPr>
-              <a:t>• Identificable antes del alta</a:t>
-            </a:r>
-          </a:p>
-        </p:txBody>
-      </p:sp>
-      <p:sp>
-        <p:nvSpPr>
-          <p:cNvPr id="12" name="TextBox 11"/>
-          <p:cNvSpPr txBox="1"/>
-          <p:nvPr/>
-        </p:nvSpPr>
-        <p:spPr>
-          <a:xfrm>
-            <a:off x="457200" y="6492240"/>
-            <a:ext cx="7315200" cy="274320"/>
-          </a:xfrm>
-          <a:prstGeom prst="rect">
-            <a:avLst/>
-          </a:prstGeom>
-          <a:noFill/>
-        </p:spPr>
-        <p:txBody>
-          <a:bodyPr wrap="square" anchor="t" lIns="0" rIns="0" tIns="0" bIns="0">
-            <a:spAutoFit/>
-          </a:bodyPr>
-          <a:lstStyle/>
-          <a:p>
-            <a:pPr algn="l"/>
-            <a:r>
-              <a:rPr sz="900" b="0">
-                <a:solidFill>
-                  <a:srgbClr val="4A4A4A"/>
-                </a:solidFill>
-                <a:latin typeface="Helvetica"/>
-              </a:rPr>
-              <a:t>Proyecto Final · Analítica de Datos · Universidad Iberoamericana</a:t>
-            </a:r>
-          </a:p>
-        </p:txBody>
-      </p:sp>
-      <p:sp>
-        <p:nvSpPr>
-          <p:cNvPr id="13" name="TextBox 12"/>
-          <p:cNvSpPr txBox="1"/>
-          <p:nvPr/>
-        </p:nvSpPr>
-        <p:spPr>
-          <a:xfrm>
-            <a:off x="11277295" y="6492240"/>
-            <a:ext cx="457200" cy="274320"/>
-          </a:xfrm>
-          <a:prstGeom prst="rect">
-            <a:avLst/>
-          </a:prstGeom>
-          <a:noFill/>
-        </p:spPr>
-        <p:txBody>
-          <a:bodyPr wrap="square" anchor="t" lIns="0" rIns="0" tIns="0" bIns="0">
-            <a:spAutoFit/>
-          </a:bodyPr>
-          <a:lstStyle/>
-          <a:p>
-            <a:pPr algn="r"/>
-            <a:r>
-              <a:rPr sz="900" b="0">
-                <a:solidFill>
-                  <a:srgbClr val="4A4A4A"/>
-                </a:solidFill>
-                <a:latin typeface="Helvetica"/>
-              </a:rPr>
-              <a:t>6/9</a:t>
+                <a:latin typeface="Arial"/>
+              </a:rPr>
+              <a:t>— Cada día adicional de estancia  +4 %</a:t>
             </a:r>
           </a:p>
         </p:txBody>
@@ -6259,17 +8505,18 @@
         <p:spPr>
           <a:xfrm>
             <a:off x="0" y="0"/>
-            <a:ext cx="12191695" cy="822960"/>
+            <a:ext cx="12191695" cy="73152"/>
           </a:xfrm>
           <a:prstGeom prst="rect">
             <a:avLst/>
           </a:prstGeom>
           <a:solidFill>
-            <a:srgbClr val="3B6AA0"/>
+            <a:srgbClr val="051C2C"/>
           </a:solidFill>
           <a:ln>
             <a:noFill/>
           </a:ln>
+          <a:effectLst/>
         </p:spPr>
         <p:style>
           <a:lnRef idx="1">
@@ -6301,29 +8548,29 @@
         </p:nvSpPr>
         <p:spPr>
           <a:xfrm>
-            <a:off x="457200" y="164592"/>
-            <a:ext cx="11277295" cy="502920"/>
-          </a:xfrm>
-          <a:prstGeom prst="rect">
-            <a:avLst/>
-          </a:prstGeom>
-          <a:noFill/>
-        </p:spPr>
-        <p:txBody>
-          <a:bodyPr wrap="square" anchor="ctr" lIns="0" rIns="0" tIns="0" bIns="0">
+            <a:off x="457200" y="274320"/>
+            <a:ext cx="11277295" cy="274320"/>
+          </a:xfrm>
+          <a:prstGeom prst="rect">
+            <a:avLst/>
+          </a:prstGeom>
+          <a:noFill/>
+        </p:spPr>
+        <p:txBody>
+          <a:bodyPr wrap="square" anchor="t" lIns="0" rIns="0" tIns="0" bIns="0">
             <a:spAutoFit/>
           </a:bodyPr>
           <a:lstStyle/>
           <a:p>
             <a:pPr algn="l"/>
             <a:r>
-              <a:rPr sz="2600" b="1">
-                <a:solidFill>
-                  <a:srgbClr val="FFFFFF"/>
-                </a:solidFill>
-                <a:latin typeface="Helvetica"/>
-              </a:rPr>
-              <a:t>Hallazgo 3 — Duración de la estancia</a:t>
+              <a:rPr sz="1000" b="1" i="0">
+                <a:solidFill>
+                  <a:srgbClr val="8E8E8E"/>
+                </a:solidFill>
+                <a:latin typeface="Arial"/>
+              </a:rPr>
+              <a:t>HALLAZGO 2 · RECURRENCIA HOSPITALARIA</a:t>
             </a:r>
           </a:p>
         </p:txBody>
@@ -6336,8 +8583,8 @@
         </p:nvSpPr>
         <p:spPr>
           <a:xfrm>
-            <a:off x="457200" y="841248"/>
-            <a:ext cx="11277295" cy="365760"/>
+            <a:off x="457200" y="548640"/>
+            <a:ext cx="11277295" cy="822960"/>
           </a:xfrm>
           <a:prstGeom prst="rect">
             <a:avLst/>
@@ -6352,20 +8599,160 @@
           <a:p>
             <a:pPr algn="l"/>
             <a:r>
-              <a:rPr sz="1400" b="0">
-                <a:solidFill>
-                  <a:srgbClr val="4A4A4A"/>
-                </a:solidFill>
-                <a:latin typeface="Helvetica"/>
-              </a:rPr>
-              <a:t>La complejidad clínica determina cuánto tiempo permanece el paciente</a:t>
+              <a:rPr sz="2200" b="1" i="0">
+                <a:solidFill>
+                  <a:srgbClr val="051C2C"/>
+                </a:solidFill>
+                <a:latin typeface="Arial"/>
+              </a:rPr>
+              <a:t>Una visita a urgencias multiplica por 1.77 el número esperado de admisiones futuras</a:t>
+            </a:r>
+          </a:p>
+        </p:txBody>
+      </p:sp>
+      <p:cxnSp>
+        <p:nvCxnSpPr>
+          <p:cNvPr id="5" name="Connector 4"/>
+          <p:cNvCxnSpPr/>
+          <p:nvPr/>
+        </p:nvCxnSpPr>
+        <p:spPr>
+          <a:xfrm>
+            <a:off x="457200" y="1417320"/>
+            <a:ext cx="11277295" cy="0"/>
+          </a:xfrm>
+          <a:prstGeom prst="line">
+            <a:avLst/>
+          </a:prstGeom>
+          <a:ln w="9525">
+            <a:solidFill>
+              <a:srgbClr val="E1E1E1"/>
+            </a:solidFill>
+          </a:ln>
+        </p:spPr>
+        <p:style>
+          <a:lnRef idx="2">
+            <a:schemeClr val="accent1"/>
+          </a:lnRef>
+          <a:fillRef idx="0">
+            <a:schemeClr val="accent1"/>
+          </a:fillRef>
+          <a:effectRef idx="1">
+            <a:schemeClr val="accent1"/>
+          </a:effectRef>
+          <a:fontRef idx="minor">
+            <a:schemeClr val="tx1"/>
+          </a:fontRef>
+        </p:style>
+      </p:cxnSp>
+      <p:cxnSp>
+        <p:nvCxnSpPr>
+          <p:cNvPr id="6" name="Connector 5"/>
+          <p:cNvCxnSpPr/>
+          <p:nvPr/>
+        </p:nvCxnSpPr>
+        <p:spPr>
+          <a:xfrm>
+            <a:off x="457200" y="6446520"/>
+            <a:ext cx="11277295" cy="0"/>
+          </a:xfrm>
+          <a:prstGeom prst="line">
+            <a:avLst/>
+          </a:prstGeom>
+          <a:ln w="9525">
+            <a:solidFill>
+              <a:srgbClr val="E1E1E1"/>
+            </a:solidFill>
+          </a:ln>
+        </p:spPr>
+        <p:style>
+          <a:lnRef idx="2">
+            <a:schemeClr val="accent1"/>
+          </a:lnRef>
+          <a:fillRef idx="0">
+            <a:schemeClr val="accent1"/>
+          </a:fillRef>
+          <a:effectRef idx="1">
+            <a:schemeClr val="accent1"/>
+          </a:effectRef>
+          <a:fontRef idx="minor">
+            <a:schemeClr val="tx1"/>
+          </a:fontRef>
+        </p:style>
+      </p:cxnSp>
+      <p:sp>
+        <p:nvSpPr>
+          <p:cNvPr id="7" name="TextBox 6"/>
+          <p:cNvSpPr txBox="1"/>
+          <p:nvPr/>
+        </p:nvSpPr>
+        <p:spPr>
+          <a:xfrm>
+            <a:off x="457200" y="6537960"/>
+            <a:ext cx="10058400" cy="228600"/>
+          </a:xfrm>
+          <a:prstGeom prst="rect">
+            <a:avLst/>
+          </a:prstGeom>
+          <a:noFill/>
+        </p:spPr>
+        <p:txBody>
+          <a:bodyPr wrap="square" anchor="t" lIns="0" rIns="0" tIns="0" bIns="0">
+            <a:spAutoFit/>
+          </a:bodyPr>
+          <a:lstStyle/>
+          <a:p>
+            <a:pPr algn="l"/>
+            <a:r>
+              <a:rPr sz="800" b="0" i="1">
+                <a:solidFill>
+                  <a:srgbClr val="8E8E8E"/>
+                </a:solidFill>
+                <a:latin typeface="Arial"/>
+              </a:rPr>
+              <a:t>Fuente: análisis del equipo basado en Diabetes 130-Hospitals (UCI, n=69,970)</a:t>
+            </a:r>
+          </a:p>
+        </p:txBody>
+      </p:sp>
+      <p:sp>
+        <p:nvSpPr>
+          <p:cNvPr id="8" name="TextBox 7"/>
+          <p:cNvSpPr txBox="1"/>
+          <p:nvPr/>
+        </p:nvSpPr>
+        <p:spPr>
+          <a:xfrm>
+            <a:off x="11551615" y="6537960"/>
+            <a:ext cx="274320" cy="228600"/>
+          </a:xfrm>
+          <a:prstGeom prst="rect">
+            <a:avLst/>
+          </a:prstGeom>
+          <a:noFill/>
+        </p:spPr>
+        <p:txBody>
+          <a:bodyPr wrap="square" anchor="t" lIns="0" rIns="0" tIns="0" bIns="0">
+            <a:spAutoFit/>
+          </a:bodyPr>
+          <a:lstStyle/>
+          <a:p>
+            <a:pPr algn="r"/>
+            <a:r>
+              <a:rPr sz="900" b="0" i="0">
+                <a:solidFill>
+                  <a:srgbClr val="8E8E8E"/>
+                </a:solidFill>
+                <a:latin typeface="Arial"/>
+              </a:rPr>
+              <a:t>7</a:t>
             </a:r>
           </a:p>
         </p:txBody>
       </p:sp>
       <p:pic>
         <p:nvPicPr>
-          <p:cNvPr id="5" name="Picture 4" descr="fig5_diag_gamma.png"/>
+          <p:cNvPr id="9" name="Picture 8" descr="fig7_aic_poisson_nb.png"/>
           <p:cNvPicPr>
             <a:picLocks noChangeAspect="1"/>
           </p:cNvPicPr>
@@ -6379,8 +8766,8 @@
         </p:blipFill>
         <p:spPr>
           <a:xfrm>
-            <a:off x="365760" y="1463040"/>
-            <a:ext cx="6400800" cy="2182483"/>
+            <a:off x="457200" y="1828800"/>
+            <a:ext cx="6400800" cy="1936490"/>
           </a:xfrm>
           <a:prstGeom prst="rect">
             <a:avLst/>
@@ -6389,24 +8776,25 @@
       </p:pic>
       <p:sp>
         <p:nvSpPr>
-          <p:cNvPr id="6" name="Rectangle 5"/>
+          <p:cNvPr id="10" name="Rectangle 9"/>
           <p:cNvSpPr/>
           <p:nvPr/>
         </p:nvSpPr>
         <p:spPr>
           <a:xfrm>
-            <a:off x="7132320" y="1463040"/>
-            <a:ext cx="4754880" cy="2286000"/>
+            <a:off x="7223760" y="1828800"/>
+            <a:ext cx="4572000" cy="2194560"/>
           </a:xfrm>
           <a:prstGeom prst="rect">
             <a:avLst/>
           </a:prstGeom>
           <a:solidFill>
-            <a:srgbClr val="EEEEEE"/>
+            <a:srgbClr val="F5F5F5"/>
           </a:solidFill>
           <a:ln>
             <a:noFill/>
           </a:ln>
+          <a:effectLst/>
         </p:spPr>
         <p:style>
           <a:lnRef idx="1">
@@ -6432,119 +8820,163 @@
       </p:sp>
       <p:sp>
         <p:nvSpPr>
-          <p:cNvPr id="7" name="TextBox 6"/>
-          <p:cNvSpPr txBox="1"/>
-          <p:nvPr/>
-        </p:nvSpPr>
-        <p:spPr>
-          <a:xfrm>
-            <a:off x="7132320" y="1554480"/>
-            <a:ext cx="4754880" cy="1097280"/>
-          </a:xfrm>
-          <a:prstGeom prst="rect">
-            <a:avLst/>
-          </a:prstGeom>
-          <a:noFill/>
-        </p:spPr>
-        <p:txBody>
-          <a:bodyPr wrap="square" anchor="ctr" lIns="0" rIns="0" tIns="0" bIns="0">
-            <a:spAutoFit/>
-          </a:bodyPr>
+          <p:cNvPr id="11" name="Rectangle 10"/>
+          <p:cNvSpPr/>
+          <p:nvPr/>
+        </p:nvSpPr>
+        <p:spPr>
+          <a:xfrm>
+            <a:off x="7223760" y="1828800"/>
+            <a:ext cx="91440" cy="2194560"/>
+          </a:xfrm>
+          <a:prstGeom prst="rect">
+            <a:avLst/>
+          </a:prstGeom>
+          <a:solidFill>
+            <a:srgbClr val="FE5000"/>
+          </a:solidFill>
+          <a:ln>
+            <a:noFill/>
+          </a:ln>
+          <a:effectLst/>
+        </p:spPr>
+        <p:style>
+          <a:lnRef idx="1">
+            <a:schemeClr val="accent1"/>
+          </a:lnRef>
+          <a:fillRef idx="3">
+            <a:schemeClr val="accent1"/>
+          </a:fillRef>
+          <a:effectRef idx="2">
+            <a:schemeClr val="accent1"/>
+          </a:effectRef>
+          <a:fontRef idx="minor">
+            <a:schemeClr val="lt1"/>
+          </a:fontRef>
+        </p:style>
+        <p:txBody>
+          <a:bodyPr rtlCol="0" anchor="ctr"/>
           <a:lstStyle/>
           <a:p>
             <a:pPr algn="ctr"/>
-            <a:r>
-              <a:rPr sz="6400" b="1">
-                <a:solidFill>
-                  <a:srgbClr val="B03838"/>
-                </a:solidFill>
-                <a:latin typeface="Helvetica"/>
-              </a:rPr>
-              <a:t>+34 %</a:t>
-            </a:r>
-          </a:p>
-        </p:txBody>
-      </p:sp>
-      <p:sp>
-        <p:nvSpPr>
-          <p:cNvPr id="8" name="TextBox 7"/>
-          <p:cNvSpPr txBox="1"/>
-          <p:nvPr/>
-        </p:nvSpPr>
-        <p:spPr>
-          <a:xfrm>
-            <a:off x="7132320" y="2651760"/>
-            <a:ext cx="4754880" cy="548640"/>
-          </a:xfrm>
-          <a:prstGeom prst="rect">
-            <a:avLst/>
-          </a:prstGeom>
-          <a:noFill/>
-        </p:spPr>
-        <p:txBody>
-          <a:bodyPr wrap="square" anchor="ctr" lIns="0" rIns="0" tIns="0" bIns="0">
-            <a:spAutoFit/>
-          </a:bodyPr>
-          <a:lstStyle/>
-          <a:p>
-            <a:pPr algn="ctr"/>
-            <a:r>
-              <a:rPr sz="1400" b="0">
+          </a:p>
+        </p:txBody>
+      </p:sp>
+      <p:sp>
+        <p:nvSpPr>
+          <p:cNvPr id="12" name="TextBox 11"/>
+          <p:cNvSpPr txBox="1"/>
+          <p:nvPr/>
+        </p:nvSpPr>
+        <p:spPr>
+          <a:xfrm>
+            <a:off x="7452360" y="1965960"/>
+            <a:ext cx="4206240" cy="274320"/>
+          </a:xfrm>
+          <a:prstGeom prst="rect">
+            <a:avLst/>
+          </a:prstGeom>
+          <a:noFill/>
+        </p:spPr>
+        <p:txBody>
+          <a:bodyPr wrap="square" anchor="t" lIns="0" rIns="0" tIns="0" bIns="0">
+            <a:spAutoFit/>
+          </a:bodyPr>
+          <a:lstStyle/>
+          <a:p>
+            <a:pPr algn="l"/>
+            <a:r>
+              <a:rPr sz="1000" b="1" i="0">
+                <a:solidFill>
+                  <a:srgbClr val="8E8E8E"/>
+                </a:solidFill>
+                <a:latin typeface="Arial"/>
+              </a:rPr>
+              <a:t>SEÑAL TEMPRANA</a:t>
+            </a:r>
+          </a:p>
+        </p:txBody>
+      </p:sp>
+      <p:sp>
+        <p:nvSpPr>
+          <p:cNvPr id="13" name="TextBox 12"/>
+          <p:cNvSpPr txBox="1"/>
+          <p:nvPr/>
+        </p:nvSpPr>
+        <p:spPr>
+          <a:xfrm>
+            <a:off x="7452360" y="2286000"/>
+            <a:ext cx="4206240" cy="914400"/>
+          </a:xfrm>
+          <a:prstGeom prst="rect">
+            <a:avLst/>
+          </a:prstGeom>
+          <a:noFill/>
+        </p:spPr>
+        <p:txBody>
+          <a:bodyPr wrap="square" anchor="t" lIns="0" rIns="0" tIns="0" bIns="0">
+            <a:spAutoFit/>
+          </a:bodyPr>
+          <a:lstStyle/>
+          <a:p>
+            <a:pPr algn="l"/>
+            <a:r>
+              <a:rPr sz="5400" b="1" i="0">
+                <a:solidFill>
+                  <a:srgbClr val="051C2C"/>
+                </a:solidFill>
+                <a:latin typeface="Arial"/>
+              </a:rPr>
+              <a:t>×1.77</a:t>
+            </a:r>
+          </a:p>
+        </p:txBody>
+      </p:sp>
+      <p:sp>
+        <p:nvSpPr>
+          <p:cNvPr id="14" name="TextBox 13"/>
+          <p:cNvSpPr txBox="1"/>
+          <p:nvPr/>
+        </p:nvSpPr>
+        <p:spPr>
+          <a:xfrm>
+            <a:off x="7452360" y="3200400"/>
+            <a:ext cx="4206240" cy="365760"/>
+          </a:xfrm>
+          <a:prstGeom prst="rect">
+            <a:avLst/>
+          </a:prstGeom>
+          <a:noFill/>
+        </p:spPr>
+        <p:txBody>
+          <a:bodyPr wrap="square" anchor="t" lIns="0" rIns="0" tIns="0" bIns="0">
+            <a:spAutoFit/>
+          </a:bodyPr>
+          <a:lstStyle/>
+          <a:p>
+            <a:pPr algn="l"/>
+            <a:r>
+              <a:rPr sz="1300" b="1" i="0">
                 <a:solidFill>
                   <a:srgbClr val="4A4A4A"/>
                 </a:solidFill>
-                <a:latin typeface="Helvetica"/>
-              </a:rPr>
-              <a:t>estancia más larga en categoría "Otros"</a:t>
-            </a:r>
-          </a:p>
-        </p:txBody>
-      </p:sp>
-      <p:sp>
-        <p:nvSpPr>
-          <p:cNvPr id="9" name="TextBox 8"/>
-          <p:cNvSpPr txBox="1"/>
-          <p:nvPr/>
-        </p:nvSpPr>
-        <p:spPr>
-          <a:xfrm>
-            <a:off x="7132320" y="3017520"/>
-            <a:ext cx="4754880" cy="640080"/>
-          </a:xfrm>
-          <a:prstGeom prst="rect">
-            <a:avLst/>
-          </a:prstGeom>
-          <a:noFill/>
-        </p:spPr>
-        <p:txBody>
-          <a:bodyPr wrap="square" anchor="ctr" lIns="0" rIns="0" tIns="0" bIns="0">
-            <a:spAutoFit/>
-          </a:bodyPr>
-          <a:lstStyle/>
-          <a:p>
-            <a:pPr algn="ctr"/>
-            <a:r>
-              <a:rPr sz="1100" b="0">
-                <a:solidFill>
-                  <a:srgbClr val="4A4A4A"/>
-                </a:solidFill>
-                <a:latin typeface="Helvetica"/>
-              </a:rPr>
-              <a:t>(vs. caso circulatorio comparable)</a:t>
-            </a:r>
-          </a:p>
-        </p:txBody>
-      </p:sp>
-      <p:sp>
-        <p:nvSpPr>
-          <p:cNvPr id="10" name="TextBox 9"/>
-          <p:cNvSpPr txBox="1"/>
-          <p:nvPr/>
-        </p:nvSpPr>
-        <p:spPr>
-          <a:xfrm>
-            <a:off x="7132320" y="4023360"/>
-            <a:ext cx="4754880" cy="365760"/>
+                <a:latin typeface="Arial"/>
+              </a:rPr>
+              <a:t>por cada visita previa a urgencias</a:t>
+            </a:r>
+          </a:p>
+        </p:txBody>
+      </p:sp>
+      <p:sp>
+        <p:nvSpPr>
+          <p:cNvPr id="15" name="TextBox 14"/>
+          <p:cNvSpPr txBox="1"/>
+          <p:nvPr/>
+        </p:nvSpPr>
+        <p:spPr>
+          <a:xfrm>
+            <a:off x="7452360" y="3566160"/>
+            <a:ext cx="4206240" cy="457200"/>
           </a:xfrm>
           <a:prstGeom prst="rect">
             <a:avLst/>
@@ -6559,27 +8991,97 @@
           <a:p>
             <a:pPr algn="l"/>
             <a:r>
-              <a:rPr sz="1500" b="1">
-                <a:solidFill>
-                  <a:srgbClr val="3B6AA0"/>
-                </a:solidFill>
-                <a:latin typeface="Helvetica"/>
-              </a:rPr>
-              <a:t>Factores principales:</a:t>
-            </a:r>
-          </a:p>
-        </p:txBody>
-      </p:sp>
-      <p:sp>
-        <p:nvSpPr>
-          <p:cNvPr id="11" name="TextBox 10"/>
-          <p:cNvSpPr txBox="1"/>
-          <p:nvPr/>
-        </p:nvSpPr>
-        <p:spPr>
-          <a:xfrm>
-            <a:off x="7132320" y="4480560"/>
-            <a:ext cx="4754880" cy="2194560"/>
+              <a:rPr sz="1100" b="0" i="0">
+                <a:solidFill>
+                  <a:srgbClr val="8E8E8E"/>
+                </a:solidFill>
+                <a:latin typeface="Arial"/>
+              </a:rPr>
+              <a:t>multiplicador del número esperado de futuras admisiones</a:t>
+            </a:r>
+          </a:p>
+        </p:txBody>
+      </p:sp>
+      <p:sp>
+        <p:nvSpPr>
+          <p:cNvPr id="16" name="TextBox 15"/>
+          <p:cNvSpPr txBox="1"/>
+          <p:nvPr/>
+        </p:nvSpPr>
+        <p:spPr>
+          <a:xfrm>
+            <a:off x="7223760" y="4206240"/>
+            <a:ext cx="4572000" cy="365760"/>
+          </a:xfrm>
+          <a:prstGeom prst="rect">
+            <a:avLst/>
+          </a:prstGeom>
+          <a:noFill/>
+        </p:spPr>
+        <p:txBody>
+          <a:bodyPr wrap="square" anchor="t" lIns="0" rIns="0" tIns="0" bIns="0">
+            <a:spAutoFit/>
+          </a:bodyPr>
+          <a:lstStyle/>
+          <a:p>
+            <a:pPr algn="l"/>
+            <a:r>
+              <a:rPr sz="1200" b="1" i="0">
+                <a:solidFill>
+                  <a:srgbClr val="051C2C"/>
+                </a:solidFill>
+                <a:latin typeface="Arial"/>
+              </a:rPr>
+              <a:t>Implicaciones</a:t>
+            </a:r>
+          </a:p>
+        </p:txBody>
+      </p:sp>
+      <p:cxnSp>
+        <p:nvCxnSpPr>
+          <p:cNvPr id="17" name="Connector 16"/>
+          <p:cNvCxnSpPr/>
+          <p:nvPr/>
+        </p:nvCxnSpPr>
+        <p:spPr>
+          <a:xfrm>
+            <a:off x="7223760" y="4526280"/>
+            <a:ext cx="4572000" cy="0"/>
+          </a:xfrm>
+          <a:prstGeom prst="line">
+            <a:avLst/>
+          </a:prstGeom>
+          <a:ln w="12700">
+            <a:solidFill>
+              <a:srgbClr val="051C2C"/>
+            </a:solidFill>
+          </a:ln>
+        </p:spPr>
+        <p:style>
+          <a:lnRef idx="2">
+            <a:schemeClr val="accent1"/>
+          </a:lnRef>
+          <a:fillRef idx="0">
+            <a:schemeClr val="accent1"/>
+          </a:fillRef>
+          <a:effectRef idx="1">
+            <a:schemeClr val="accent1"/>
+          </a:effectRef>
+          <a:fontRef idx="minor">
+            <a:schemeClr val="tx1"/>
+          </a:fontRef>
+        </p:style>
+      </p:cxnSp>
+      <p:sp>
+        <p:nvSpPr>
+          <p:cNvPr id="18" name="TextBox 17"/>
+          <p:cNvSpPr txBox="1"/>
+          <p:nvPr/>
+        </p:nvSpPr>
+        <p:spPr>
+          <a:xfrm>
+            <a:off x="7223760" y="4663440"/>
+            <a:ext cx="4572000" cy="2194560"/>
           </a:xfrm>
           <a:prstGeom prst="rect">
             <a:avLst/>
@@ -6594,129 +9096,69 @@
           <a:p>
             <a:pPr>
               <a:spcAft>
-                <a:spcPts val="800"/>
+                <a:spcPts val="400"/>
               </a:spcAft>
             </a:pPr>
             <a:r>
-              <a:rPr sz="1400">
+              <a:rPr sz="1200">
                 <a:solidFill>
                   <a:srgbClr val="4A4A4A"/>
                 </a:solidFill>
-                <a:latin typeface="Helvetica"/>
-              </a:rPr>
-              <a:t>• Cada diagnóstico adicional → +3 % de estancia</a:t>
+                <a:latin typeface="Arial"/>
+              </a:rPr>
+              <a:t>— Distribución sesgada: pocos pacientes</a:t>
+            </a:r>
+            <a:br/>
+            <a:r>
+              <a:rPr sz="1200">
+                <a:solidFill>
+                  <a:srgbClr val="4A4A4A"/>
+                </a:solidFill>
+                <a:latin typeface="Arial"/>
+              </a:rPr>
+              <a:t>concentran la mayoría de admisiones</a:t>
             </a:r>
           </a:p>
           <a:p>
             <a:pPr>
               <a:spcAft>
-                <a:spcPts val="800"/>
+                <a:spcPts val="400"/>
               </a:spcAft>
             </a:pPr>
             <a:r>
-              <a:rPr sz="1400">
+              <a:rPr sz="1200">
                 <a:solidFill>
                   <a:srgbClr val="4A4A4A"/>
                 </a:solidFill>
-                <a:latin typeface="Helvetica"/>
-              </a:rPr>
-              <a:t>• Cada admisión previa → +3 % de estancia</a:t>
+                <a:latin typeface="Arial"/>
+              </a:rPr>
+              <a:t>— Las urgencias son señal antes del reingreso</a:t>
+            </a:r>
+            <a:br/>
+            <a:r>
+              <a:rPr sz="1200">
+                <a:solidFill>
+                  <a:srgbClr val="4A4A4A"/>
+                </a:solidFill>
+                <a:latin typeface="Arial"/>
+              </a:rPr>
+              <a:t>hospitalario formal</a:t>
             </a:r>
           </a:p>
           <a:p>
             <a:pPr>
               <a:spcAft>
-                <a:spcPts val="800"/>
+                <a:spcPts val="400"/>
               </a:spcAft>
             </a:pPr>
             <a:r>
-              <a:rPr sz="1400">
+              <a:rPr sz="1200">
                 <a:solidFill>
                   <a:srgbClr val="4A4A4A"/>
                 </a:solidFill>
-                <a:latin typeface="Helvetica"/>
-              </a:rPr>
-              <a:t>• Categorías "Otros", Neoplasmas, Diabetes</a:t>
-            </a:r>
-            <a:br/>
-            <a:r>
-              <a:rPr sz="1400">
-                <a:solidFill>
-                  <a:srgbClr val="4A4A4A"/>
-                </a:solidFill>
-                <a:latin typeface="Helvetica"/>
-              </a:rPr>
-              <a:t>son las más demandantes</a:t>
-            </a:r>
-          </a:p>
-        </p:txBody>
-      </p:sp>
-      <p:sp>
-        <p:nvSpPr>
-          <p:cNvPr id="12" name="TextBox 11"/>
-          <p:cNvSpPr txBox="1"/>
-          <p:nvPr/>
-        </p:nvSpPr>
-        <p:spPr>
-          <a:xfrm>
-            <a:off x="457200" y="6492240"/>
-            <a:ext cx="7315200" cy="274320"/>
-          </a:xfrm>
-          <a:prstGeom prst="rect">
-            <a:avLst/>
-          </a:prstGeom>
-          <a:noFill/>
-        </p:spPr>
-        <p:txBody>
-          <a:bodyPr wrap="square" anchor="t" lIns="0" rIns="0" tIns="0" bIns="0">
-            <a:spAutoFit/>
-          </a:bodyPr>
-          <a:lstStyle/>
-          <a:p>
-            <a:pPr algn="l"/>
-            <a:r>
-              <a:rPr sz="900" b="0">
-                <a:solidFill>
-                  <a:srgbClr val="4A4A4A"/>
-                </a:solidFill>
-                <a:latin typeface="Helvetica"/>
-              </a:rPr>
-              <a:t>Proyecto Final · Analítica de Datos · Universidad Iberoamericana</a:t>
-            </a:r>
-          </a:p>
-        </p:txBody>
-      </p:sp>
-      <p:sp>
-        <p:nvSpPr>
-          <p:cNvPr id="13" name="TextBox 12"/>
-          <p:cNvSpPr txBox="1"/>
-          <p:nvPr/>
-        </p:nvSpPr>
-        <p:spPr>
-          <a:xfrm>
-            <a:off x="11277295" y="6492240"/>
-            <a:ext cx="457200" cy="274320"/>
-          </a:xfrm>
-          <a:prstGeom prst="rect">
-            <a:avLst/>
-          </a:prstGeom>
-          <a:noFill/>
-        </p:spPr>
-        <p:txBody>
-          <a:bodyPr wrap="square" anchor="t" lIns="0" rIns="0" tIns="0" bIns="0">
-            <a:spAutoFit/>
-          </a:bodyPr>
-          <a:lstStyle/>
-          <a:p>
-            <a:pPr algn="r"/>
-            <a:r>
-              <a:rPr sz="900" b="0">
-                <a:solidFill>
-                  <a:srgbClr val="4A4A4A"/>
-                </a:solidFill>
-                <a:latin typeface="Helvetica"/>
-              </a:rPr>
-              <a:t>7/9</a:t>
+                <a:latin typeface="Arial"/>
+              </a:rPr>
+              <a:t>— Identificable antes del alta</a:t>
             </a:r>
           </a:p>
         </p:txBody>
@@ -6748,17 +9190,18 @@
         <p:spPr>
           <a:xfrm>
             <a:off x="0" y="0"/>
-            <a:ext cx="12191695" cy="822960"/>
+            <a:ext cx="12191695" cy="73152"/>
           </a:xfrm>
           <a:prstGeom prst="rect">
             <a:avLst/>
           </a:prstGeom>
           <a:solidFill>
-            <a:srgbClr val="3B6AA0"/>
+            <a:srgbClr val="051C2C"/>
           </a:solidFill>
           <a:ln>
             <a:noFill/>
           </a:ln>
+          <a:effectLst/>
         </p:spPr>
         <p:style>
           <a:lnRef idx="1">
@@ -6790,29 +9233,29 @@
         </p:nvSpPr>
         <p:spPr>
           <a:xfrm>
-            <a:off x="457200" y="164592"/>
-            <a:ext cx="11277295" cy="502920"/>
-          </a:xfrm>
-          <a:prstGeom prst="rect">
-            <a:avLst/>
-          </a:prstGeom>
-          <a:noFill/>
-        </p:spPr>
-        <p:txBody>
-          <a:bodyPr wrap="square" anchor="ctr" lIns="0" rIns="0" tIns="0" bIns="0">
+            <a:off x="457200" y="274320"/>
+            <a:ext cx="11277295" cy="274320"/>
+          </a:xfrm>
+          <a:prstGeom prst="rect">
+            <a:avLst/>
+          </a:prstGeom>
+          <a:noFill/>
+        </p:spPr>
+        <p:txBody>
+          <a:bodyPr wrap="square" anchor="t" lIns="0" rIns="0" tIns="0" bIns="0">
             <a:spAutoFit/>
           </a:bodyPr>
           <a:lstStyle/>
           <a:p>
             <a:pPr algn="l"/>
             <a:r>
-              <a:rPr sz="2600" b="1">
-                <a:solidFill>
-                  <a:srgbClr val="FFFFFF"/>
-                </a:solidFill>
-                <a:latin typeface="Helvetica"/>
-              </a:rPr>
-              <a:t>Recomendaciones operativas</a:t>
+              <a:rPr sz="1000" b="1" i="0">
+                <a:solidFill>
+                  <a:srgbClr val="8E8E8E"/>
+                </a:solidFill>
+                <a:latin typeface="Arial"/>
+              </a:rPr>
+              <a:t>HALLAZGO 3 · DURACIÓN DE LA ESTANCIA</a:t>
             </a:r>
           </a:p>
         </p:txBody>
@@ -6825,8 +9268,8 @@
         </p:nvSpPr>
         <p:spPr>
           <a:xfrm>
-            <a:off x="457200" y="841248"/>
-            <a:ext cx="11277295" cy="365760"/>
+            <a:off x="457200" y="548640"/>
+            <a:ext cx="11277295" cy="822960"/>
           </a:xfrm>
           <a:prstGeom prst="rect">
             <a:avLst/>
@@ -6841,37 +9284,202 @@
           <a:p>
             <a:pPr algn="l"/>
             <a:r>
-              <a:rPr sz="1400" b="0">
-                <a:solidFill>
-                  <a:srgbClr val="4A4A4A"/>
-                </a:solidFill>
-                <a:latin typeface="Helvetica"/>
-              </a:rPr>
-              <a:t>Tres acciones concretas con base en los hallazgos</a:t>
-            </a:r>
-          </a:p>
-        </p:txBody>
-      </p:sp>
-      <p:sp>
-        <p:nvSpPr>
-          <p:cNvPr id="5" name="Rectangle 4"/>
+              <a:rPr sz="2200" b="1" i="0">
+                <a:solidFill>
+                  <a:srgbClr val="051C2C"/>
+                </a:solidFill>
+                <a:latin typeface="Arial"/>
+              </a:rPr>
+              <a:t>La complejidad clínica explica buena parte de la variación en duración de la estancia</a:t>
+            </a:r>
+          </a:p>
+        </p:txBody>
+      </p:sp>
+      <p:cxnSp>
+        <p:nvCxnSpPr>
+          <p:cNvPr id="5" name="Connector 4"/>
+          <p:cNvCxnSpPr/>
+          <p:nvPr/>
+        </p:nvCxnSpPr>
+        <p:spPr>
+          <a:xfrm>
+            <a:off x="457200" y="1417320"/>
+            <a:ext cx="11277295" cy="0"/>
+          </a:xfrm>
+          <a:prstGeom prst="line">
+            <a:avLst/>
+          </a:prstGeom>
+          <a:ln w="9525">
+            <a:solidFill>
+              <a:srgbClr val="E1E1E1"/>
+            </a:solidFill>
+          </a:ln>
+        </p:spPr>
+        <p:style>
+          <a:lnRef idx="2">
+            <a:schemeClr val="accent1"/>
+          </a:lnRef>
+          <a:fillRef idx="0">
+            <a:schemeClr val="accent1"/>
+          </a:fillRef>
+          <a:effectRef idx="1">
+            <a:schemeClr val="accent1"/>
+          </a:effectRef>
+          <a:fontRef idx="minor">
+            <a:schemeClr val="tx1"/>
+          </a:fontRef>
+        </p:style>
+      </p:cxnSp>
+      <p:cxnSp>
+        <p:nvCxnSpPr>
+          <p:cNvPr id="6" name="Connector 5"/>
+          <p:cNvCxnSpPr/>
+          <p:nvPr/>
+        </p:nvCxnSpPr>
+        <p:spPr>
+          <a:xfrm>
+            <a:off x="457200" y="6446520"/>
+            <a:ext cx="11277295" cy="0"/>
+          </a:xfrm>
+          <a:prstGeom prst="line">
+            <a:avLst/>
+          </a:prstGeom>
+          <a:ln w="9525">
+            <a:solidFill>
+              <a:srgbClr val="E1E1E1"/>
+            </a:solidFill>
+          </a:ln>
+        </p:spPr>
+        <p:style>
+          <a:lnRef idx="2">
+            <a:schemeClr val="accent1"/>
+          </a:lnRef>
+          <a:fillRef idx="0">
+            <a:schemeClr val="accent1"/>
+          </a:fillRef>
+          <a:effectRef idx="1">
+            <a:schemeClr val="accent1"/>
+          </a:effectRef>
+          <a:fontRef idx="minor">
+            <a:schemeClr val="tx1"/>
+          </a:fontRef>
+        </p:style>
+      </p:cxnSp>
+      <p:sp>
+        <p:nvSpPr>
+          <p:cNvPr id="7" name="TextBox 6"/>
+          <p:cNvSpPr txBox="1"/>
+          <p:nvPr/>
+        </p:nvSpPr>
+        <p:spPr>
+          <a:xfrm>
+            <a:off x="457200" y="6537960"/>
+            <a:ext cx="10058400" cy="228600"/>
+          </a:xfrm>
+          <a:prstGeom prst="rect">
+            <a:avLst/>
+          </a:prstGeom>
+          <a:noFill/>
+        </p:spPr>
+        <p:txBody>
+          <a:bodyPr wrap="square" anchor="t" lIns="0" rIns="0" tIns="0" bIns="0">
+            <a:spAutoFit/>
+          </a:bodyPr>
+          <a:lstStyle/>
+          <a:p>
+            <a:pPr algn="l"/>
+            <a:r>
+              <a:rPr sz="800" b="0" i="1">
+                <a:solidFill>
+                  <a:srgbClr val="8E8E8E"/>
+                </a:solidFill>
+                <a:latin typeface="Arial"/>
+              </a:rPr>
+              <a:t>Fuente: análisis del equipo basado en Diabetes 130-Hospitals (UCI, n=69,970)</a:t>
+            </a:r>
+          </a:p>
+        </p:txBody>
+      </p:sp>
+      <p:sp>
+        <p:nvSpPr>
+          <p:cNvPr id="8" name="TextBox 7"/>
+          <p:cNvSpPr txBox="1"/>
+          <p:nvPr/>
+        </p:nvSpPr>
+        <p:spPr>
+          <a:xfrm>
+            <a:off x="11551615" y="6537960"/>
+            <a:ext cx="274320" cy="228600"/>
+          </a:xfrm>
+          <a:prstGeom prst="rect">
+            <a:avLst/>
+          </a:prstGeom>
+          <a:noFill/>
+        </p:spPr>
+        <p:txBody>
+          <a:bodyPr wrap="square" anchor="t" lIns="0" rIns="0" tIns="0" bIns="0">
+            <a:spAutoFit/>
+          </a:bodyPr>
+          <a:lstStyle/>
+          <a:p>
+            <a:pPr algn="r"/>
+            <a:r>
+              <a:rPr sz="900" b="0" i="0">
+                <a:solidFill>
+                  <a:srgbClr val="8E8E8E"/>
+                </a:solidFill>
+                <a:latin typeface="Arial"/>
+              </a:rPr>
+              <a:t>8</a:t>
+            </a:r>
+          </a:p>
+        </p:txBody>
+      </p:sp>
+      <p:pic>
+        <p:nvPicPr>
+          <p:cNvPr id="9" name="Picture 8" descr="fig5_diag_gamma.png"/>
+          <p:cNvPicPr>
+            <a:picLocks noChangeAspect="1"/>
+          </p:cNvPicPr>
+          <p:nvPr/>
+        </p:nvPicPr>
+        <p:blipFill>
+          <a:blip r:embed="rId2"/>
+          <a:stretch>
+            <a:fillRect/>
+          </a:stretch>
+        </p:blipFill>
+        <p:spPr>
+          <a:xfrm>
+            <a:off x="457200" y="1828800"/>
+            <a:ext cx="6400800" cy="2182483"/>
+          </a:xfrm>
+          <a:prstGeom prst="rect">
+            <a:avLst/>
+          </a:prstGeom>
+        </p:spPr>
+      </p:pic>
+      <p:sp>
+        <p:nvSpPr>
+          <p:cNvPr id="10" name="Rectangle 9"/>
           <p:cNvSpPr/>
           <p:nvPr/>
         </p:nvSpPr>
         <p:spPr>
           <a:xfrm>
-            <a:off x="457200" y="1463040"/>
-            <a:ext cx="822960" cy="1371600"/>
+            <a:off x="7223760" y="1828800"/>
+            <a:ext cx="4572000" cy="2194560"/>
           </a:xfrm>
           <a:prstGeom prst="rect">
             <a:avLst/>
           </a:prstGeom>
           <a:solidFill>
-            <a:srgbClr val="3B6AA0"/>
+            <a:srgbClr val="F5F5F5"/>
           </a:solidFill>
           <a:ln>
             <a:noFill/>
           </a:ln>
+          <a:effectLst/>
         </p:spPr>
         <p:style>
           <a:lnRef idx="1">
@@ -6897,139 +9505,25 @@
       </p:sp>
       <p:sp>
         <p:nvSpPr>
-          <p:cNvPr id="6" name="TextBox 5"/>
-          <p:cNvSpPr txBox="1"/>
-          <p:nvPr/>
-        </p:nvSpPr>
-        <p:spPr>
-          <a:xfrm>
-            <a:off x="457200" y="1463040"/>
-            <a:ext cx="822960" cy="1371600"/>
-          </a:xfrm>
-          <a:prstGeom prst="rect">
-            <a:avLst/>
-          </a:prstGeom>
-          <a:noFill/>
-        </p:spPr>
-        <p:txBody>
-          <a:bodyPr wrap="square" anchor="ctr" lIns="0" rIns="0" tIns="0" bIns="0">
-            <a:spAutoFit/>
-          </a:bodyPr>
-          <a:lstStyle/>
-          <a:p>
-            <a:pPr algn="ctr"/>
-            <a:r>
-              <a:rPr sz="4800" b="1">
-                <a:solidFill>
-                  <a:srgbClr val="FFFFFF"/>
-                </a:solidFill>
-                <a:latin typeface="Helvetica"/>
-              </a:rPr>
-              <a:t>1</a:t>
-            </a:r>
-          </a:p>
-        </p:txBody>
-      </p:sp>
-      <p:sp>
-        <p:nvSpPr>
-          <p:cNvPr id="7" name="TextBox 6"/>
-          <p:cNvSpPr txBox="1"/>
-          <p:nvPr/>
-        </p:nvSpPr>
-        <p:spPr>
-          <a:xfrm>
-            <a:off x="1463040" y="1554480"/>
-            <a:ext cx="10515600" cy="457200"/>
-          </a:xfrm>
-          <a:prstGeom prst="rect">
-            <a:avLst/>
-          </a:prstGeom>
-          <a:noFill/>
-        </p:spPr>
-        <p:txBody>
-          <a:bodyPr wrap="square" anchor="t" lIns="0" rIns="0" tIns="0" bIns="0">
-            <a:spAutoFit/>
-          </a:bodyPr>
-          <a:lstStyle/>
-          <a:p>
-            <a:pPr algn="l"/>
-            <a:r>
-              <a:rPr sz="2000" b="1">
-                <a:solidFill>
-                  <a:srgbClr val="3B6AA0"/>
-                </a:solidFill>
-                <a:latin typeface="Helvetica"/>
-              </a:rPr>
-              <a:t>Programa de seguimiento al alta</a:t>
-            </a:r>
-          </a:p>
-        </p:txBody>
-      </p:sp>
-      <p:sp>
-        <p:nvSpPr>
-          <p:cNvPr id="8" name="TextBox 7"/>
-          <p:cNvSpPr txBox="1"/>
-          <p:nvPr/>
-        </p:nvSpPr>
-        <p:spPr>
-          <a:xfrm>
-            <a:off x="1463040" y="2103120"/>
-            <a:ext cx="10515600" cy="731520"/>
-          </a:xfrm>
-          <a:prstGeom prst="rect">
-            <a:avLst/>
-          </a:prstGeom>
-          <a:noFill/>
-        </p:spPr>
-        <p:txBody>
-          <a:bodyPr wrap="square" anchor="t" lIns="0" rIns="0" tIns="0" bIns="0">
-            <a:spAutoFit/>
-          </a:bodyPr>
-          <a:lstStyle/>
-          <a:p>
-            <a:pPr algn="l"/>
-            <a:r>
-              <a:rPr sz="1300" b="0">
-                <a:solidFill>
-                  <a:srgbClr val="4A4A4A"/>
-                </a:solidFill>
-                <a:latin typeface="Helvetica"/>
-              </a:rPr>
-              <a:t>Llamada a las 72 h y cita ambulatoria dentro de 7 días para pacientes con</a:t>
-            </a:r>
-            <a:br/>
-            <a:r>
-              <a:rPr sz="1300" b="0">
-                <a:solidFill>
-                  <a:srgbClr val="4A4A4A"/>
-                </a:solidFill>
-                <a:latin typeface="Helvetica"/>
-              </a:rPr>
-              <a:t>historia previa de admisiones. Reduce el predictor más fuerte de readmisión.</a:t>
-            </a:r>
-          </a:p>
-        </p:txBody>
-      </p:sp>
-      <p:sp>
-        <p:nvSpPr>
-          <p:cNvPr id="9" name="Rectangle 8"/>
+          <p:cNvPr id="11" name="Rectangle 10"/>
           <p:cNvSpPr/>
           <p:nvPr/>
         </p:nvSpPr>
         <p:spPr>
           <a:xfrm>
-            <a:off x="457200" y="3108960"/>
-            <a:ext cx="822960" cy="1371600"/>
+            <a:off x="7223760" y="1828800"/>
+            <a:ext cx="91440" cy="2194560"/>
           </a:xfrm>
           <a:prstGeom prst="rect">
             <a:avLst/>
           </a:prstGeom>
           <a:solidFill>
-            <a:srgbClr val="B3582D"/>
+            <a:srgbClr val="FE5000"/>
           </a:solidFill>
           <a:ln>
             <a:noFill/>
           </a:ln>
+          <a:effectLst/>
         </p:spPr>
         <p:style>
           <a:lnRef idx="1">
@@ -7055,49 +9549,14 @@
       </p:sp>
       <p:sp>
         <p:nvSpPr>
-          <p:cNvPr id="10" name="TextBox 9"/>
-          <p:cNvSpPr txBox="1"/>
-          <p:nvPr/>
-        </p:nvSpPr>
-        <p:spPr>
-          <a:xfrm>
-            <a:off x="457200" y="3108960"/>
-            <a:ext cx="822960" cy="1371600"/>
-          </a:xfrm>
-          <a:prstGeom prst="rect">
-            <a:avLst/>
-          </a:prstGeom>
-          <a:noFill/>
-        </p:spPr>
-        <p:txBody>
-          <a:bodyPr wrap="square" anchor="ctr" lIns="0" rIns="0" tIns="0" bIns="0">
-            <a:spAutoFit/>
-          </a:bodyPr>
-          <a:lstStyle/>
-          <a:p>
-            <a:pPr algn="ctr"/>
-            <a:r>
-              <a:rPr sz="4800" b="1">
-                <a:solidFill>
-                  <a:srgbClr val="FFFFFF"/>
-                </a:solidFill>
-                <a:latin typeface="Helvetica"/>
-              </a:rPr>
-              <a:t>2</a:t>
-            </a:r>
-          </a:p>
-        </p:txBody>
-      </p:sp>
-      <p:sp>
-        <p:nvSpPr>
-          <p:cNvPr id="11" name="TextBox 10"/>
-          <p:cNvSpPr txBox="1"/>
-          <p:nvPr/>
-        </p:nvSpPr>
-        <p:spPr>
-          <a:xfrm>
-            <a:off x="1463040" y="3200400"/>
-            <a:ext cx="10515600" cy="457200"/>
+          <p:cNvPr id="12" name="TextBox 11"/>
+          <p:cNvSpPr txBox="1"/>
+          <p:nvPr/>
+        </p:nvSpPr>
+        <p:spPr>
+          <a:xfrm>
+            <a:off x="7452360" y="1965960"/>
+            <a:ext cx="4206240" cy="274320"/>
           </a:xfrm>
           <a:prstGeom prst="rect">
             <a:avLst/>
@@ -7112,27 +9571,27 @@
           <a:p>
             <a:pPr algn="l"/>
             <a:r>
-              <a:rPr sz="2000" b="1">
-                <a:solidFill>
-                  <a:srgbClr val="B3582D"/>
-                </a:solidFill>
-                <a:latin typeface="Helvetica"/>
-              </a:rPr>
-              <a:t>Urgencias como bandera roja</a:t>
-            </a:r>
-          </a:p>
-        </p:txBody>
-      </p:sp>
-      <p:sp>
-        <p:nvSpPr>
-          <p:cNvPr id="12" name="TextBox 11"/>
-          <p:cNvSpPr txBox="1"/>
-          <p:nvPr/>
-        </p:nvSpPr>
-        <p:spPr>
-          <a:xfrm>
-            <a:off x="1463040" y="3749040"/>
-            <a:ext cx="10515600" cy="731520"/>
+              <a:rPr sz="1000" b="1" i="0">
+                <a:solidFill>
+                  <a:srgbClr val="8E8E8E"/>
+                </a:solidFill>
+                <a:latin typeface="Arial"/>
+              </a:rPr>
+              <a:t>CALIDAD DEL AJUSTE</a:t>
+            </a:r>
+          </a:p>
+        </p:txBody>
+      </p:sp>
+      <p:sp>
+        <p:nvSpPr>
+          <p:cNvPr id="13" name="TextBox 12"/>
+          <p:cNvSpPr txBox="1"/>
+          <p:nvPr/>
+        </p:nvSpPr>
+        <p:spPr>
+          <a:xfrm>
+            <a:off x="7452360" y="2286000"/>
+            <a:ext cx="4206240" cy="914400"/>
           </a:xfrm>
           <a:prstGeom prst="rect">
             <a:avLst/>
@@ -7147,251 +9606,234 @@
           <a:p>
             <a:pPr algn="l"/>
             <a:r>
-              <a:rPr sz="1300" b="0">
+              <a:rPr sz="5400" b="1" i="0">
+                <a:solidFill>
+                  <a:srgbClr val="051C2C"/>
+                </a:solidFill>
+                <a:latin typeface="Arial"/>
+              </a:rPr>
+              <a:t>0.28</a:t>
+            </a:r>
+          </a:p>
+        </p:txBody>
+      </p:sp>
+      <p:sp>
+        <p:nvSpPr>
+          <p:cNvPr id="14" name="TextBox 13"/>
+          <p:cNvSpPr txBox="1"/>
+          <p:nvPr/>
+        </p:nvSpPr>
+        <p:spPr>
+          <a:xfrm>
+            <a:off x="7452360" y="3200400"/>
+            <a:ext cx="4206240" cy="365760"/>
+          </a:xfrm>
+          <a:prstGeom prst="rect">
+            <a:avLst/>
+          </a:prstGeom>
+          <a:noFill/>
+        </p:spPr>
+        <p:txBody>
+          <a:bodyPr wrap="square" anchor="t" lIns="0" rIns="0" tIns="0" bIns="0">
+            <a:spAutoFit/>
+          </a:bodyPr>
+          <a:lstStyle/>
+          <a:p>
+            <a:pPr algn="l"/>
+            <a:r>
+              <a:rPr sz="1300" b="1" i="0">
                 <a:solidFill>
                   <a:srgbClr val="4A4A4A"/>
                 </a:solidFill>
-                <a:latin typeface="Helvetica"/>
-              </a:rPr>
-              <a:t>Marcar en el sistema a pacientes con visitas recientes a urgencias.</a:t>
-            </a:r>
-            <a:br/>
-            <a:r>
-              <a:rPr sz="1300" b="0">
-                <a:solidFill>
-                  <a:srgbClr val="4A4A4A"/>
-                </a:solidFill>
-                <a:latin typeface="Helvetica"/>
-              </a:rPr>
-              <a:t>Son la señal temprana más confiable de recurrencia.</a:t>
-            </a:r>
-          </a:p>
-        </p:txBody>
-      </p:sp>
-      <p:sp>
-        <p:nvSpPr>
-          <p:cNvPr id="13" name="Rectangle 12"/>
-          <p:cNvSpPr/>
-          <p:nvPr/>
-        </p:nvSpPr>
-        <p:spPr>
-          <a:xfrm>
-            <a:off x="457200" y="4754880"/>
-            <a:ext cx="822960" cy="1371600"/>
-          </a:xfrm>
-          <a:prstGeom prst="rect">
-            <a:avLst/>
-          </a:prstGeom>
-          <a:solidFill>
-            <a:srgbClr val="6A9A4F"/>
-          </a:solidFill>
-          <a:ln>
-            <a:noFill/>
+                <a:latin typeface="Arial"/>
+              </a:rPr>
+              <a:t>pseudo R² del modelo Gamma</a:t>
+            </a:r>
+          </a:p>
+        </p:txBody>
+      </p:sp>
+      <p:sp>
+        <p:nvSpPr>
+          <p:cNvPr id="15" name="TextBox 14"/>
+          <p:cNvSpPr txBox="1"/>
+          <p:nvPr/>
+        </p:nvSpPr>
+        <p:spPr>
+          <a:xfrm>
+            <a:off x="7452360" y="3566160"/>
+            <a:ext cx="4206240" cy="457200"/>
+          </a:xfrm>
+          <a:prstGeom prst="rect">
+            <a:avLst/>
+          </a:prstGeom>
+          <a:noFill/>
+        </p:spPr>
+        <p:txBody>
+          <a:bodyPr wrap="square" anchor="t" lIns="0" rIns="0" tIns="0" bIns="0">
+            <a:spAutoFit/>
+          </a:bodyPr>
+          <a:lstStyle/>
+          <a:p>
+            <a:pPr algn="l"/>
+            <a:r>
+              <a:rPr sz="1100" b="0" i="0">
+                <a:solidFill>
+                  <a:srgbClr val="8E8E8E"/>
+                </a:solidFill>
+                <a:latin typeface="Arial"/>
+              </a:rPr>
+              <a:t>satisfactorio para datos clínicos administrativos</a:t>
+            </a:r>
+          </a:p>
+        </p:txBody>
+      </p:sp>
+      <p:sp>
+        <p:nvSpPr>
+          <p:cNvPr id="16" name="TextBox 15"/>
+          <p:cNvSpPr txBox="1"/>
+          <p:nvPr/>
+        </p:nvSpPr>
+        <p:spPr>
+          <a:xfrm>
+            <a:off x="7223760" y="4206240"/>
+            <a:ext cx="4572000" cy="365760"/>
+          </a:xfrm>
+          <a:prstGeom prst="rect">
+            <a:avLst/>
+          </a:prstGeom>
+          <a:noFill/>
+        </p:spPr>
+        <p:txBody>
+          <a:bodyPr wrap="square" anchor="t" lIns="0" rIns="0" tIns="0" bIns="0">
+            <a:spAutoFit/>
+          </a:bodyPr>
+          <a:lstStyle/>
+          <a:p>
+            <a:pPr algn="l"/>
+            <a:r>
+              <a:rPr sz="1200" b="1" i="0">
+                <a:solidFill>
+                  <a:srgbClr val="051C2C"/>
+                </a:solidFill>
+                <a:latin typeface="Arial"/>
+              </a:rPr>
+              <a:t>Factores principales</a:t>
+            </a:r>
+          </a:p>
+        </p:txBody>
+      </p:sp>
+      <p:cxnSp>
+        <p:nvCxnSpPr>
+          <p:cNvPr id="17" name="Connector 16"/>
+          <p:cNvCxnSpPr/>
+          <p:nvPr/>
+        </p:nvCxnSpPr>
+        <p:spPr>
+          <a:xfrm>
+            <a:off x="7223760" y="4526280"/>
+            <a:ext cx="4572000" cy="0"/>
+          </a:xfrm>
+          <a:prstGeom prst="line">
+            <a:avLst/>
+          </a:prstGeom>
+          <a:ln w="12700">
+            <a:solidFill>
+              <a:srgbClr val="051C2C"/>
+            </a:solidFill>
           </a:ln>
         </p:spPr>
         <p:style>
-          <a:lnRef idx="1">
+          <a:lnRef idx="2">
             <a:schemeClr val="accent1"/>
           </a:lnRef>
-          <a:fillRef idx="3">
+          <a:fillRef idx="0">
             <a:schemeClr val="accent1"/>
           </a:fillRef>
-          <a:effectRef idx="2">
+          <a:effectRef idx="1">
             <a:schemeClr val="accent1"/>
           </a:effectRef>
           <a:fontRef idx="minor">
-            <a:schemeClr val="lt1"/>
+            <a:schemeClr val="tx1"/>
           </a:fontRef>
         </p:style>
-        <p:txBody>
-          <a:bodyPr rtlCol="0" anchor="ctr"/>
-          <a:lstStyle/>
-          <a:p>
-            <a:pPr algn="ctr"/>
-          </a:p>
-        </p:txBody>
-      </p:sp>
-      <p:sp>
-        <p:nvSpPr>
-          <p:cNvPr id="14" name="TextBox 13"/>
-          <p:cNvSpPr txBox="1"/>
-          <p:nvPr/>
-        </p:nvSpPr>
-        <p:spPr>
-          <a:xfrm>
-            <a:off x="457200" y="4754880"/>
-            <a:ext cx="822960" cy="1371600"/>
-          </a:xfrm>
-          <a:prstGeom prst="rect">
-            <a:avLst/>
-          </a:prstGeom>
-          <a:noFill/>
-        </p:spPr>
-        <p:txBody>
-          <a:bodyPr wrap="square" anchor="ctr" lIns="0" rIns="0" tIns="0" bIns="0">
-            <a:spAutoFit/>
-          </a:bodyPr>
-          <a:lstStyle/>
-          <a:p>
-            <a:pPr algn="ctr"/>
-            <a:r>
-              <a:rPr sz="4800" b="1">
-                <a:solidFill>
-                  <a:srgbClr val="FFFFFF"/>
-                </a:solidFill>
-                <a:latin typeface="Helvetica"/>
-              </a:rPr>
-              <a:t>3</a:t>
-            </a:r>
-          </a:p>
-        </p:txBody>
-      </p:sp>
-      <p:sp>
-        <p:nvSpPr>
-          <p:cNvPr id="15" name="TextBox 14"/>
-          <p:cNvSpPr txBox="1"/>
-          <p:nvPr/>
-        </p:nvSpPr>
-        <p:spPr>
-          <a:xfrm>
-            <a:off x="1463040" y="4846320"/>
-            <a:ext cx="10515600" cy="457200"/>
-          </a:xfrm>
-          <a:prstGeom prst="rect">
-            <a:avLst/>
-          </a:prstGeom>
-          <a:noFill/>
-        </p:spPr>
-        <p:txBody>
-          <a:bodyPr wrap="square" anchor="t" lIns="0" rIns="0" tIns="0" bIns="0">
-            <a:spAutoFit/>
-          </a:bodyPr>
-          <a:lstStyle/>
-          <a:p>
-            <a:pPr algn="l"/>
-            <a:r>
-              <a:rPr sz="2000" b="1">
-                <a:solidFill>
-                  <a:srgbClr val="6A9A4F"/>
-                </a:solidFill>
-                <a:latin typeface="Helvetica"/>
-              </a:rPr>
-              <a:t>Planeación diferenciada de camas</a:t>
-            </a:r>
-          </a:p>
-        </p:txBody>
-      </p:sp>
-      <p:sp>
-        <p:nvSpPr>
-          <p:cNvPr id="16" name="TextBox 15"/>
-          <p:cNvSpPr txBox="1"/>
-          <p:nvPr/>
-        </p:nvSpPr>
-        <p:spPr>
-          <a:xfrm>
-            <a:off x="1463040" y="5394960"/>
-            <a:ext cx="10515600" cy="731520"/>
-          </a:xfrm>
-          <a:prstGeom prst="rect">
-            <a:avLst/>
-          </a:prstGeom>
-          <a:noFill/>
-        </p:spPr>
-        <p:txBody>
-          <a:bodyPr wrap="square" anchor="t" lIns="0" rIns="0" tIns="0" bIns="0">
-            <a:spAutoFit/>
-          </a:bodyPr>
-          <a:lstStyle/>
-          <a:p>
-            <a:pPr algn="l"/>
-            <a:r>
-              <a:rPr sz="1300" b="0">
+      </p:cxnSp>
+      <p:sp>
+        <p:nvSpPr>
+          <p:cNvPr id="18" name="TextBox 17"/>
+          <p:cNvSpPr txBox="1"/>
+          <p:nvPr/>
+        </p:nvSpPr>
+        <p:spPr>
+          <a:xfrm>
+            <a:off x="7223760" y="4663440"/>
+            <a:ext cx="4572000" cy="2194560"/>
+          </a:xfrm>
+          <a:prstGeom prst="rect">
+            <a:avLst/>
+          </a:prstGeom>
+          <a:noFill/>
+        </p:spPr>
+        <p:txBody>
+          <a:bodyPr wrap="square" lIns="0" rIns="0" tIns="0" bIns="0">
+            <a:spAutoFit/>
+          </a:bodyPr>
+          <a:lstStyle/>
+          <a:p>
+            <a:pPr>
+              <a:spcAft>
+                <a:spcPts val="400"/>
+              </a:spcAft>
+            </a:pPr>
+            <a:r>
+              <a:rPr sz="1200">
                 <a:solidFill>
                   <a:srgbClr val="4A4A4A"/>
                 </a:solidFill>
-                <a:latin typeface="Helvetica"/>
-              </a:rPr>
-              <a:t>Asignar mayor capacidad y tiempo de cama a pacientes con múltiples</a:t>
+                <a:latin typeface="Arial"/>
+              </a:rPr>
+              <a:t>— Cada diagnóstico adicional  +3 % de estancia</a:t>
+            </a:r>
+          </a:p>
+          <a:p>
+            <a:pPr>
+              <a:spcAft>
+                <a:spcPts val="400"/>
+              </a:spcAft>
+            </a:pPr>
+            <a:r>
+              <a:rPr sz="1200">
+                <a:solidFill>
+                  <a:srgbClr val="4A4A4A"/>
+                </a:solidFill>
+                <a:latin typeface="Arial"/>
+              </a:rPr>
+              <a:t>— Cada admisión previa  +3 % de estancia</a:t>
+            </a:r>
+          </a:p>
+          <a:p>
+            <a:pPr>
+              <a:spcAft>
+                <a:spcPts val="400"/>
+              </a:spcAft>
+            </a:pPr>
+            <a:r>
+              <a:rPr sz="1200">
+                <a:solidFill>
+                  <a:srgbClr val="4A4A4A"/>
+                </a:solidFill>
+                <a:latin typeface="Arial"/>
+              </a:rPr>
+              <a:t>— Categorías 'Otros' (+34 %), Neoplasmas (+29 %),</a:t>
             </a:r>
             <a:br/>
             <a:r>
-              <a:rPr sz="1300" b="0">
+              <a:rPr sz="1200">
                 <a:solidFill>
                   <a:srgbClr val="4A4A4A"/>
                 </a:solidFill>
-                <a:latin typeface="Helvetica"/>
-              </a:rPr>
-              <a:t>diagnósticos. La complejidad clínica predice la estancia esperada.</a:t>
-            </a:r>
-          </a:p>
-        </p:txBody>
-      </p:sp>
-      <p:sp>
-        <p:nvSpPr>
-          <p:cNvPr id="17" name="TextBox 16"/>
-          <p:cNvSpPr txBox="1"/>
-          <p:nvPr/>
-        </p:nvSpPr>
-        <p:spPr>
-          <a:xfrm>
-            <a:off x="457200" y="6492240"/>
-            <a:ext cx="7315200" cy="274320"/>
-          </a:xfrm>
-          <a:prstGeom prst="rect">
-            <a:avLst/>
-          </a:prstGeom>
-          <a:noFill/>
-        </p:spPr>
-        <p:txBody>
-          <a:bodyPr wrap="square" anchor="t" lIns="0" rIns="0" tIns="0" bIns="0">
-            <a:spAutoFit/>
-          </a:bodyPr>
-          <a:lstStyle/>
-          <a:p>
-            <a:pPr algn="l"/>
-            <a:r>
-              <a:rPr sz="900" b="0">
-                <a:solidFill>
-                  <a:srgbClr val="4A4A4A"/>
-                </a:solidFill>
-                <a:latin typeface="Helvetica"/>
-              </a:rPr>
-              <a:t>Proyecto Final · Analítica de Datos · Universidad Iberoamericana</a:t>
-            </a:r>
-          </a:p>
-        </p:txBody>
-      </p:sp>
-      <p:sp>
-        <p:nvSpPr>
-          <p:cNvPr id="18" name="TextBox 17"/>
-          <p:cNvSpPr txBox="1"/>
-          <p:nvPr/>
-        </p:nvSpPr>
-        <p:spPr>
-          <a:xfrm>
-            <a:off x="11277295" y="6492240"/>
-            <a:ext cx="457200" cy="274320"/>
-          </a:xfrm>
-          <a:prstGeom prst="rect">
-            <a:avLst/>
-          </a:prstGeom>
-          <a:noFill/>
-        </p:spPr>
-        <p:txBody>
-          <a:bodyPr wrap="square" anchor="t" lIns="0" rIns="0" tIns="0" bIns="0">
-            <a:spAutoFit/>
-          </a:bodyPr>
-          <a:lstStyle/>
-          <a:p>
-            <a:pPr algn="r"/>
-            <a:r>
-              <a:rPr sz="900" b="0">
-                <a:solidFill>
-                  <a:srgbClr val="4A4A4A"/>
-                </a:solidFill>
-                <a:latin typeface="Helvetica"/>
-              </a:rPr>
-              <a:t>8/9</a:t>
+                <a:latin typeface="Arial"/>
+              </a:rPr>
+              <a:t>Diabetes (+24 %) vs Circulatorio</a:t>
             </a:r>
           </a:p>
         </p:txBody>
@@ -7423,17 +9865,18 @@
         <p:spPr>
           <a:xfrm>
             <a:off x="0" y="0"/>
-            <a:ext cx="12191695" cy="6858000"/>
+            <a:ext cx="12191695" cy="73152"/>
           </a:xfrm>
           <a:prstGeom prst="rect">
             <a:avLst/>
           </a:prstGeom>
           <a:solidFill>
-            <a:srgbClr val="3B6AA0"/>
+            <a:srgbClr val="051C2C"/>
           </a:solidFill>
           <a:ln>
             <a:noFill/>
           </a:ln>
+          <a:effectLst/>
         </p:spPr>
         <p:style>
           <a:lnRef idx="1">
@@ -7459,24 +9902,235 @@
       </p:sp>
       <p:sp>
         <p:nvSpPr>
-          <p:cNvPr id="3" name="Rectangle 2"/>
+          <p:cNvPr id="3" name="TextBox 2"/>
+          <p:cNvSpPr txBox="1"/>
+          <p:nvPr/>
+        </p:nvSpPr>
+        <p:spPr>
+          <a:xfrm>
+            <a:off x="457200" y="274320"/>
+            <a:ext cx="11277295" cy="274320"/>
+          </a:xfrm>
+          <a:prstGeom prst="rect">
+            <a:avLst/>
+          </a:prstGeom>
+          <a:noFill/>
+        </p:spPr>
+        <p:txBody>
+          <a:bodyPr wrap="square" anchor="t" lIns="0" rIns="0" tIns="0" bIns="0">
+            <a:spAutoFit/>
+          </a:bodyPr>
+          <a:lstStyle/>
+          <a:p>
+            <a:pPr algn="l"/>
+            <a:r>
+              <a:rPr sz="1000" b="1" i="0">
+                <a:solidFill>
+                  <a:srgbClr val="8E8E8E"/>
+                </a:solidFill>
+                <a:latin typeface="Arial"/>
+              </a:rPr>
+              <a:t>RECOMENDACIONES</a:t>
+            </a:r>
+          </a:p>
+        </p:txBody>
+      </p:sp>
+      <p:sp>
+        <p:nvSpPr>
+          <p:cNvPr id="4" name="TextBox 3"/>
+          <p:cNvSpPr txBox="1"/>
+          <p:nvPr/>
+        </p:nvSpPr>
+        <p:spPr>
+          <a:xfrm>
+            <a:off x="457200" y="548640"/>
+            <a:ext cx="11277295" cy="822960"/>
+          </a:xfrm>
+          <a:prstGeom prst="rect">
+            <a:avLst/>
+          </a:prstGeom>
+          <a:noFill/>
+        </p:spPr>
+        <p:txBody>
+          <a:bodyPr wrap="square" anchor="t" lIns="0" rIns="0" tIns="0" bIns="0">
+            <a:spAutoFit/>
+          </a:bodyPr>
+          <a:lstStyle/>
+          <a:p>
+            <a:pPr algn="l"/>
+            <a:r>
+              <a:rPr sz="2200" b="1" i="0">
+                <a:solidFill>
+                  <a:srgbClr val="051C2C"/>
+                </a:solidFill>
+                <a:latin typeface="Arial"/>
+              </a:rPr>
+              <a:t>Tres acciones operativas se desprenden directamente de los hallazgos</a:t>
+            </a:r>
+          </a:p>
+        </p:txBody>
+      </p:sp>
+      <p:cxnSp>
+        <p:nvCxnSpPr>
+          <p:cNvPr id="5" name="Connector 4"/>
+          <p:cNvCxnSpPr/>
+          <p:nvPr/>
+        </p:nvCxnSpPr>
+        <p:spPr>
+          <a:xfrm>
+            <a:off x="457200" y="1417320"/>
+            <a:ext cx="11277295" cy="0"/>
+          </a:xfrm>
+          <a:prstGeom prst="line">
+            <a:avLst/>
+          </a:prstGeom>
+          <a:ln w="9525">
+            <a:solidFill>
+              <a:srgbClr val="E1E1E1"/>
+            </a:solidFill>
+          </a:ln>
+        </p:spPr>
+        <p:style>
+          <a:lnRef idx="2">
+            <a:schemeClr val="accent1"/>
+          </a:lnRef>
+          <a:fillRef idx="0">
+            <a:schemeClr val="accent1"/>
+          </a:fillRef>
+          <a:effectRef idx="1">
+            <a:schemeClr val="accent1"/>
+          </a:effectRef>
+          <a:fontRef idx="minor">
+            <a:schemeClr val="tx1"/>
+          </a:fontRef>
+        </p:style>
+      </p:cxnSp>
+      <p:cxnSp>
+        <p:nvCxnSpPr>
+          <p:cNvPr id="6" name="Connector 5"/>
+          <p:cNvCxnSpPr/>
+          <p:nvPr/>
+        </p:nvCxnSpPr>
+        <p:spPr>
+          <a:xfrm>
+            <a:off x="457200" y="6446520"/>
+            <a:ext cx="11277295" cy="0"/>
+          </a:xfrm>
+          <a:prstGeom prst="line">
+            <a:avLst/>
+          </a:prstGeom>
+          <a:ln w="9525">
+            <a:solidFill>
+              <a:srgbClr val="E1E1E1"/>
+            </a:solidFill>
+          </a:ln>
+        </p:spPr>
+        <p:style>
+          <a:lnRef idx="2">
+            <a:schemeClr val="accent1"/>
+          </a:lnRef>
+          <a:fillRef idx="0">
+            <a:schemeClr val="accent1"/>
+          </a:fillRef>
+          <a:effectRef idx="1">
+            <a:schemeClr val="accent1"/>
+          </a:effectRef>
+          <a:fontRef idx="minor">
+            <a:schemeClr val="tx1"/>
+          </a:fontRef>
+        </p:style>
+      </p:cxnSp>
+      <p:sp>
+        <p:nvSpPr>
+          <p:cNvPr id="7" name="TextBox 6"/>
+          <p:cNvSpPr txBox="1"/>
+          <p:nvPr/>
+        </p:nvSpPr>
+        <p:spPr>
+          <a:xfrm>
+            <a:off x="457200" y="6537960"/>
+            <a:ext cx="10058400" cy="228600"/>
+          </a:xfrm>
+          <a:prstGeom prst="rect">
+            <a:avLst/>
+          </a:prstGeom>
+          <a:noFill/>
+        </p:spPr>
+        <p:txBody>
+          <a:bodyPr wrap="square" anchor="t" lIns="0" rIns="0" tIns="0" bIns="0">
+            <a:spAutoFit/>
+          </a:bodyPr>
+          <a:lstStyle/>
+          <a:p>
+            <a:pPr algn="l"/>
+            <a:r>
+              <a:rPr sz="800" b="0" i="1">
+                <a:solidFill>
+                  <a:srgbClr val="8E8E8E"/>
+                </a:solidFill>
+                <a:latin typeface="Arial"/>
+              </a:rPr>
+              <a:t>Fuente: análisis del equipo basado en Diabetes 130-Hospitals (UCI, n=69,970)</a:t>
+            </a:r>
+          </a:p>
+        </p:txBody>
+      </p:sp>
+      <p:sp>
+        <p:nvSpPr>
+          <p:cNvPr id="8" name="TextBox 7"/>
+          <p:cNvSpPr txBox="1"/>
+          <p:nvPr/>
+        </p:nvSpPr>
+        <p:spPr>
+          <a:xfrm>
+            <a:off x="11551615" y="6537960"/>
+            <a:ext cx="274320" cy="228600"/>
+          </a:xfrm>
+          <a:prstGeom prst="rect">
+            <a:avLst/>
+          </a:prstGeom>
+          <a:noFill/>
+        </p:spPr>
+        <p:txBody>
+          <a:bodyPr wrap="square" anchor="t" lIns="0" rIns="0" tIns="0" bIns="0">
+            <a:spAutoFit/>
+          </a:bodyPr>
+          <a:lstStyle/>
+          <a:p>
+            <a:pPr algn="r"/>
+            <a:r>
+              <a:rPr sz="900" b="0" i="0">
+                <a:solidFill>
+                  <a:srgbClr val="8E8E8E"/>
+                </a:solidFill>
+                <a:latin typeface="Arial"/>
+              </a:rPr>
+              <a:t>9</a:t>
+            </a:r>
+          </a:p>
+        </p:txBody>
+      </p:sp>
+      <p:sp>
+        <p:nvSpPr>
+          <p:cNvPr id="9" name="Rectangle 8"/>
           <p:cNvSpPr/>
           <p:nvPr/>
         </p:nvSpPr>
         <p:spPr>
           <a:xfrm>
-            <a:off x="0" y="2194560"/>
-            <a:ext cx="12191695" cy="73152"/>
+            <a:off x="457200" y="1737360"/>
+            <a:ext cx="640080" cy="1417320"/>
           </a:xfrm>
           <a:prstGeom prst="rect">
             <a:avLst/>
           </a:prstGeom>
           <a:solidFill>
-            <a:srgbClr val="B3582D"/>
+            <a:srgbClr val="051C2C"/>
           </a:solidFill>
           <a:ln>
             <a:noFill/>
           </a:ln>
+          <a:effectLst/>
         </p:spPr>
         <p:style>
           <a:lnRef idx="1">
@@ -7502,14 +10156,95 @@
       </p:sp>
       <p:sp>
         <p:nvSpPr>
-          <p:cNvPr id="4" name="TextBox 3"/>
-          <p:cNvSpPr txBox="1"/>
-          <p:nvPr/>
-        </p:nvSpPr>
-        <p:spPr>
-          <a:xfrm>
-            <a:off x="731520" y="731520"/>
-            <a:ext cx="10728655" cy="731520"/>
+          <p:cNvPr id="10" name="TextBox 9"/>
+          <p:cNvSpPr txBox="1"/>
+          <p:nvPr/>
+        </p:nvSpPr>
+        <p:spPr>
+          <a:xfrm>
+            <a:off x="457200" y="1737360"/>
+            <a:ext cx="640080" cy="1417320"/>
+          </a:xfrm>
+          <a:prstGeom prst="rect">
+            <a:avLst/>
+          </a:prstGeom>
+          <a:noFill/>
+        </p:spPr>
+        <p:txBody>
+          <a:bodyPr wrap="square" anchor="ctr" lIns="0" rIns="0" tIns="0" bIns="0">
+            <a:spAutoFit/>
+          </a:bodyPr>
+          <a:lstStyle/>
+          <a:p>
+            <a:pPr algn="ctr"/>
+            <a:r>
+              <a:rPr sz="3600" b="1" i="0">
+                <a:solidFill>
+                  <a:srgbClr val="FFFFFF"/>
+                </a:solidFill>
+                <a:latin typeface="Arial"/>
+              </a:rPr>
+              <a:t>1</a:t>
+            </a:r>
+          </a:p>
+        </p:txBody>
+      </p:sp>
+      <p:sp>
+        <p:nvSpPr>
+          <p:cNvPr id="11" name="Rectangle 10"/>
+          <p:cNvSpPr/>
+          <p:nvPr/>
+        </p:nvSpPr>
+        <p:spPr>
+          <a:xfrm>
+            <a:off x="1188720" y="1737360"/>
+            <a:ext cx="8778240" cy="1417320"/>
+          </a:xfrm>
+          <a:prstGeom prst="rect">
+            <a:avLst/>
+          </a:prstGeom>
+          <a:solidFill>
+            <a:srgbClr val="FFFFFF"/>
+          </a:solidFill>
+          <a:ln w="6350">
+            <a:solidFill>
+              <a:srgbClr val="E1E1E1"/>
+            </a:solidFill>
+          </a:ln>
+          <a:effectLst/>
+        </p:spPr>
+        <p:style>
+          <a:lnRef idx="1">
+            <a:schemeClr val="accent1"/>
+          </a:lnRef>
+          <a:fillRef idx="3">
+            <a:schemeClr val="accent1"/>
+          </a:fillRef>
+          <a:effectRef idx="2">
+            <a:schemeClr val="accent1"/>
+          </a:effectRef>
+          <a:fontRef idx="minor">
+            <a:schemeClr val="lt1"/>
+          </a:fontRef>
+        </p:style>
+        <p:txBody>
+          <a:bodyPr rtlCol="0" anchor="ctr"/>
+          <a:lstStyle/>
+          <a:p>
+            <a:pPr algn="ctr"/>
+          </a:p>
+        </p:txBody>
+      </p:sp>
+      <p:sp>
+        <p:nvSpPr>
+          <p:cNvPr id="12" name="TextBox 11"/>
+          <p:cNvSpPr txBox="1"/>
+          <p:nvPr/>
+        </p:nvSpPr>
+        <p:spPr>
+          <a:xfrm>
+            <a:off x="1371600" y="1828800"/>
+            <a:ext cx="8503920" cy="365760"/>
           </a:xfrm>
           <a:prstGeom prst="rect">
             <a:avLst/>
@@ -7524,27 +10259,348 @@
           <a:p>
             <a:pPr algn="l"/>
             <a:r>
-              <a:rPr sz="2400" b="0">
+              <a:rPr sz="1400" b="1" i="0">
+                <a:solidFill>
+                  <a:srgbClr val="051C2C"/>
+                </a:solidFill>
+                <a:latin typeface="Arial"/>
+              </a:rPr>
+              <a:t>Programa de seguimiento al alta para pacientes con historial previo</a:t>
+            </a:r>
+          </a:p>
+        </p:txBody>
+      </p:sp>
+      <p:sp>
+        <p:nvSpPr>
+          <p:cNvPr id="13" name="TextBox 12"/>
+          <p:cNvSpPr txBox="1"/>
+          <p:nvPr/>
+        </p:nvSpPr>
+        <p:spPr>
+          <a:xfrm>
+            <a:off x="1371600" y="2240280"/>
+            <a:ext cx="8503920" cy="365760"/>
+          </a:xfrm>
+          <a:prstGeom prst="rect">
+            <a:avLst/>
+          </a:prstGeom>
+          <a:noFill/>
+        </p:spPr>
+        <p:txBody>
+          <a:bodyPr wrap="square" anchor="t" lIns="0" rIns="0" tIns="0" bIns="0">
+            <a:spAutoFit/>
+          </a:bodyPr>
+          <a:lstStyle/>
+          <a:p>
+            <a:pPr algn="l"/>
+            <a:r>
+              <a:rPr sz="1100" b="0" i="0">
+                <a:solidFill>
+                  <a:srgbClr val="4A4A4A"/>
+                </a:solidFill>
+                <a:latin typeface="Arial"/>
+              </a:rPr>
+              <a:t>Acción · Llamada de seguimiento a las 72 horas y cita ambulatoria dentro de 7 días</a:t>
+            </a:r>
+          </a:p>
+        </p:txBody>
+      </p:sp>
+      <p:sp>
+        <p:nvSpPr>
+          <p:cNvPr id="14" name="TextBox 13"/>
+          <p:cNvSpPr txBox="1"/>
+          <p:nvPr/>
+        </p:nvSpPr>
+        <p:spPr>
+          <a:xfrm>
+            <a:off x="1371600" y="2606039"/>
+            <a:ext cx="8503920" cy="365760"/>
+          </a:xfrm>
+          <a:prstGeom prst="rect">
+            <a:avLst/>
+          </a:prstGeom>
+          <a:noFill/>
+        </p:spPr>
+        <p:txBody>
+          <a:bodyPr wrap="square" anchor="t" lIns="0" rIns="0" tIns="0" bIns="0">
+            <a:spAutoFit/>
+          </a:bodyPr>
+          <a:lstStyle/>
+          <a:p>
+            <a:pPr algn="l"/>
+            <a:r>
+              <a:rPr sz="1100" b="0" i="1">
+                <a:solidFill>
+                  <a:srgbClr val="8E8E8E"/>
+                </a:solidFill>
+                <a:latin typeface="Arial"/>
+              </a:rPr>
+              <a:t>Soporte · Reduce el predictor más fuerte de readmisión</a:t>
+            </a:r>
+          </a:p>
+        </p:txBody>
+      </p:sp>
+      <p:sp>
+        <p:nvSpPr>
+          <p:cNvPr id="15" name="Rectangle 14"/>
+          <p:cNvSpPr/>
+          <p:nvPr/>
+        </p:nvSpPr>
+        <p:spPr>
+          <a:xfrm>
+            <a:off x="10058400" y="1737360"/>
+            <a:ext cx="1691640" cy="1417320"/>
+          </a:xfrm>
+          <a:prstGeom prst="rect">
+            <a:avLst/>
+          </a:prstGeom>
+          <a:solidFill>
+            <a:srgbClr val="FE5000"/>
+          </a:solidFill>
+          <a:ln>
+            <a:noFill/>
+          </a:ln>
+          <a:effectLst/>
+        </p:spPr>
+        <p:style>
+          <a:lnRef idx="1">
+            <a:schemeClr val="accent1"/>
+          </a:lnRef>
+          <a:fillRef idx="3">
+            <a:schemeClr val="accent1"/>
+          </a:fillRef>
+          <a:effectRef idx="2">
+            <a:schemeClr val="accent1"/>
+          </a:effectRef>
+          <a:fontRef idx="minor">
+            <a:schemeClr val="lt1"/>
+          </a:fontRef>
+        </p:style>
+        <p:txBody>
+          <a:bodyPr rtlCol="0" anchor="ctr"/>
+          <a:lstStyle/>
+          <a:p>
+            <a:pPr algn="ctr"/>
+          </a:p>
+        </p:txBody>
+      </p:sp>
+      <p:sp>
+        <p:nvSpPr>
+          <p:cNvPr id="16" name="TextBox 15"/>
+          <p:cNvSpPr txBox="1"/>
+          <p:nvPr/>
+        </p:nvSpPr>
+        <p:spPr>
+          <a:xfrm>
+            <a:off x="10058400" y="1874519"/>
+            <a:ext cx="1691640" cy="457200"/>
+          </a:xfrm>
+          <a:prstGeom prst="rect">
+            <a:avLst/>
+          </a:prstGeom>
+          <a:noFill/>
+        </p:spPr>
+        <p:txBody>
+          <a:bodyPr wrap="square" anchor="t" lIns="0" rIns="0" tIns="0" bIns="0">
+            <a:spAutoFit/>
+          </a:bodyPr>
+          <a:lstStyle/>
+          <a:p>
+            <a:pPr algn="ctr"/>
+            <a:r>
+              <a:rPr sz="800" b="1" i="0">
                 <a:solidFill>
                   <a:srgbClr val="FFFFFF"/>
                 </a:solidFill>
-                <a:latin typeface="Helvetica"/>
-              </a:rPr>
-              <a:t>El patrón común</a:t>
-            </a:r>
-          </a:p>
-        </p:txBody>
-      </p:sp>
-      <p:sp>
-        <p:nvSpPr>
-          <p:cNvPr id="5" name="TextBox 4"/>
-          <p:cNvSpPr txBox="1"/>
-          <p:nvPr/>
-        </p:nvSpPr>
-        <p:spPr>
-          <a:xfrm>
-            <a:off x="731520" y="2468880"/>
-            <a:ext cx="10728655" cy="2286000"/>
+                <a:latin typeface="Arial"/>
+              </a:rPr>
+              <a:t>IMPACTO</a:t>
+            </a:r>
+          </a:p>
+          <a:p>
+            <a:pPr algn="ctr"/>
+            <a:r>
+              <a:rPr sz="800" b="1" i="0">
+                <a:solidFill>
+                  <a:srgbClr val="FFFFFF"/>
+                </a:solidFill>
+                <a:latin typeface="Arial"/>
+              </a:rPr>
+              <a:t>ESPERADO</a:t>
+            </a:r>
+          </a:p>
+        </p:txBody>
+      </p:sp>
+      <p:sp>
+        <p:nvSpPr>
+          <p:cNvPr id="17" name="TextBox 16"/>
+          <p:cNvSpPr txBox="1"/>
+          <p:nvPr/>
+        </p:nvSpPr>
+        <p:spPr>
+          <a:xfrm>
+            <a:off x="10058400" y="2286000"/>
+            <a:ext cx="1691640" cy="640080"/>
+          </a:xfrm>
+          <a:prstGeom prst="rect">
+            <a:avLst/>
+          </a:prstGeom>
+          <a:noFill/>
+        </p:spPr>
+        <p:txBody>
+          <a:bodyPr wrap="square" anchor="ctr" lIns="0" rIns="0" tIns="0" bIns="0">
+            <a:spAutoFit/>
+          </a:bodyPr>
+          <a:lstStyle/>
+          <a:p>
+            <a:pPr algn="ctr"/>
+            <a:r>
+              <a:rPr sz="2200" b="1" i="0">
+                <a:solidFill>
+                  <a:srgbClr val="FFFFFF"/>
+                </a:solidFill>
+                <a:latin typeface="Arial"/>
+              </a:rPr>
+              <a:t>ALTO</a:t>
+            </a:r>
+          </a:p>
+        </p:txBody>
+      </p:sp>
+      <p:sp>
+        <p:nvSpPr>
+          <p:cNvPr id="18" name="Rectangle 17"/>
+          <p:cNvSpPr/>
+          <p:nvPr/>
+        </p:nvSpPr>
+        <p:spPr>
+          <a:xfrm>
+            <a:off x="457200" y="3291839"/>
+            <a:ext cx="640080" cy="1417320"/>
+          </a:xfrm>
+          <a:prstGeom prst="rect">
+            <a:avLst/>
+          </a:prstGeom>
+          <a:solidFill>
+            <a:srgbClr val="051C2C"/>
+          </a:solidFill>
+          <a:ln>
+            <a:noFill/>
+          </a:ln>
+          <a:effectLst/>
+        </p:spPr>
+        <p:style>
+          <a:lnRef idx="1">
+            <a:schemeClr val="accent1"/>
+          </a:lnRef>
+          <a:fillRef idx="3">
+            <a:schemeClr val="accent1"/>
+          </a:fillRef>
+          <a:effectRef idx="2">
+            <a:schemeClr val="accent1"/>
+          </a:effectRef>
+          <a:fontRef idx="minor">
+            <a:schemeClr val="lt1"/>
+          </a:fontRef>
+        </p:style>
+        <p:txBody>
+          <a:bodyPr rtlCol="0" anchor="ctr"/>
+          <a:lstStyle/>
+          <a:p>
+            <a:pPr algn="ctr"/>
+          </a:p>
+        </p:txBody>
+      </p:sp>
+      <p:sp>
+        <p:nvSpPr>
+          <p:cNvPr id="19" name="TextBox 18"/>
+          <p:cNvSpPr txBox="1"/>
+          <p:nvPr/>
+        </p:nvSpPr>
+        <p:spPr>
+          <a:xfrm>
+            <a:off x="457200" y="3291839"/>
+            <a:ext cx="640080" cy="1417320"/>
+          </a:xfrm>
+          <a:prstGeom prst="rect">
+            <a:avLst/>
+          </a:prstGeom>
+          <a:noFill/>
+        </p:spPr>
+        <p:txBody>
+          <a:bodyPr wrap="square" anchor="ctr" lIns="0" rIns="0" tIns="0" bIns="0">
+            <a:spAutoFit/>
+          </a:bodyPr>
+          <a:lstStyle/>
+          <a:p>
+            <a:pPr algn="ctr"/>
+            <a:r>
+              <a:rPr sz="3600" b="1" i="0">
+                <a:solidFill>
+                  <a:srgbClr val="FFFFFF"/>
+                </a:solidFill>
+                <a:latin typeface="Arial"/>
+              </a:rPr>
+              <a:t>2</a:t>
+            </a:r>
+          </a:p>
+        </p:txBody>
+      </p:sp>
+      <p:sp>
+        <p:nvSpPr>
+          <p:cNvPr id="20" name="Rectangle 19"/>
+          <p:cNvSpPr/>
+          <p:nvPr/>
+        </p:nvSpPr>
+        <p:spPr>
+          <a:xfrm>
+            <a:off x="1188720" y="3291839"/>
+            <a:ext cx="8778240" cy="1417320"/>
+          </a:xfrm>
+          <a:prstGeom prst="rect">
+            <a:avLst/>
+          </a:prstGeom>
+          <a:solidFill>
+            <a:srgbClr val="FFFFFF"/>
+          </a:solidFill>
+          <a:ln w="6350">
+            <a:solidFill>
+              <a:srgbClr val="E1E1E1"/>
+            </a:solidFill>
+          </a:ln>
+          <a:effectLst/>
+        </p:spPr>
+        <p:style>
+          <a:lnRef idx="1">
+            <a:schemeClr val="accent1"/>
+          </a:lnRef>
+          <a:fillRef idx="3">
+            <a:schemeClr val="accent1"/>
+          </a:fillRef>
+          <a:effectRef idx="2">
+            <a:schemeClr val="accent1"/>
+          </a:effectRef>
+          <a:fontRef idx="minor">
+            <a:schemeClr val="lt1"/>
+          </a:fontRef>
+        </p:style>
+        <p:txBody>
+          <a:bodyPr rtlCol="0" anchor="ctr"/>
+          <a:lstStyle/>
+          <a:p>
+            <a:pPr algn="ctr"/>
+          </a:p>
+        </p:txBody>
+      </p:sp>
+      <p:sp>
+        <p:nvSpPr>
+          <p:cNvPr id="21" name="TextBox 20"/>
+          <p:cNvSpPr txBox="1"/>
+          <p:nvPr/>
+        </p:nvSpPr>
+        <p:spPr>
+          <a:xfrm>
+            <a:off x="1371600" y="3383279"/>
+            <a:ext cx="8503920" cy="365760"/>
           </a:xfrm>
           <a:prstGeom prst="rect">
             <a:avLst/>
@@ -7559,47 +10615,348 @@
           <a:p>
             <a:pPr algn="l"/>
             <a:r>
-              <a:rPr sz="3600" b="1">
+              <a:rPr sz="1400" b="1" i="0">
+                <a:solidFill>
+                  <a:srgbClr val="051C2C"/>
+                </a:solidFill>
+                <a:latin typeface="Arial"/>
+              </a:rPr>
+              <a:t>Marcar visitas previas a urgencias como bandera roja en el sistema</a:t>
+            </a:r>
+          </a:p>
+        </p:txBody>
+      </p:sp>
+      <p:sp>
+        <p:nvSpPr>
+          <p:cNvPr id="22" name="TextBox 21"/>
+          <p:cNvSpPr txBox="1"/>
+          <p:nvPr/>
+        </p:nvSpPr>
+        <p:spPr>
+          <a:xfrm>
+            <a:off x="1371600" y="3794759"/>
+            <a:ext cx="8503920" cy="365760"/>
+          </a:xfrm>
+          <a:prstGeom prst="rect">
+            <a:avLst/>
+          </a:prstGeom>
+          <a:noFill/>
+        </p:spPr>
+        <p:txBody>
+          <a:bodyPr wrap="square" anchor="t" lIns="0" rIns="0" tIns="0" bIns="0">
+            <a:spAutoFit/>
+          </a:bodyPr>
+          <a:lstStyle/>
+          <a:p>
+            <a:pPr algn="l"/>
+            <a:r>
+              <a:rPr sz="1100" b="0" i="0">
+                <a:solidFill>
+                  <a:srgbClr val="4A4A4A"/>
+                </a:solidFill>
+                <a:latin typeface="Arial"/>
+              </a:rPr>
+              <a:t>Acción · Alerta automatizada al equipo de alta cuando el paciente tiene visitas recientes</a:t>
+            </a:r>
+          </a:p>
+        </p:txBody>
+      </p:sp>
+      <p:sp>
+        <p:nvSpPr>
+          <p:cNvPr id="23" name="TextBox 22"/>
+          <p:cNvSpPr txBox="1"/>
+          <p:nvPr/>
+        </p:nvSpPr>
+        <p:spPr>
+          <a:xfrm>
+            <a:off x="1371600" y="4160520"/>
+            <a:ext cx="8503920" cy="365760"/>
+          </a:xfrm>
+          <a:prstGeom prst="rect">
+            <a:avLst/>
+          </a:prstGeom>
+          <a:noFill/>
+        </p:spPr>
+        <p:txBody>
+          <a:bodyPr wrap="square" anchor="t" lIns="0" rIns="0" tIns="0" bIns="0">
+            <a:spAutoFit/>
+          </a:bodyPr>
+          <a:lstStyle/>
+          <a:p>
+            <a:pPr algn="l"/>
+            <a:r>
+              <a:rPr sz="1100" b="0" i="1">
+                <a:solidFill>
+                  <a:srgbClr val="8E8E8E"/>
+                </a:solidFill>
+                <a:latin typeface="Arial"/>
+              </a:rPr>
+              <a:t>Soporte · Las urgencias son la señal más temprana de recurrencia</a:t>
+            </a:r>
+          </a:p>
+        </p:txBody>
+      </p:sp>
+      <p:sp>
+        <p:nvSpPr>
+          <p:cNvPr id="24" name="Rectangle 23"/>
+          <p:cNvSpPr/>
+          <p:nvPr/>
+        </p:nvSpPr>
+        <p:spPr>
+          <a:xfrm>
+            <a:off x="10058400" y="3291839"/>
+            <a:ext cx="1691640" cy="1417320"/>
+          </a:xfrm>
+          <a:prstGeom prst="rect">
+            <a:avLst/>
+          </a:prstGeom>
+          <a:solidFill>
+            <a:srgbClr val="FE5000"/>
+          </a:solidFill>
+          <a:ln>
+            <a:noFill/>
+          </a:ln>
+          <a:effectLst/>
+        </p:spPr>
+        <p:style>
+          <a:lnRef idx="1">
+            <a:schemeClr val="accent1"/>
+          </a:lnRef>
+          <a:fillRef idx="3">
+            <a:schemeClr val="accent1"/>
+          </a:fillRef>
+          <a:effectRef idx="2">
+            <a:schemeClr val="accent1"/>
+          </a:effectRef>
+          <a:fontRef idx="minor">
+            <a:schemeClr val="lt1"/>
+          </a:fontRef>
+        </p:style>
+        <p:txBody>
+          <a:bodyPr rtlCol="0" anchor="ctr"/>
+          <a:lstStyle/>
+          <a:p>
+            <a:pPr algn="ctr"/>
+          </a:p>
+        </p:txBody>
+      </p:sp>
+      <p:sp>
+        <p:nvSpPr>
+          <p:cNvPr id="25" name="TextBox 24"/>
+          <p:cNvSpPr txBox="1"/>
+          <p:nvPr/>
+        </p:nvSpPr>
+        <p:spPr>
+          <a:xfrm>
+            <a:off x="10058400" y="3428999"/>
+            <a:ext cx="1691640" cy="457200"/>
+          </a:xfrm>
+          <a:prstGeom prst="rect">
+            <a:avLst/>
+          </a:prstGeom>
+          <a:noFill/>
+        </p:spPr>
+        <p:txBody>
+          <a:bodyPr wrap="square" anchor="t" lIns="0" rIns="0" tIns="0" bIns="0">
+            <a:spAutoFit/>
+          </a:bodyPr>
+          <a:lstStyle/>
+          <a:p>
+            <a:pPr algn="ctr"/>
+            <a:r>
+              <a:rPr sz="800" b="1" i="0">
                 <a:solidFill>
                   <a:srgbClr val="FFFFFF"/>
                 </a:solidFill>
-                <a:latin typeface="Helvetica"/>
-              </a:rPr>
-              <a:t>Los pacientes con</a:t>
-            </a:r>
-            <a:br/>
-            <a:r>
-              <a:rPr sz="3600" b="1">
+                <a:latin typeface="Arial"/>
+              </a:rPr>
+              <a:t>IMPACTO</a:t>
+            </a:r>
+          </a:p>
+          <a:p>
+            <a:pPr algn="ctr"/>
+            <a:r>
+              <a:rPr sz="800" b="1" i="0">
                 <a:solidFill>
                   <a:srgbClr val="FFFFFF"/>
                 </a:solidFill>
-                <a:latin typeface="Helvetica"/>
-              </a:rPr>
-              <a:t>mayor historia de uso hospitalario</a:t>
-            </a:r>
-            <a:br/>
-            <a:r>
-              <a:rPr sz="3600" b="1">
+                <a:latin typeface="Arial"/>
+              </a:rPr>
+              <a:t>ESPERADO</a:t>
+            </a:r>
+          </a:p>
+        </p:txBody>
+      </p:sp>
+      <p:sp>
+        <p:nvSpPr>
+          <p:cNvPr id="26" name="TextBox 25"/>
+          <p:cNvSpPr txBox="1"/>
+          <p:nvPr/>
+        </p:nvSpPr>
+        <p:spPr>
+          <a:xfrm>
+            <a:off x="10058400" y="3840479"/>
+            <a:ext cx="1691640" cy="640080"/>
+          </a:xfrm>
+          <a:prstGeom prst="rect">
+            <a:avLst/>
+          </a:prstGeom>
+          <a:noFill/>
+        </p:spPr>
+        <p:txBody>
+          <a:bodyPr wrap="square" anchor="ctr" lIns="0" rIns="0" tIns="0" bIns="0">
+            <a:spAutoFit/>
+          </a:bodyPr>
+          <a:lstStyle/>
+          <a:p>
+            <a:pPr algn="ctr"/>
+            <a:r>
+              <a:rPr sz="2200" b="1" i="0">
                 <a:solidFill>
                   <a:srgbClr val="FFFFFF"/>
                 </a:solidFill>
-                <a:latin typeface="Helvetica"/>
-              </a:rPr>
-              <a:t>y mayor complejidad clínica</a:t>
-            </a:r>
-          </a:p>
-        </p:txBody>
-      </p:sp>
-      <p:sp>
-        <p:nvSpPr>
-          <p:cNvPr id="6" name="TextBox 5"/>
-          <p:cNvSpPr txBox="1"/>
-          <p:nvPr/>
-        </p:nvSpPr>
-        <p:spPr>
-          <a:xfrm>
-            <a:off x="731520" y="4572000"/>
-            <a:ext cx="10728655" cy="640080"/>
+                <a:latin typeface="Arial"/>
+              </a:rPr>
+              <a:t>ALTO</a:t>
+            </a:r>
+          </a:p>
+        </p:txBody>
+      </p:sp>
+      <p:sp>
+        <p:nvSpPr>
+          <p:cNvPr id="27" name="Rectangle 26"/>
+          <p:cNvSpPr/>
+          <p:nvPr/>
+        </p:nvSpPr>
+        <p:spPr>
+          <a:xfrm>
+            <a:off x="457200" y="4846320"/>
+            <a:ext cx="640080" cy="1417320"/>
+          </a:xfrm>
+          <a:prstGeom prst="rect">
+            <a:avLst/>
+          </a:prstGeom>
+          <a:solidFill>
+            <a:srgbClr val="051C2C"/>
+          </a:solidFill>
+          <a:ln>
+            <a:noFill/>
+          </a:ln>
+          <a:effectLst/>
+        </p:spPr>
+        <p:style>
+          <a:lnRef idx="1">
+            <a:schemeClr val="accent1"/>
+          </a:lnRef>
+          <a:fillRef idx="3">
+            <a:schemeClr val="accent1"/>
+          </a:fillRef>
+          <a:effectRef idx="2">
+            <a:schemeClr val="accent1"/>
+          </a:effectRef>
+          <a:fontRef idx="minor">
+            <a:schemeClr val="lt1"/>
+          </a:fontRef>
+        </p:style>
+        <p:txBody>
+          <a:bodyPr rtlCol="0" anchor="ctr"/>
+          <a:lstStyle/>
+          <a:p>
+            <a:pPr algn="ctr"/>
+          </a:p>
+        </p:txBody>
+      </p:sp>
+      <p:sp>
+        <p:nvSpPr>
+          <p:cNvPr id="28" name="TextBox 27"/>
+          <p:cNvSpPr txBox="1"/>
+          <p:nvPr/>
+        </p:nvSpPr>
+        <p:spPr>
+          <a:xfrm>
+            <a:off x="457200" y="4846320"/>
+            <a:ext cx="640080" cy="1417320"/>
+          </a:xfrm>
+          <a:prstGeom prst="rect">
+            <a:avLst/>
+          </a:prstGeom>
+          <a:noFill/>
+        </p:spPr>
+        <p:txBody>
+          <a:bodyPr wrap="square" anchor="ctr" lIns="0" rIns="0" tIns="0" bIns="0">
+            <a:spAutoFit/>
+          </a:bodyPr>
+          <a:lstStyle/>
+          <a:p>
+            <a:pPr algn="ctr"/>
+            <a:r>
+              <a:rPr sz="3600" b="1" i="0">
+                <a:solidFill>
+                  <a:srgbClr val="FFFFFF"/>
+                </a:solidFill>
+                <a:latin typeface="Arial"/>
+              </a:rPr>
+              <a:t>3</a:t>
+            </a:r>
+          </a:p>
+        </p:txBody>
+      </p:sp>
+      <p:sp>
+        <p:nvSpPr>
+          <p:cNvPr id="29" name="Rectangle 28"/>
+          <p:cNvSpPr/>
+          <p:nvPr/>
+        </p:nvSpPr>
+        <p:spPr>
+          <a:xfrm>
+            <a:off x="1188720" y="4846320"/>
+            <a:ext cx="8778240" cy="1417320"/>
+          </a:xfrm>
+          <a:prstGeom prst="rect">
+            <a:avLst/>
+          </a:prstGeom>
+          <a:solidFill>
+            <a:srgbClr val="FFFFFF"/>
+          </a:solidFill>
+          <a:ln w="6350">
+            <a:solidFill>
+              <a:srgbClr val="E1E1E1"/>
+            </a:solidFill>
+          </a:ln>
+          <a:effectLst/>
+        </p:spPr>
+        <p:style>
+          <a:lnRef idx="1">
+            <a:schemeClr val="accent1"/>
+          </a:lnRef>
+          <a:fillRef idx="3">
+            <a:schemeClr val="accent1"/>
+          </a:fillRef>
+          <a:effectRef idx="2">
+            <a:schemeClr val="accent1"/>
+          </a:effectRef>
+          <a:fontRef idx="minor">
+            <a:schemeClr val="lt1"/>
+          </a:fontRef>
+        </p:style>
+        <p:txBody>
+          <a:bodyPr rtlCol="0" anchor="ctr"/>
+          <a:lstStyle/>
+          <a:p>
+            <a:pPr algn="ctr"/>
+          </a:p>
+        </p:txBody>
+      </p:sp>
+      <p:sp>
+        <p:nvSpPr>
+          <p:cNvPr id="30" name="TextBox 29"/>
+          <p:cNvSpPr txBox="1"/>
+          <p:nvPr/>
+        </p:nvSpPr>
+        <p:spPr>
+          <a:xfrm>
+            <a:off x="1371600" y="4937759"/>
+            <a:ext cx="8503920" cy="365760"/>
           </a:xfrm>
           <a:prstGeom prst="rect">
             <a:avLst/>
@@ -7614,58 +10971,209 @@
           <a:p>
             <a:pPr algn="l"/>
             <a:r>
-              <a:rPr sz="2200" b="0">
+              <a:rPr sz="1400" b="1" i="0">
+                <a:solidFill>
+                  <a:srgbClr val="051C2C"/>
+                </a:solidFill>
+                <a:latin typeface="Arial"/>
+              </a:rPr>
+              <a:t>Asignación diferenciada de camas y recursos por complejidad clínica</a:t>
+            </a:r>
+          </a:p>
+        </p:txBody>
+      </p:sp>
+      <p:sp>
+        <p:nvSpPr>
+          <p:cNvPr id="31" name="TextBox 30"/>
+          <p:cNvSpPr txBox="1"/>
+          <p:nvPr/>
+        </p:nvSpPr>
+        <p:spPr>
+          <a:xfrm>
+            <a:off x="1371600" y="5349240"/>
+            <a:ext cx="8503920" cy="365760"/>
+          </a:xfrm>
+          <a:prstGeom prst="rect">
+            <a:avLst/>
+          </a:prstGeom>
+          <a:noFill/>
+        </p:spPr>
+        <p:txBody>
+          <a:bodyPr wrap="square" anchor="t" lIns="0" rIns="0" tIns="0" bIns="0">
+            <a:spAutoFit/>
+          </a:bodyPr>
+          <a:lstStyle/>
+          <a:p>
+            <a:pPr algn="l"/>
+            <a:r>
+              <a:rPr sz="1100" b="0" i="0">
+                <a:solidFill>
+                  <a:srgbClr val="4A4A4A"/>
+                </a:solidFill>
+                <a:latin typeface="Arial"/>
+              </a:rPr>
+              <a:t>Acción · Pacientes con múltiples diagnósticos requieren mayor capacidad estimada</a:t>
+            </a:r>
+          </a:p>
+        </p:txBody>
+      </p:sp>
+      <p:sp>
+        <p:nvSpPr>
+          <p:cNvPr id="32" name="TextBox 31"/>
+          <p:cNvSpPr txBox="1"/>
+          <p:nvPr/>
+        </p:nvSpPr>
+        <p:spPr>
+          <a:xfrm>
+            <a:off x="1371600" y="5715000"/>
+            <a:ext cx="8503920" cy="365760"/>
+          </a:xfrm>
+          <a:prstGeom prst="rect">
+            <a:avLst/>
+          </a:prstGeom>
+          <a:noFill/>
+        </p:spPr>
+        <p:txBody>
+          <a:bodyPr wrap="square" anchor="t" lIns="0" rIns="0" tIns="0" bIns="0">
+            <a:spAutoFit/>
+          </a:bodyPr>
+          <a:lstStyle/>
+          <a:p>
+            <a:pPr algn="l"/>
+            <a:r>
+              <a:rPr sz="1100" b="0" i="1">
+                <a:solidFill>
+                  <a:srgbClr val="8E8E8E"/>
+                </a:solidFill>
+                <a:latin typeface="Arial"/>
+              </a:rPr>
+              <a:t>Soporte · Mejora la planeación y reduce sub-asignación</a:t>
+            </a:r>
+          </a:p>
+        </p:txBody>
+      </p:sp>
+      <p:sp>
+        <p:nvSpPr>
+          <p:cNvPr id="33" name="Rectangle 32"/>
+          <p:cNvSpPr/>
+          <p:nvPr/>
+        </p:nvSpPr>
+        <p:spPr>
+          <a:xfrm>
+            <a:off x="10058400" y="4846320"/>
+            <a:ext cx="1691640" cy="1417320"/>
+          </a:xfrm>
+          <a:prstGeom prst="rect">
+            <a:avLst/>
+          </a:prstGeom>
+          <a:solidFill>
+            <a:srgbClr val="00A9E0"/>
+          </a:solidFill>
+          <a:ln>
+            <a:noFill/>
+          </a:ln>
+          <a:effectLst/>
+        </p:spPr>
+        <p:style>
+          <a:lnRef idx="1">
+            <a:schemeClr val="accent1"/>
+          </a:lnRef>
+          <a:fillRef idx="3">
+            <a:schemeClr val="accent1"/>
+          </a:fillRef>
+          <a:effectRef idx="2">
+            <a:schemeClr val="accent1"/>
+          </a:effectRef>
+          <a:fontRef idx="minor">
+            <a:schemeClr val="lt1"/>
+          </a:fontRef>
+        </p:style>
+        <p:txBody>
+          <a:bodyPr rtlCol="0" anchor="ctr"/>
+          <a:lstStyle/>
+          <a:p>
+            <a:pPr algn="ctr"/>
+          </a:p>
+        </p:txBody>
+      </p:sp>
+      <p:sp>
+        <p:nvSpPr>
+          <p:cNvPr id="34" name="TextBox 33"/>
+          <p:cNvSpPr txBox="1"/>
+          <p:nvPr/>
+        </p:nvSpPr>
+        <p:spPr>
+          <a:xfrm>
+            <a:off x="10058400" y="4983480"/>
+            <a:ext cx="1691640" cy="457200"/>
+          </a:xfrm>
+          <a:prstGeom prst="rect">
+            <a:avLst/>
+          </a:prstGeom>
+          <a:noFill/>
+        </p:spPr>
+        <p:txBody>
+          <a:bodyPr wrap="square" anchor="t" lIns="0" rIns="0" tIns="0" bIns="0">
+            <a:spAutoFit/>
+          </a:bodyPr>
+          <a:lstStyle/>
+          <a:p>
+            <a:pPr algn="ctr"/>
+            <a:r>
+              <a:rPr sz="800" b="1" i="0">
                 <a:solidFill>
                   <a:srgbClr val="FFFFFF"/>
                 </a:solidFill>
-                <a:latin typeface="Helvetica"/>
-              </a:rPr>
-              <a:t>concentran buena parte del riesgo operativo del hospital.</a:t>
-            </a:r>
-          </a:p>
-        </p:txBody>
-      </p:sp>
-      <p:sp>
-        <p:nvSpPr>
-          <p:cNvPr id="7" name="TextBox 6"/>
-          <p:cNvSpPr txBox="1"/>
-          <p:nvPr/>
-        </p:nvSpPr>
-        <p:spPr>
-          <a:xfrm>
-            <a:off x="731520" y="5303520"/>
-            <a:ext cx="10728655" cy="1097280"/>
-          </a:xfrm>
-          <a:prstGeom prst="rect">
-            <a:avLst/>
-          </a:prstGeom>
-          <a:noFill/>
-        </p:spPr>
-        <p:txBody>
-          <a:bodyPr wrap="square" anchor="t" lIns="0" rIns="0" tIns="0" bIns="0">
-            <a:spAutoFit/>
-          </a:bodyPr>
-          <a:lstStyle/>
-          <a:p>
-            <a:pPr algn="l"/>
-            <a:r>
-              <a:rPr sz="1600" b="0">
+                <a:latin typeface="Arial"/>
+              </a:rPr>
+              <a:t>IMPACTO</a:t>
+            </a:r>
+          </a:p>
+          <a:p>
+            <a:pPr algn="ctr"/>
+            <a:r>
+              <a:rPr sz="800" b="1" i="0">
                 <a:solidFill>
                   <a:srgbClr val="FFFFFF"/>
                 </a:solidFill>
-                <a:latin typeface="Helvetica"/>
-              </a:rPr>
-              <a:t>Su identificación temprana es la palanca más efectiva</a:t>
-            </a:r>
-            <a:br/>
-            <a:r>
-              <a:rPr sz="1600" b="0">
+                <a:latin typeface="Arial"/>
+              </a:rPr>
+              <a:t>ESPERADO</a:t>
+            </a:r>
+          </a:p>
+        </p:txBody>
+      </p:sp>
+      <p:sp>
+        <p:nvSpPr>
+          <p:cNvPr id="35" name="TextBox 34"/>
+          <p:cNvSpPr txBox="1"/>
+          <p:nvPr/>
+        </p:nvSpPr>
+        <p:spPr>
+          <a:xfrm>
+            <a:off x="10058400" y="5394959"/>
+            <a:ext cx="1691640" cy="640080"/>
+          </a:xfrm>
+          <a:prstGeom prst="rect">
+            <a:avLst/>
+          </a:prstGeom>
+          <a:noFill/>
+        </p:spPr>
+        <p:txBody>
+          <a:bodyPr wrap="square" anchor="ctr" lIns="0" rIns="0" tIns="0" bIns="0">
+            <a:spAutoFit/>
+          </a:bodyPr>
+          <a:lstStyle/>
+          <a:p>
+            <a:pPr algn="ctr"/>
+            <a:r>
+              <a:rPr sz="2200" b="1" i="0">
                 <a:solidFill>
                   <a:srgbClr val="FFFFFF"/>
                 </a:solidFill>
-                <a:latin typeface="Helvetica"/>
-              </a:rPr>
-              <a:t>para reducir readmisiones, optimizar camas y mejorar el seguimiento.</a:t>
+                <a:latin typeface="Arial"/>
+              </a:rPr>
+              <a:t>MEDIO</a:t>
             </a:r>
           </a:p>
         </p:txBody>
